--- a/pptx/Module16_Sécurité_RGPD_chiffrement.pptx
+++ b/pptx/Module16_Sécurité_RGPD_chiffrement.pptx
@@ -12,9 +12,10 @@
     <p:sldId id="260" r:id="rId6"/>
     <p:sldId id="261" r:id="rId7"/>
     <p:sldId id="262" r:id="rId8"/>
+    <p:sldId id="263" r:id="rId9"/>
   </p:sldIdLst>
   <p:notesMasterIdLst>
-    <p:notesMasterId r:id="rId9"/>
+    <p:notesMasterId r:id="rId10"/>
   </p:notesMasterIdLst>
   <p:sldSz cx="9144000" cy="5143500"/>
   <p:notesSz cx="5143500" cy="9144000"/>
@@ -596,7 +597,7 @@
           <a:p>
             <a:r>
               <a:rPr lang="en-US" dirty="0"/>
-              <a:t/>
+              <a:t>Toujours vérifier les droits après GRANT avec SHOW GRANTS.</a:t>
             </a:r>
             <a:endParaRPr lang="en-US" dirty="0"/>
           </a:p>
@@ -684,7 +685,7 @@
           <a:p>
             <a:r>
               <a:rPr lang="en-US" dirty="0"/>
-              <a:t/>
+              <a:t>Exercice : dessiner la matrice de droits au tableau et vérifier que chaque rôle a le minimum nécessaire.</a:t>
             </a:r>
             <a:endParaRPr lang="en-US" dirty="0"/>
           </a:p>
@@ -772,7 +773,7 @@
           <a:p>
             <a:r>
               <a:rPr lang="en-US" dirty="0"/>
-              <a:t/>
+              <a:t>En Suisse, la LPD (Loi sur la Protection des Données) s'aligne sur le RGPD européen.</a:t>
             </a:r>
             <a:endParaRPr lang="en-US" dirty="0"/>
           </a:p>
@@ -860,7 +861,7 @@
           <a:p>
             <a:r>
               <a:rPr lang="en-US" dirty="0"/>
-              <a:t/>
+              <a:t>D2 est un critère Distinction. Les étudiants doivent ARGUMENTER, pas juste décrire.</a:t>
             </a:r>
             <a:endParaRPr lang="en-US" dirty="0"/>
           </a:p>
@@ -948,7 +949,7 @@
           <a:p>
             <a:r>
               <a:rPr lang="en-US" dirty="0"/>
-              <a:t/>
+              <a:t>Ce module clôture la LO2. L'étudiant a maintenant un système complet avec SQL + sécurité.</a:t>
             </a:r>
             <a:endParaRPr lang="en-US" dirty="0"/>
           </a:p>
@@ -1060,6 +1061,94 @@
             <a:fld id="{F7021451-1387-4CA6-816F-3879F97B5CBC}" type="slidenum">
               <a:rPr lang="en-US"/>
               <a:t>7</a:t>
+            </a:fld>
+            <a:endParaRPr lang="en-US"/>
+          </a:p>
+        </p:txBody>
+      </p:sp>
+    </p:spTree>
+    <p:extLst>
+      <p:ext uri="{BB962C8B-B14F-4D97-AF65-F5344CB8AC3E}">
+        <p14:creationId xmlns:p14="http://schemas.microsoft.com/office/powerpoint/2010/main" val="1024086991"/>
+      </p:ext>
+    </p:extLst>
+  </p:cSld>
+  <p:clrMapOvr>
+    <a:masterClrMapping/>
+  </p:clrMapOvr>
+</p:notes>
+</file>
+
+<file path=ppt/notesSlides/notesSlide8.xml><?xml version="1.0" encoding="utf-8"?>
+<p:notes xmlns:a="http://schemas.openxmlformats.org/drawingml/2006/main" xmlns:r="http://schemas.openxmlformats.org/officeDocument/2006/relationships" xmlns:p="http://schemas.openxmlformats.org/presentationml/2006/main">
+  <p:cSld>
+    <p:spTree>
+      <p:nvGrpSpPr>
+        <p:cNvPr id="1" name=""/>
+        <p:cNvGrpSpPr/>
+        <p:nvPr/>
+      </p:nvGrpSpPr>
+      <p:grpSpPr>
+        <a:xfrm>
+          <a:off x="0" y="0"/>
+          <a:ext cx="0" cy="0"/>
+          <a:chOff x="0" y="0"/>
+          <a:chExt cx="0" cy="0"/>
+        </a:xfrm>
+      </p:grpSpPr>
+      <p:sp>
+        <p:nvSpPr>
+          <p:cNvPr id="2" name="Slide Image Placeholder 1"/>
+          <p:cNvSpPr>
+            <a:spLocks noGrp="1" noRot="1" noChangeAspect="1"/>
+          </p:cNvSpPr>
+          <p:nvPr>
+            <p:ph type="sldImg"/>
+          </p:nvPr>
+        </p:nvSpPr>
+        <p:spPr/>
+      </p:sp>
+      <p:sp>
+        <p:nvSpPr>
+          <p:cNvPr id="3" name="Notes Placeholder 2"/>
+          <p:cNvSpPr>
+            <a:spLocks noGrp="1"/>
+          </p:cNvSpPr>
+          <p:nvPr>
+            <p:ph type="body" idx="1"/>
+          </p:nvPr>
+        </p:nvSpPr>
+        <p:spPr/>
+        <p:txBody>
+          <a:bodyPr/>
+          <a:lstStyle/>
+          <a:p>
+            <a:r>
+              <a:rPr lang="en-US" dirty="0"/>
+              <a:t/>
+            </a:r>
+            <a:endParaRPr lang="en-US" dirty="0"/>
+          </a:p>
+        </p:txBody>
+      </p:sp>
+      <p:sp>
+        <p:nvSpPr>
+          <p:cNvPr id="4" name="Slide Number Placeholder 3"/>
+          <p:cNvSpPr>
+            <a:spLocks noGrp="1"/>
+          </p:cNvSpPr>
+          <p:nvPr>
+            <p:ph type="sldNum" sz="quarter" idx="10"/>
+          </p:nvPr>
+        </p:nvSpPr>
+        <p:spPr/>
+        <p:txBody>
+          <a:bodyPr/>
+          <a:lstStyle/>
+          <a:p>
+            <a:fld id="{F7021451-1387-4CA6-816F-3879F97B5CBC}" type="slidenum">
+              <a:rPr lang="en-US"/>
+              <a:t>8</a:t>
             </a:fld>
             <a:endParaRPr lang="en-US"/>
           </a:p>
@@ -1445,7 +1534,7 @@
         </p:blipFill>
         <p:spPr>
           <a:xfrm>
-            <a:off x="3931920" y="457200"/>
+            <a:off x="3931920" y="365760"/>
             <a:ext cx="1280160" cy="1280160"/>
           </a:xfrm>
           <a:prstGeom prst="rect">
@@ -1461,7 +1550,7 @@
         </p:nvSpPr>
         <p:spPr>
           <a:xfrm>
-            <a:off x="457200" y="1828800"/>
+            <a:off x="457200" y="1737360"/>
             <a:ext cx="8229600" cy="457200"/>
           </a:xfrm>
           <a:prstGeom prst="rect">
@@ -1500,8 +1589,8 @@
         </p:nvSpPr>
         <p:spPr>
           <a:xfrm>
-            <a:off x="457200" y="2286000"/>
-            <a:ext cx="8229600" cy="822960"/>
+            <a:off x="274320" y="2194560"/>
+            <a:ext cx="8595360" cy="822960"/>
           </a:xfrm>
           <a:prstGeom prst="rect">
             <a:avLst/>
@@ -1517,7 +1606,7 @@
               <a:buNone/>
             </a:pPr>
             <a:r>
-              <a:rPr lang="en-US" sz="3400" b="1" dirty="0">
+              <a:rPr lang="en-US" sz="3200" b="1" dirty="0">
                 <a:solidFill>
                   <a:srgbClr val="FFFFFF"/>
                 </a:solidFill>
@@ -1525,9 +1614,9 @@
                 <a:ea typeface="Trebuchet MS" pitchFamily="34" charset="-122"/>
                 <a:cs typeface="Trebuchet MS" pitchFamily="34" charset="-120"/>
               </a:rPr>
-              <a:t>Sécurité, RGPD, chiffrement</a:t>
-            </a:r>
-            <a:endParaRPr lang="en-US" sz="3400" dirty="0"/>
+              <a:t>Sécurité RGPD chiffrement</a:t>
+            </a:r>
+            <a:endParaRPr lang="en-US" sz="3200" dirty="0"/>
           </a:p>
         </p:txBody>
       </p:sp>
@@ -1539,7 +1628,7 @@
         </p:nvSpPr>
         <p:spPr>
           <a:xfrm>
-            <a:off x="457200" y="3108960"/>
+            <a:off x="457200" y="3017520"/>
             <a:ext cx="8229600" cy="457200"/>
           </a:xfrm>
           <a:prstGeom prst="rect">
@@ -1556,7 +1645,7 @@
               <a:buNone/>
             </a:pPr>
             <a:r>
-              <a:rPr lang="en-US" sz="1600" dirty="0">
+              <a:rPr lang="en-US" sz="1500" dirty="0">
                 <a:solidFill>
                   <a:srgbClr val="CCCCCC"/>
                 </a:solidFill>
@@ -1564,9 +1653,9 @@
                 <a:ea typeface="Calibri" pitchFamily="34" charset="-122"/>
                 <a:cs typeface="Calibri" pitchFamily="34" charset="-120"/>
               </a:rPr>
-              <a:t>GRANT, REVOKE, moindre privilège</a:t>
-            </a:r>
-            <a:endParaRPr lang="en-US" sz="1600" dirty="0"/>
+              <a:t>GRANT · REVOKE · Moindre privilège · AES</a:t>
+            </a:r>
+            <a:endParaRPr lang="en-US" sz="1500" dirty="0"/>
           </a:p>
         </p:txBody>
       </p:sp>
@@ -1597,54 +1686,15 @@
             <a:r>
               <a:rPr lang="en-US" sz="1100" dirty="0">
                 <a:solidFill>
-                  <a:srgbClr val="AAAACC"/>
+                  <a:srgbClr val="AA99CC"/>
                 </a:solidFill>
                 <a:latin typeface="Calibri" pitchFamily="34" charset="0"/>
                 <a:ea typeface="Calibri" pitchFamily="34" charset="-122"/>
                 <a:cs typeface="Calibri" pitchFamily="34" charset="-120"/>
               </a:rPr>
-              <a:t>Unit 4 — Database Design &amp; Development | SwissSound Studios</a:t>
+              <a:t>SwissSound Studios | BTEC: M2 D2 | LO2</a:t>
             </a:r>
             <a:endParaRPr lang="en-US" sz="1100" dirty="0"/>
-          </a:p>
-        </p:txBody>
-      </p:sp>
-      <p:sp>
-        <p:nvSpPr>
-          <p:cNvPr id="8" name="Text 5"/>
-          <p:cNvSpPr/>
-          <p:nvPr/>
-        </p:nvSpPr>
-        <p:spPr>
-          <a:xfrm>
-            <a:off x="457200" y="4434840"/>
-            <a:ext cx="8229600" cy="274320"/>
-          </a:xfrm>
-          <a:prstGeom prst="rect">
-            <a:avLst/>
-          </a:prstGeom>
-          <a:noFill/>
-          <a:ln/>
-        </p:spPr>
-        <p:txBody>
-          <a:bodyPr wrap="square" lIns="0" tIns="0" rIns="0" bIns="0" rtlCol="0" anchor="ctr"/>
-          <a:lstStyle/>
-          <a:p>
-            <a:pPr algn="ctr" indent="0" marL="0">
-              <a:buNone/>
-            </a:pPr>
-            <a:r>
-              <a:rPr lang="en-US" sz="1000" dirty="0">
-                <a:solidFill>
-                  <a:srgbClr val="8888AA"/>
-                </a:solidFill>
-                <a:latin typeface="Calibri" pitchFamily="34" charset="0"/>
-                <a:ea typeface="Calibri" pitchFamily="34" charset="-122"/>
-                <a:cs typeface="Calibri" pitchFamily="34" charset="-120"/>
-              </a:rPr>
-              <a:t>BTEC : M2 D2 | LO2</a:t>
-            </a:r>
-            <a:endParaRPr lang="en-US" sz="1000" dirty="0"/>
           </a:p>
         </p:txBody>
       </p:sp>
@@ -1689,7 +1739,7 @@
         <p:spPr>
           <a:xfrm>
             <a:off x="0" y="0"/>
-            <a:ext cx="9144000" cy="73152"/>
+            <a:ext cx="9144000" cy="54864"/>
           </a:xfrm>
           <a:prstGeom prst="rect">
             <a:avLst/>
@@ -1708,8 +1758,8 @@
         </p:nvSpPr>
         <p:spPr>
           <a:xfrm>
-            <a:off x="457200" y="228600"/>
-            <a:ext cx="8229600" cy="640080"/>
+            <a:off x="457200" y="182880"/>
+            <a:ext cx="8229600" cy="594360"/>
           </a:xfrm>
           <a:prstGeom prst="rect">
             <a:avLst/>
@@ -1725,7 +1775,7 @@
               <a:buNone/>
             </a:pPr>
             <a:r>
-              <a:rPr lang="en-US" sz="2600" b="1" dirty="0">
+              <a:rPr lang="en-US" sz="2400" b="1" dirty="0">
                 <a:solidFill>
                   <a:srgbClr val="0D47A1"/>
                 </a:solidFill>
@@ -1735,7 +1785,7 @@
               </a:rPr>
               <a:t>Gestion des utilisateurs MySQL</a:t>
             </a:r>
-            <a:endParaRPr lang="en-US" sz="2600" dirty="0"/>
+            <a:endParaRPr lang="en-US" sz="2400" dirty="0"/>
           </a:p>
         </p:txBody>
       </p:sp>
@@ -1747,8 +1797,8 @@
         </p:nvSpPr>
         <p:spPr>
           <a:xfrm>
-            <a:off x="457200" y="1051560"/>
-            <a:ext cx="8229600" cy="640080"/>
+            <a:off x="457200" y="914400"/>
+            <a:ext cx="8229600" cy="521208"/>
           </a:xfrm>
           <a:prstGeom prst="rect">
             <a:avLst/>
@@ -1774,8 +1824,8 @@
         </p:nvSpPr>
         <p:spPr>
           <a:xfrm>
-            <a:off x="457200" y="1051560"/>
-            <a:ext cx="54864" cy="640080"/>
+            <a:off x="457200" y="914400"/>
+            <a:ext cx="45720" cy="521208"/>
           </a:xfrm>
           <a:prstGeom prst="rect">
             <a:avLst/>
@@ -1794,8 +1844,8 @@
         </p:nvSpPr>
         <p:spPr>
           <a:xfrm>
-            <a:off x="731520" y="1051560"/>
-            <a:ext cx="7772400" cy="640080"/>
+            <a:off x="685800" y="914400"/>
+            <a:ext cx="7818120" cy="521208"/>
           </a:xfrm>
           <a:prstGeom prst="rect">
             <a:avLst/>
@@ -1811,7 +1861,7 @@
               <a:buNone/>
             </a:pPr>
             <a:r>
-              <a:rPr lang="en-US" sz="1100" dirty="0">
+              <a:rPr lang="en-US" sz="1000" dirty="0">
                 <a:solidFill>
                   <a:srgbClr val="0D47A1"/>
                 </a:solidFill>
@@ -1819,9 +1869,9 @@
                 <a:ea typeface="JetBrains Mono" pitchFamily="34" charset="-122"/>
                 <a:cs typeface="JetBrains Mono" pitchFamily="34" charset="-120"/>
               </a:rPr>
-              <a:t>CREATE USER 'comptable'@'localhost' IDENTIFIED BY 'MotDePasse!';</a:t>
-            </a:r>
-            <a:endParaRPr lang="en-US" sz="1100" dirty="0"/>
+              <a:t>CREATE USER 'comptable'@'localhost' IDENTIFIED BY 'C0mpt@ble!';</a:t>
+            </a:r>
+            <a:endParaRPr lang="en-US" sz="1000" dirty="0"/>
           </a:p>
         </p:txBody>
       </p:sp>
@@ -1833,8 +1883,8 @@
         </p:nvSpPr>
         <p:spPr>
           <a:xfrm>
-            <a:off x="457200" y="1783080"/>
-            <a:ext cx="8229600" cy="640080"/>
+            <a:off x="457200" y="1463040"/>
+            <a:ext cx="8229600" cy="521208"/>
           </a:xfrm>
           <a:prstGeom prst="rect">
             <a:avLst/>
@@ -1860,8 +1910,8 @@
         </p:nvSpPr>
         <p:spPr>
           <a:xfrm>
-            <a:off x="457200" y="1783080"/>
-            <a:ext cx="54864" cy="640080"/>
+            <a:off x="457200" y="1463040"/>
+            <a:ext cx="45720" cy="521208"/>
           </a:xfrm>
           <a:prstGeom prst="rect">
             <a:avLst/>
@@ -1880,8 +1930,8 @@
         </p:nvSpPr>
         <p:spPr>
           <a:xfrm>
-            <a:off x="731520" y="1783080"/>
-            <a:ext cx="7772400" cy="640080"/>
+            <a:off x="685800" y="1463040"/>
+            <a:ext cx="7818120" cy="521208"/>
           </a:xfrm>
           <a:prstGeom prst="rect">
             <a:avLst/>
@@ -1897,7 +1947,7 @@
               <a:buNone/>
             </a:pPr>
             <a:r>
-              <a:rPr lang="en-US" sz="1100" dirty="0">
+              <a:rPr lang="en-US" sz="1000" dirty="0">
                 <a:solidFill>
                   <a:srgbClr val="0D47A1"/>
                 </a:solidFill>
@@ -1905,9 +1955,9 @@
                 <a:ea typeface="JetBrains Mono" pitchFamily="34" charset="-122"/>
                 <a:cs typeface="JetBrains Mono" pitchFamily="34" charset="-120"/>
               </a:rPr>
-              <a:t>GRANT SELECT, INSERT ON swisssound.facture TO 'comptable';</a:t>
-            </a:r>
-            <a:endParaRPr lang="en-US" sz="1100" dirty="0"/>
+              <a:t>GRANT SELECT, INSERT ON swisssound.facture TO 'comptable'@'localhost';</a:t>
+            </a:r>
+            <a:endParaRPr lang="en-US" sz="1000" dirty="0"/>
           </a:p>
         </p:txBody>
       </p:sp>
@@ -1919,8 +1969,8 @@
         </p:nvSpPr>
         <p:spPr>
           <a:xfrm>
-            <a:off x="457200" y="2514600"/>
-            <a:ext cx="8229600" cy="640080"/>
+            <a:off x="457200" y="2011680"/>
+            <a:ext cx="8229600" cy="521208"/>
           </a:xfrm>
           <a:prstGeom prst="rect">
             <a:avLst/>
@@ -1946,8 +1996,8 @@
         </p:nvSpPr>
         <p:spPr>
           <a:xfrm>
-            <a:off x="457200" y="2514600"/>
-            <a:ext cx="54864" cy="640080"/>
+            <a:off x="457200" y="2011680"/>
+            <a:ext cx="45720" cy="521208"/>
           </a:xfrm>
           <a:prstGeom prst="rect">
             <a:avLst/>
@@ -1966,8 +2016,8 @@
         </p:nvSpPr>
         <p:spPr>
           <a:xfrm>
-            <a:off x="731520" y="2514600"/>
-            <a:ext cx="7772400" cy="640080"/>
+            <a:off x="685800" y="2011680"/>
+            <a:ext cx="7818120" cy="521208"/>
           </a:xfrm>
           <a:prstGeom prst="rect">
             <a:avLst/>
@@ -1983,7 +2033,7 @@
               <a:buNone/>
             </a:pPr>
             <a:r>
-              <a:rPr lang="en-US" sz="1100" dirty="0">
+              <a:rPr lang="en-US" sz="1000" dirty="0">
                 <a:solidFill>
                   <a:srgbClr val="0D47A1"/>
                 </a:solidFill>
@@ -1991,9 +2041,9 @@
                 <a:ea typeface="JetBrains Mono" pitchFamily="34" charset="-122"/>
                 <a:cs typeface="JetBrains Mono" pitchFamily="34" charset="-120"/>
               </a:rPr>
-              <a:t>REVOKE INSERT ON swisssound.facture FROM 'comptable';</a:t>
-            </a:r>
-            <a:endParaRPr lang="en-US" sz="1100" dirty="0"/>
+              <a:t>REVOKE INSERT ON swisssound.facture FROM 'comptable'@'localhost';</a:t>
+            </a:r>
+            <a:endParaRPr lang="en-US" sz="1000" dirty="0"/>
           </a:p>
         </p:txBody>
       </p:sp>
@@ -2005,8 +2055,8 @@
         </p:nvSpPr>
         <p:spPr>
           <a:xfrm>
-            <a:off x="457200" y="3246120"/>
-            <a:ext cx="8229600" cy="640080"/>
+            <a:off x="457200" y="2560320"/>
+            <a:ext cx="8229600" cy="521208"/>
           </a:xfrm>
           <a:prstGeom prst="rect">
             <a:avLst/>
@@ -2032,8 +2082,8 @@
         </p:nvSpPr>
         <p:spPr>
           <a:xfrm>
-            <a:off x="457200" y="3246120"/>
-            <a:ext cx="54864" cy="640080"/>
+            <a:off x="457200" y="2560320"/>
+            <a:ext cx="45720" cy="521208"/>
           </a:xfrm>
           <a:prstGeom prst="rect">
             <a:avLst/>
@@ -2052,8 +2102,8 @@
         </p:nvSpPr>
         <p:spPr>
           <a:xfrm>
-            <a:off x="731520" y="3246120"/>
-            <a:ext cx="7772400" cy="640080"/>
+            <a:off x="685800" y="2560320"/>
+            <a:ext cx="7818120" cy="521208"/>
           </a:xfrm>
           <a:prstGeom prst="rect">
             <a:avLst/>
@@ -2069,7 +2119,7 @@
               <a:buNone/>
             </a:pPr>
             <a:r>
-              <a:rPr lang="en-US" sz="1100" dirty="0">
+              <a:rPr lang="en-US" sz="1000" dirty="0">
                 <a:solidFill>
                   <a:srgbClr val="0D47A1"/>
                 </a:solidFill>
@@ -2079,7 +2129,7 @@
               </a:rPr>
               <a:t>DROP USER 'comptable'@'localhost';</a:t>
             </a:r>
-            <a:endParaRPr lang="en-US" sz="1100" dirty="0"/>
+            <a:endParaRPr lang="en-US" sz="1000" dirty="0"/>
           </a:p>
         </p:txBody>
       </p:sp>
@@ -2091,8 +2141,8 @@
         </p:nvSpPr>
         <p:spPr>
           <a:xfrm>
-            <a:off x="457200" y="3977640"/>
-            <a:ext cx="8229600" cy="640080"/>
+            <a:off x="457200" y="3108960"/>
+            <a:ext cx="8229600" cy="521208"/>
           </a:xfrm>
           <a:prstGeom prst="rect">
             <a:avLst/>
@@ -2118,8 +2168,8 @@
         </p:nvSpPr>
         <p:spPr>
           <a:xfrm>
-            <a:off x="457200" y="3977640"/>
-            <a:ext cx="54864" cy="640080"/>
+            <a:off x="457200" y="3108960"/>
+            <a:ext cx="45720" cy="521208"/>
           </a:xfrm>
           <a:prstGeom prst="rect">
             <a:avLst/>
@@ -2138,8 +2188,8 @@
         </p:nvSpPr>
         <p:spPr>
           <a:xfrm>
-            <a:off x="731520" y="3977640"/>
-            <a:ext cx="7772400" cy="640080"/>
+            <a:off x="685800" y="3108960"/>
+            <a:ext cx="7818120" cy="521208"/>
           </a:xfrm>
           <a:prstGeom prst="rect">
             <a:avLst/>
@@ -2155,7 +2205,7 @@
               <a:buNone/>
             </a:pPr>
             <a:r>
-              <a:rPr lang="en-US" sz="1300" dirty="0">
+              <a:rPr lang="en-US" sz="1200" dirty="0">
                 <a:solidFill>
                   <a:srgbClr val="1A1A2E"/>
                 </a:solidFill>
@@ -2163,22 +2213,69 @@
                 <a:ea typeface="Calibri" pitchFamily="34" charset="-122"/>
                 <a:cs typeface="Calibri" pitchFamily="34" charset="-120"/>
               </a:rPr>
-              <a:t>FLUSH PRIVILEGES; (appliquer les changements)</a:t>
-            </a:r>
-            <a:endParaRPr lang="en-US" sz="1300" dirty="0"/>
-          </a:p>
-        </p:txBody>
-      </p:sp>
-      <p:sp>
-        <p:nvSpPr>
-          <p:cNvPr id="19" name="Text 17"/>
-          <p:cNvSpPr/>
-          <p:nvPr/>
-        </p:nvSpPr>
-        <p:spPr>
-          <a:xfrm>
-            <a:off x="8229600" y="4754880"/>
-            <a:ext cx="731520" cy="274320"/>
+              <a:t>FLUSH PRIVILEGES;  -- appliquer les changements</a:t>
+            </a:r>
+            <a:endParaRPr lang="en-US" sz="1200" dirty="0"/>
+          </a:p>
+        </p:txBody>
+      </p:sp>
+      <p:sp>
+        <p:nvSpPr>
+          <p:cNvPr id="19" name="Shape 17"/>
+          <p:cNvSpPr/>
+          <p:nvPr/>
+        </p:nvSpPr>
+        <p:spPr>
+          <a:xfrm>
+            <a:off x="457200" y="3657600"/>
+            <a:ext cx="8229600" cy="521208"/>
+          </a:xfrm>
+          <a:prstGeom prst="rect">
+            <a:avLst/>
+          </a:prstGeom>
+          <a:solidFill>
+            <a:srgbClr val="E3F2FD"/>
+          </a:solidFill>
+          <a:ln/>
+          <a:effectLst>
+            <a:outerShdw sx="100000" sy="100000" kx="0" ky="0" algn="bl" rotWithShape="0" blurRad="50800" dist="25400" dir="8100000">
+              <a:srgbClr val="000000">
+                <a:alpha val="12000"/>
+              </a:srgbClr>
+            </a:outerShdw>
+          </a:effectLst>
+        </p:spPr>
+      </p:sp>
+      <p:sp>
+        <p:nvSpPr>
+          <p:cNvPr id="20" name="Shape 18"/>
+          <p:cNvSpPr/>
+          <p:nvPr/>
+        </p:nvSpPr>
+        <p:spPr>
+          <a:xfrm>
+            <a:off x="457200" y="3657600"/>
+            <a:ext cx="45720" cy="521208"/>
+          </a:xfrm>
+          <a:prstGeom prst="rect">
+            <a:avLst/>
+          </a:prstGeom>
+          <a:solidFill>
+            <a:srgbClr val="1565C0"/>
+          </a:solidFill>
+          <a:ln/>
+        </p:spPr>
+      </p:sp>
+      <p:sp>
+        <p:nvSpPr>
+          <p:cNvPr id="21" name="Text 19"/>
+          <p:cNvSpPr/>
+          <p:nvPr/>
+        </p:nvSpPr>
+        <p:spPr>
+          <a:xfrm>
+            <a:off x="685800" y="3657600"/>
+            <a:ext cx="7818120" cy="521208"/>
           </a:xfrm>
           <a:prstGeom prst="rect">
             <a:avLst/>
@@ -2190,21 +2287,21 @@
           <a:bodyPr wrap="square" lIns="0" tIns="0" rIns="0" bIns="0" rtlCol="0" anchor="ctr"/>
           <a:lstStyle/>
           <a:p>
-            <a:pPr algn="r" indent="0" marL="0">
+            <a:pPr indent="0" marL="0">
               <a:buNone/>
             </a:pPr>
             <a:r>
-              <a:rPr lang="en-US" sz="900" dirty="0">
+              <a:rPr lang="en-US" sz="1200" dirty="0">
                 <a:solidFill>
-                  <a:srgbClr val="AAAAAA"/>
+                  <a:srgbClr val="1A1A2E"/>
                 </a:solidFill>
                 <a:latin typeface="Calibri" pitchFamily="34" charset="0"/>
                 <a:ea typeface="Calibri" pitchFamily="34" charset="-122"/>
                 <a:cs typeface="Calibri" pitchFamily="34" charset="-120"/>
               </a:rPr>
-              <a:t>2/6</a:t>
-            </a:r>
-            <a:endParaRPr lang="en-US" sz="900" dirty="0"/>
+              <a:t>SHOW GRANTS FOR 'comptable'@'localhost';  -- vérifier les droits</a:t>
+            </a:r>
+            <a:endParaRPr lang="en-US" sz="1200" dirty="0"/>
           </a:p>
         </p:txBody>
       </p:sp>
@@ -2249,7 +2346,7 @@
         <p:spPr>
           <a:xfrm>
             <a:off x="0" y="0"/>
-            <a:ext cx="9144000" cy="73152"/>
+            <a:ext cx="9144000" cy="54864"/>
           </a:xfrm>
           <a:prstGeom prst="rect">
             <a:avLst/>
@@ -2268,8 +2365,8 @@
         </p:nvSpPr>
         <p:spPr>
           <a:xfrm>
-            <a:off x="457200" y="228600"/>
-            <a:ext cx="8229600" cy="640080"/>
+            <a:off x="457200" y="182880"/>
+            <a:ext cx="8229600" cy="594360"/>
           </a:xfrm>
           <a:prstGeom prst="rect">
             <a:avLst/>
@@ -2285,7 +2382,7 @@
               <a:buNone/>
             </a:pPr>
             <a:r>
-              <a:rPr lang="en-US" sz="2600" b="1" dirty="0">
+              <a:rPr lang="en-US" sz="2400" b="1" dirty="0">
                 <a:solidFill>
                   <a:srgbClr val="0D47A1"/>
                 </a:solidFill>
@@ -2293,9 +2390,9 @@
                 <a:ea typeface="Trebuchet MS" pitchFamily="34" charset="-122"/>
                 <a:cs typeface="Trebuchet MS" pitchFamily="34" charset="-120"/>
               </a:rPr>
-              <a:t>Principe du moindre privilège</a:t>
-            </a:r>
-            <a:endParaRPr lang="en-US" sz="2600" dirty="0"/>
+              <a:t>Principe du moindre privilège — SwissSound</a:t>
+            </a:r>
+            <a:endParaRPr lang="en-US" sz="2400" dirty="0"/>
           </a:p>
         </p:txBody>
       </p:sp>
@@ -2307,8 +2404,8 @@
         </p:nvSpPr>
         <p:spPr>
           <a:xfrm>
-            <a:off x="457200" y="1051560"/>
-            <a:ext cx="8229600" cy="579120"/>
+            <a:off x="457200" y="914400"/>
+            <a:ext cx="8229600" cy="521208"/>
           </a:xfrm>
           <a:prstGeom prst="rect">
             <a:avLst/>
@@ -2334,8 +2431,8 @@
         </p:nvSpPr>
         <p:spPr>
           <a:xfrm>
-            <a:off x="457200" y="1051560"/>
-            <a:ext cx="54864" cy="579120"/>
+            <a:off x="457200" y="914400"/>
+            <a:ext cx="45720" cy="521208"/>
           </a:xfrm>
           <a:prstGeom prst="rect">
             <a:avLst/>
@@ -2354,8 +2451,8 @@
         </p:nvSpPr>
         <p:spPr>
           <a:xfrm>
-            <a:off x="731520" y="1051560"/>
-            <a:ext cx="7772400" cy="579120"/>
+            <a:off x="685800" y="914400"/>
+            <a:ext cx="7818120" cy="521208"/>
           </a:xfrm>
           <a:prstGeom prst="rect">
             <a:avLst/>
@@ -2371,7 +2468,7 @@
               <a:buNone/>
             </a:pPr>
             <a:r>
-              <a:rPr lang="en-US" sz="1300" dirty="0">
+              <a:rPr lang="en-US" sz="1200" dirty="0">
                 <a:solidFill>
                   <a:srgbClr val="1A1A2E"/>
                 </a:solidFill>
@@ -2379,9 +2476,9 @@
                 <a:ea typeface="Calibri" pitchFamily="34" charset="-122"/>
                 <a:cs typeface="Calibri" pitchFamily="34" charset="-120"/>
               </a:rPr>
-              <a:t>Donner UNIQUEMENT les droits strictement nécessaires</a:t>
-            </a:r>
-            <a:endParaRPr lang="en-US" sz="1300" dirty="0"/>
+              <a:t>admin_studio : ALL PRIVILEGES (seul compte avec DELETE/DROP)</a:t>
+            </a:r>
+            <a:endParaRPr lang="en-US" sz="1200" dirty="0"/>
           </a:p>
         </p:txBody>
       </p:sp>
@@ -2393,8 +2490,8 @@
         </p:nvSpPr>
         <p:spPr>
           <a:xfrm>
-            <a:off x="457200" y="1661160"/>
-            <a:ext cx="8229600" cy="579120"/>
+            <a:off x="457200" y="1463040"/>
+            <a:ext cx="8229600" cy="521208"/>
           </a:xfrm>
           <a:prstGeom prst="rect">
             <a:avLst/>
@@ -2420,8 +2517,8 @@
         </p:nvSpPr>
         <p:spPr>
           <a:xfrm>
-            <a:off x="457200" y="1661160"/>
-            <a:ext cx="54864" cy="579120"/>
+            <a:off x="457200" y="1463040"/>
+            <a:ext cx="45720" cy="521208"/>
           </a:xfrm>
           <a:prstGeom prst="rect">
             <a:avLst/>
@@ -2440,8 +2537,8 @@
         </p:nvSpPr>
         <p:spPr>
           <a:xfrm>
-            <a:off x="731520" y="1661160"/>
-            <a:ext cx="7772400" cy="579120"/>
+            <a:off x="685800" y="1463040"/>
+            <a:ext cx="7818120" cy="521208"/>
           </a:xfrm>
           <a:prstGeom prst="rect">
             <a:avLst/>
@@ -2457,7 +2554,7 @@
               <a:buNone/>
             </a:pPr>
             <a:r>
-              <a:rPr lang="en-US" sz="1300" dirty="0">
+              <a:rPr lang="en-US" sz="1200" dirty="0">
                 <a:solidFill>
                   <a:srgbClr val="1A1A2E"/>
                 </a:solidFill>
@@ -2465,9 +2562,9 @@
                 <a:ea typeface="Calibri" pitchFamily="34" charset="-122"/>
                 <a:cs typeface="Calibri" pitchFamily="34" charset="-120"/>
               </a:rPr>
-              <a:t>admin_studio : ALL PRIVILEGES (seul admin)</a:t>
-            </a:r>
-            <a:endParaRPr lang="en-US" sz="1300" dirty="0"/>
+              <a:t>ingenieur_son : SELECT + INSERT + UPDATE sur sessions, SELECT salles/artistes</a:t>
+            </a:r>
+            <a:endParaRPr lang="en-US" sz="1200" dirty="0"/>
           </a:p>
         </p:txBody>
       </p:sp>
@@ -2479,8 +2576,8 @@
         </p:nvSpPr>
         <p:spPr>
           <a:xfrm>
-            <a:off x="457200" y="2270760"/>
-            <a:ext cx="8229600" cy="579120"/>
+            <a:off x="457200" y="2011680"/>
+            <a:ext cx="8229600" cy="521208"/>
           </a:xfrm>
           <a:prstGeom prst="rect">
             <a:avLst/>
@@ -2506,8 +2603,8 @@
         </p:nvSpPr>
         <p:spPr>
           <a:xfrm>
-            <a:off x="457200" y="2270760"/>
-            <a:ext cx="54864" cy="579120"/>
+            <a:off x="457200" y="2011680"/>
+            <a:ext cx="45720" cy="521208"/>
           </a:xfrm>
           <a:prstGeom prst="rect">
             <a:avLst/>
@@ -2526,8 +2623,8 @@
         </p:nvSpPr>
         <p:spPr>
           <a:xfrm>
-            <a:off x="731520" y="2270760"/>
-            <a:ext cx="7772400" cy="579120"/>
+            <a:off x="685800" y="2011680"/>
+            <a:ext cx="7818120" cy="521208"/>
           </a:xfrm>
           <a:prstGeom prst="rect">
             <a:avLst/>
@@ -2543,17 +2640,17 @@
               <a:buNone/>
             </a:pPr>
             <a:r>
-              <a:rPr lang="en-US" sz="1100" dirty="0">
+              <a:rPr lang="en-US" sz="1200" dirty="0">
                 <a:solidFill>
-                  <a:srgbClr val="0D47A1"/>
+                  <a:srgbClr val="1A1A2E"/>
                 </a:solidFill>
-                <a:latin typeface="JetBrains Mono" pitchFamily="34" charset="0"/>
-                <a:ea typeface="JetBrains Mono" pitchFamily="34" charset="-122"/>
-                <a:cs typeface="JetBrains Mono" pitchFamily="34" charset="-120"/>
+                <a:latin typeface="Calibri" pitchFamily="34" charset="0"/>
+                <a:ea typeface="Calibri" pitchFamily="34" charset="-122"/>
+                <a:cs typeface="Calibri" pitchFamily="34" charset="-120"/>
               </a:rPr>
-              <a:t>ingenieur_son : SELECT/INSERT/UPDATE sur sessions</a:t>
-            </a:r>
-            <a:endParaRPr lang="en-US" sz="1100" dirty="0"/>
+              <a:t>comptable : SELECT + INSERT + UPDATE sur factures, SELECT artistes/sessions</a:t>
+            </a:r>
+            <a:endParaRPr lang="en-US" sz="1200" dirty="0"/>
           </a:p>
         </p:txBody>
       </p:sp>
@@ -2565,8 +2662,8 @@
         </p:nvSpPr>
         <p:spPr>
           <a:xfrm>
-            <a:off x="457200" y="2880360"/>
-            <a:ext cx="8229600" cy="579120"/>
+            <a:off x="457200" y="2560320"/>
+            <a:ext cx="8229600" cy="521208"/>
           </a:xfrm>
           <a:prstGeom prst="rect">
             <a:avLst/>
@@ -2592,8 +2689,8 @@
         </p:nvSpPr>
         <p:spPr>
           <a:xfrm>
-            <a:off x="457200" y="2880360"/>
-            <a:ext cx="54864" cy="579120"/>
+            <a:off x="457200" y="2560320"/>
+            <a:ext cx="45720" cy="521208"/>
           </a:xfrm>
           <a:prstGeom prst="rect">
             <a:avLst/>
@@ -2612,8 +2709,8 @@
         </p:nvSpPr>
         <p:spPr>
           <a:xfrm>
-            <a:off x="731520" y="2880360"/>
-            <a:ext cx="7772400" cy="579120"/>
+            <a:off x="685800" y="2560320"/>
+            <a:ext cx="7818120" cy="521208"/>
           </a:xfrm>
           <a:prstGeom prst="rect">
             <a:avLst/>
@@ -2629,17 +2726,17 @@
               <a:buNone/>
             </a:pPr>
             <a:r>
-              <a:rPr lang="en-US" sz="1100" dirty="0">
+              <a:rPr lang="en-US" sz="1200" dirty="0">
                 <a:solidFill>
-                  <a:srgbClr val="0D47A1"/>
+                  <a:srgbClr val="1A1A2E"/>
                 </a:solidFill>
-                <a:latin typeface="JetBrains Mono" pitchFamily="34" charset="0"/>
-                <a:ea typeface="JetBrains Mono" pitchFamily="34" charset="-122"/>
-                <a:cs typeface="JetBrains Mono" pitchFamily="34" charset="-120"/>
+                <a:latin typeface="Calibri" pitchFamily="34" charset="0"/>
+                <a:ea typeface="Calibri" pitchFamily="34" charset="-122"/>
+                <a:cs typeface="Calibri" pitchFamily="34" charset="-120"/>
               </a:rPr>
-              <a:t>comptable : SELECT/INSERT/UPDATE sur factures</a:t>
-            </a:r>
-            <a:endParaRPr lang="en-US" sz="1100" dirty="0"/>
+              <a:t>reception : SELECT + INSERT + UPDATE sur artistes, SELECT genres</a:t>
+            </a:r>
+            <a:endParaRPr lang="en-US" sz="1200" dirty="0"/>
           </a:p>
         </p:txBody>
       </p:sp>
@@ -2651,8 +2748,8 @@
         </p:nvSpPr>
         <p:spPr>
           <a:xfrm>
-            <a:off x="457200" y="3489960"/>
-            <a:ext cx="8229600" cy="579120"/>
+            <a:off x="457200" y="3108960"/>
+            <a:ext cx="8229600" cy="521208"/>
           </a:xfrm>
           <a:prstGeom prst="rect">
             <a:avLst/>
@@ -2678,8 +2775,8 @@
         </p:nvSpPr>
         <p:spPr>
           <a:xfrm>
-            <a:off x="457200" y="3489960"/>
-            <a:ext cx="54864" cy="579120"/>
+            <a:off x="457200" y="3108960"/>
+            <a:ext cx="45720" cy="521208"/>
           </a:xfrm>
           <a:prstGeom prst="rect">
             <a:avLst/>
@@ -2698,8 +2795,8 @@
         </p:nvSpPr>
         <p:spPr>
           <a:xfrm>
-            <a:off x="731520" y="3489960"/>
-            <a:ext cx="7772400" cy="579120"/>
+            <a:off x="685800" y="3108960"/>
+            <a:ext cx="7818120" cy="521208"/>
           </a:xfrm>
           <a:prstGeom prst="rect">
             <a:avLst/>
@@ -2715,17 +2812,17 @@
               <a:buNone/>
             </a:pPr>
             <a:r>
-              <a:rPr lang="en-US" sz="1100" dirty="0">
+              <a:rPr lang="en-US" sz="1200" dirty="0">
                 <a:solidFill>
-                  <a:srgbClr val="0D47A1"/>
+                  <a:srgbClr val="1A1A2E"/>
                 </a:solidFill>
-                <a:latin typeface="JetBrains Mono" pitchFamily="34" charset="0"/>
-                <a:ea typeface="JetBrains Mono" pitchFamily="34" charset="-122"/>
-                <a:cs typeface="JetBrains Mono" pitchFamily="34" charset="-120"/>
+                <a:latin typeface="Calibri" pitchFamily="34" charset="0"/>
+                <a:ea typeface="Calibri" pitchFamily="34" charset="-122"/>
+                <a:cs typeface="Calibri" pitchFamily="34" charset="-120"/>
               </a:rPr>
-              <a:t>reception : SELECT/INSERT sur artistes</a:t>
-            </a:r>
-            <a:endParaRPr lang="en-US" sz="1100" dirty="0"/>
+              <a:t>JAMAIS : GRANT ALL TO everyone — faille de sécurité majeure !</a:t>
+            </a:r>
+            <a:endParaRPr lang="en-US" sz="1200" dirty="0"/>
           </a:p>
         </p:txBody>
       </p:sp>
@@ -2737,8 +2834,8 @@
         </p:nvSpPr>
         <p:spPr>
           <a:xfrm>
-            <a:off x="457200" y="4099560"/>
-            <a:ext cx="8229600" cy="579120"/>
+            <a:off x="457200" y="3657600"/>
+            <a:ext cx="8229600" cy="521208"/>
           </a:xfrm>
           <a:prstGeom prst="rect">
             <a:avLst/>
@@ -2764,8 +2861,8 @@
         </p:nvSpPr>
         <p:spPr>
           <a:xfrm>
-            <a:off x="457200" y="4099560"/>
-            <a:ext cx="54864" cy="579120"/>
+            <a:off x="457200" y="3657600"/>
+            <a:ext cx="45720" cy="521208"/>
           </a:xfrm>
           <a:prstGeom prst="rect">
             <a:avLst/>
@@ -2784,8 +2881,8 @@
         </p:nvSpPr>
         <p:spPr>
           <a:xfrm>
-            <a:off x="731520" y="4099560"/>
-            <a:ext cx="7772400" cy="579120"/>
+            <a:off x="685800" y="3657600"/>
+            <a:ext cx="7818120" cy="521208"/>
           </a:xfrm>
           <a:prstGeom prst="rect">
             <a:avLst/>
@@ -2801,56 +2898,103 @@
               <a:buNone/>
             </a:pPr>
             <a:r>
-              <a:rPr lang="en-US" sz="1100" dirty="0">
+              <a:rPr lang="en-US" sz="1200" dirty="0">
                 <a:solidFill>
-                  <a:srgbClr val="0D47A1"/>
-                </a:solidFill>
-                <a:latin typeface="JetBrains Mono" pitchFamily="34" charset="0"/>
-                <a:ea typeface="JetBrains Mono" pitchFamily="34" charset="-122"/>
-                <a:cs typeface="JetBrains Mono" pitchFamily="34" charset="-120"/>
-              </a:rPr>
-              <a:t>JAMAIS de GRANT ALL à tout le monde !</a:t>
-            </a:r>
-            <a:endParaRPr lang="en-US" sz="1100" dirty="0"/>
-          </a:p>
-        </p:txBody>
-      </p:sp>
-      <p:sp>
-        <p:nvSpPr>
-          <p:cNvPr id="22" name="Text 20"/>
-          <p:cNvSpPr/>
-          <p:nvPr/>
-        </p:nvSpPr>
-        <p:spPr>
-          <a:xfrm>
-            <a:off x="8229600" y="4754880"/>
-            <a:ext cx="731520" cy="274320"/>
-          </a:xfrm>
-          <a:prstGeom prst="rect">
-            <a:avLst/>
-          </a:prstGeom>
-          <a:noFill/>
-          <a:ln/>
-        </p:spPr>
-        <p:txBody>
-          <a:bodyPr wrap="square" lIns="0" tIns="0" rIns="0" bIns="0" rtlCol="0" anchor="ctr"/>
-          <a:lstStyle/>
-          <a:p>
-            <a:pPr algn="r" indent="0" marL="0">
-              <a:buNone/>
-            </a:pPr>
-            <a:r>
-              <a:rPr lang="en-US" sz="900" dirty="0">
-                <a:solidFill>
-                  <a:srgbClr val="AAAAAA"/>
+                  <a:srgbClr val="1A1A2E"/>
                 </a:solidFill>
                 <a:latin typeface="Calibri" pitchFamily="34" charset="0"/>
                 <a:ea typeface="Calibri" pitchFamily="34" charset="-122"/>
                 <a:cs typeface="Calibri" pitchFamily="34" charset="-120"/>
               </a:rPr>
-              <a:t>3/6</a:t>
-            </a:r>
-            <a:endParaRPr lang="en-US" sz="900" dirty="0"/>
+              <a:t>Chaque rôle = uniquement les droits nécessaires au travail</a:t>
+            </a:r>
+            <a:endParaRPr lang="en-US" sz="1200" dirty="0"/>
+          </a:p>
+        </p:txBody>
+      </p:sp>
+      <p:sp>
+        <p:nvSpPr>
+          <p:cNvPr id="22" name="Shape 20"/>
+          <p:cNvSpPr/>
+          <p:nvPr/>
+        </p:nvSpPr>
+        <p:spPr>
+          <a:xfrm>
+            <a:off x="457200" y="4206240"/>
+            <a:ext cx="8229600" cy="521208"/>
+          </a:xfrm>
+          <a:prstGeom prst="rect">
+            <a:avLst/>
+          </a:prstGeom>
+          <a:solidFill>
+            <a:srgbClr val="FFFFFF"/>
+          </a:solidFill>
+          <a:ln/>
+          <a:effectLst>
+            <a:outerShdw sx="100000" sy="100000" kx="0" ky="0" algn="bl" rotWithShape="0" blurRad="50800" dist="25400" dir="8100000">
+              <a:srgbClr val="000000">
+                <a:alpha val="12000"/>
+              </a:srgbClr>
+            </a:outerShdw>
+          </a:effectLst>
+        </p:spPr>
+      </p:sp>
+      <p:sp>
+        <p:nvSpPr>
+          <p:cNvPr id="23" name="Shape 21"/>
+          <p:cNvSpPr/>
+          <p:nvPr/>
+        </p:nvSpPr>
+        <p:spPr>
+          <a:xfrm>
+            <a:off x="457200" y="4206240"/>
+            <a:ext cx="45720" cy="521208"/>
+          </a:xfrm>
+          <a:prstGeom prst="rect">
+            <a:avLst/>
+          </a:prstGeom>
+          <a:solidFill>
+            <a:srgbClr val="1565C0"/>
+          </a:solidFill>
+          <a:ln/>
+        </p:spPr>
+      </p:sp>
+      <p:sp>
+        <p:nvSpPr>
+          <p:cNvPr id="24" name="Text 22"/>
+          <p:cNvSpPr/>
+          <p:nvPr/>
+        </p:nvSpPr>
+        <p:spPr>
+          <a:xfrm>
+            <a:off x="685800" y="4206240"/>
+            <a:ext cx="7818120" cy="521208"/>
+          </a:xfrm>
+          <a:prstGeom prst="rect">
+            <a:avLst/>
+          </a:prstGeom>
+          <a:noFill/>
+          <a:ln/>
+        </p:spPr>
+        <p:txBody>
+          <a:bodyPr wrap="square" lIns="0" tIns="0" rIns="0" bIns="0" rtlCol="0" anchor="ctr"/>
+          <a:lstStyle/>
+          <a:p>
+            <a:pPr indent="0" marL="0">
+              <a:buNone/>
+            </a:pPr>
+            <a:r>
+              <a:rPr lang="en-US" sz="1200" dirty="0">
+                <a:solidFill>
+                  <a:srgbClr val="1A1A2E"/>
+                </a:solidFill>
+                <a:latin typeface="Calibri" pitchFamily="34" charset="0"/>
+                <a:ea typeface="Calibri" pitchFamily="34" charset="-122"/>
+                <a:cs typeface="Calibri" pitchFamily="34" charset="-120"/>
+              </a:rPr>
+              <a:t>Vues pour limiter l'accès : la reception voit v_artistes_actifs, pas la table complète</a:t>
+            </a:r>
+            <a:endParaRPr lang="en-US" sz="1200" dirty="0"/>
           </a:p>
         </p:txBody>
       </p:sp>
@@ -2895,7 +3039,7 @@
         <p:spPr>
           <a:xfrm>
             <a:off x="0" y="0"/>
-            <a:ext cx="9144000" cy="73152"/>
+            <a:ext cx="9144000" cy="54864"/>
           </a:xfrm>
           <a:prstGeom prst="rect">
             <a:avLst/>
@@ -2914,8 +3058,8 @@
         </p:nvSpPr>
         <p:spPr>
           <a:xfrm>
-            <a:off x="457200" y="228600"/>
-            <a:ext cx="8229600" cy="640080"/>
+            <a:off x="457200" y="182880"/>
+            <a:ext cx="8229600" cy="594360"/>
           </a:xfrm>
           <a:prstGeom prst="rect">
             <a:avLst/>
@@ -2931,7 +3075,7 @@
               <a:buNone/>
             </a:pPr>
             <a:r>
-              <a:rPr lang="en-US" sz="2600" b="1" dirty="0">
+              <a:rPr lang="en-US" sz="2400" b="1" dirty="0">
                 <a:solidFill>
                   <a:srgbClr val="0D47A1"/>
                 </a:solidFill>
@@ -2939,9 +3083,9 @@
                 <a:ea typeface="Trebuchet MS" pitchFamily="34" charset="-122"/>
                 <a:cs typeface="Trebuchet MS" pitchFamily="34" charset="-120"/>
               </a:rPr>
-              <a:t>RGPD et protection des données</a:t>
-            </a:r>
-            <a:endParaRPr lang="en-US" sz="2600" dirty="0"/>
+              <a:t>RGPD : les 7 principes</a:t>
+            </a:r>
+            <a:endParaRPr lang="en-US" sz="2400" dirty="0"/>
           </a:p>
         </p:txBody>
       </p:sp>
@@ -2953,8 +3097,8 @@
         </p:nvSpPr>
         <p:spPr>
           <a:xfrm>
-            <a:off x="457200" y="1051560"/>
-            <a:ext cx="8229600" cy="640080"/>
+            <a:off x="457200" y="914400"/>
+            <a:ext cx="8229600" cy="464058"/>
           </a:xfrm>
           <a:prstGeom prst="rect">
             <a:avLst/>
@@ -2980,8 +3124,8 @@
         </p:nvSpPr>
         <p:spPr>
           <a:xfrm>
-            <a:off x="457200" y="1051560"/>
-            <a:ext cx="54864" cy="640080"/>
+            <a:off x="457200" y="914400"/>
+            <a:ext cx="45720" cy="464058"/>
           </a:xfrm>
           <a:prstGeom prst="rect">
             <a:avLst/>
@@ -3000,8 +3144,8 @@
         </p:nvSpPr>
         <p:spPr>
           <a:xfrm>
-            <a:off x="731520" y="1051560"/>
-            <a:ext cx="7772400" cy="640080"/>
+            <a:off x="685800" y="914400"/>
+            <a:ext cx="7818120" cy="464058"/>
           </a:xfrm>
           <a:prstGeom prst="rect">
             <a:avLst/>
@@ -3017,7 +3161,7 @@
               <a:buNone/>
             </a:pPr>
             <a:r>
-              <a:rPr lang="en-US" sz="1300" dirty="0">
+              <a:rPr lang="en-US" sz="1200" dirty="0">
                 <a:solidFill>
                   <a:srgbClr val="1A1A2E"/>
                 </a:solidFill>
@@ -3025,9 +3169,9 @@
                 <a:ea typeface="Calibri" pitchFamily="34" charset="-122"/>
                 <a:cs typeface="Calibri" pitchFamily="34" charset="-120"/>
               </a:rPr>
-              <a:t>Données personnelles : nom, email, téléphone des artistes</a:t>
-            </a:r>
-            <a:endParaRPr lang="en-US" sz="1300" dirty="0"/>
+              <a:t>1. Licéité : base légale pour traiter les données (consentement, contrat...)</a:t>
+            </a:r>
+            <a:endParaRPr lang="en-US" sz="1200" dirty="0"/>
           </a:p>
         </p:txBody>
       </p:sp>
@@ -3039,8 +3183,8 @@
         </p:nvSpPr>
         <p:spPr>
           <a:xfrm>
-            <a:off x="457200" y="1783080"/>
-            <a:ext cx="8229600" cy="640080"/>
+            <a:off x="457200" y="1405890"/>
+            <a:ext cx="8229600" cy="464058"/>
           </a:xfrm>
           <a:prstGeom prst="rect">
             <a:avLst/>
@@ -3066,8 +3210,8 @@
         </p:nvSpPr>
         <p:spPr>
           <a:xfrm>
-            <a:off x="457200" y="1783080"/>
-            <a:ext cx="54864" cy="640080"/>
+            <a:off x="457200" y="1405890"/>
+            <a:ext cx="45720" cy="464058"/>
           </a:xfrm>
           <a:prstGeom prst="rect">
             <a:avLst/>
@@ -3086,8 +3230,8 @@
         </p:nvSpPr>
         <p:spPr>
           <a:xfrm>
-            <a:off x="731520" y="1783080"/>
-            <a:ext cx="7772400" cy="640080"/>
+            <a:off x="685800" y="1405890"/>
+            <a:ext cx="7818120" cy="464058"/>
           </a:xfrm>
           <a:prstGeom prst="rect">
             <a:avLst/>
@@ -3103,7 +3247,7 @@
               <a:buNone/>
             </a:pPr>
             <a:r>
-              <a:rPr lang="en-US" sz="1300" dirty="0">
+              <a:rPr lang="en-US" sz="1200" dirty="0">
                 <a:solidFill>
                   <a:srgbClr val="1A1A2E"/>
                 </a:solidFill>
@@ -3111,9 +3255,9 @@
                 <a:ea typeface="Calibri" pitchFamily="34" charset="-122"/>
                 <a:cs typeface="Calibri" pitchFamily="34" charset="-120"/>
               </a:rPr>
-              <a:t>Droit d'accès : l'artiste peut demander ses données</a:t>
-            </a:r>
-            <a:endParaRPr lang="en-US" sz="1300" dirty="0"/>
+              <a:t>2. Limitation des finalités : collecter pour un but précis</a:t>
+            </a:r>
+            <a:endParaRPr lang="en-US" sz="1200" dirty="0"/>
           </a:p>
         </p:txBody>
       </p:sp>
@@ -3125,8 +3269,8 @@
         </p:nvSpPr>
         <p:spPr>
           <a:xfrm>
-            <a:off x="457200" y="2514600"/>
-            <a:ext cx="8229600" cy="640080"/>
+            <a:off x="457200" y="1897380"/>
+            <a:ext cx="8229600" cy="464058"/>
           </a:xfrm>
           <a:prstGeom prst="rect">
             <a:avLst/>
@@ -3152,8 +3296,8 @@
         </p:nvSpPr>
         <p:spPr>
           <a:xfrm>
-            <a:off x="457200" y="2514600"/>
-            <a:ext cx="54864" cy="640080"/>
+            <a:off x="457200" y="1897380"/>
+            <a:ext cx="45720" cy="464058"/>
           </a:xfrm>
           <a:prstGeom prst="rect">
             <a:avLst/>
@@ -3172,8 +3316,8 @@
         </p:nvSpPr>
         <p:spPr>
           <a:xfrm>
-            <a:off x="731520" y="2514600"/>
-            <a:ext cx="7772400" cy="640080"/>
+            <a:off x="685800" y="1897380"/>
+            <a:ext cx="7818120" cy="464058"/>
           </a:xfrm>
           <a:prstGeom prst="rect">
             <a:avLst/>
@@ -3189,7 +3333,7 @@
               <a:buNone/>
             </a:pPr>
             <a:r>
-              <a:rPr lang="en-US" sz="1300" dirty="0">
+              <a:rPr lang="en-US" sz="1200" dirty="0">
                 <a:solidFill>
                   <a:srgbClr val="1A1A2E"/>
                 </a:solidFill>
@@ -3197,9 +3341,9 @@
                 <a:ea typeface="Calibri" pitchFamily="34" charset="-122"/>
                 <a:cs typeface="Calibri" pitchFamily="34" charset="-120"/>
               </a:rPr>
-              <a:t>Droit à l'effacement : 'droit à l'oubli'</a:t>
-            </a:r>
-            <a:endParaRPr lang="en-US" sz="1300" dirty="0"/>
+              <a:t>3. Minimisation : ne collecter que le strict nécessaire</a:t>
+            </a:r>
+            <a:endParaRPr lang="en-US" sz="1200" dirty="0"/>
           </a:p>
         </p:txBody>
       </p:sp>
@@ -3211,8 +3355,8 @@
         </p:nvSpPr>
         <p:spPr>
           <a:xfrm>
-            <a:off x="457200" y="3246120"/>
-            <a:ext cx="8229600" cy="640080"/>
+            <a:off x="457200" y="2388870"/>
+            <a:ext cx="8229600" cy="464058"/>
           </a:xfrm>
           <a:prstGeom prst="rect">
             <a:avLst/>
@@ -3238,8 +3382,8 @@
         </p:nvSpPr>
         <p:spPr>
           <a:xfrm>
-            <a:off x="457200" y="3246120"/>
-            <a:ext cx="54864" cy="640080"/>
+            <a:off x="457200" y="2388870"/>
+            <a:ext cx="45720" cy="464058"/>
           </a:xfrm>
           <a:prstGeom prst="rect">
             <a:avLst/>
@@ -3258,8 +3402,8 @@
         </p:nvSpPr>
         <p:spPr>
           <a:xfrm>
-            <a:off x="731520" y="3246120"/>
-            <a:ext cx="7772400" cy="640080"/>
+            <a:off x="685800" y="2388870"/>
+            <a:ext cx="7818120" cy="464058"/>
           </a:xfrm>
           <a:prstGeom prst="rect">
             <a:avLst/>
@@ -3275,7 +3419,7 @@
               <a:buNone/>
             </a:pPr>
             <a:r>
-              <a:rPr lang="en-US" sz="1300" dirty="0">
+              <a:rPr lang="en-US" sz="1200" dirty="0">
                 <a:solidFill>
                   <a:srgbClr val="1A1A2E"/>
                 </a:solidFill>
@@ -3283,9 +3427,9 @@
                 <a:ea typeface="Calibri" pitchFamily="34" charset="-122"/>
                 <a:cs typeface="Calibri" pitchFamily="34" charset="-120"/>
               </a:rPr>
-              <a:t>Consentement : informer de la collecte</a:t>
-            </a:r>
-            <a:endParaRPr lang="en-US" sz="1300" dirty="0"/>
+              <a:t>4. Exactitude : données à jour et correctes</a:t>
+            </a:r>
+            <a:endParaRPr lang="en-US" sz="1200" dirty="0"/>
           </a:p>
         </p:txBody>
       </p:sp>
@@ -3297,8 +3441,8 @@
         </p:nvSpPr>
         <p:spPr>
           <a:xfrm>
-            <a:off x="457200" y="3977640"/>
-            <a:ext cx="8229600" cy="640080"/>
+            <a:off x="457200" y="2880360"/>
+            <a:ext cx="8229600" cy="464058"/>
           </a:xfrm>
           <a:prstGeom prst="rect">
             <a:avLst/>
@@ -3324,8 +3468,8 @@
         </p:nvSpPr>
         <p:spPr>
           <a:xfrm>
-            <a:off x="457200" y="3977640"/>
-            <a:ext cx="54864" cy="640080"/>
+            <a:off x="457200" y="2880360"/>
+            <a:ext cx="45720" cy="464058"/>
           </a:xfrm>
           <a:prstGeom prst="rect">
             <a:avLst/>
@@ -3344,8 +3488,8 @@
         </p:nvSpPr>
         <p:spPr>
           <a:xfrm>
-            <a:off x="731520" y="3977640"/>
-            <a:ext cx="7772400" cy="640080"/>
+            <a:off x="685800" y="2880360"/>
+            <a:ext cx="7818120" cy="464058"/>
           </a:xfrm>
           <a:prstGeom prst="rect">
             <a:avLst/>
@@ -3361,7 +3505,7 @@
               <a:buNone/>
             </a:pPr>
             <a:r>
-              <a:rPr lang="en-US" sz="1300" dirty="0">
+              <a:rPr lang="en-US" sz="1200" dirty="0">
                 <a:solidFill>
                   <a:srgbClr val="1A1A2E"/>
                 </a:solidFill>
@@ -3369,22 +3513,69 @@
                 <a:ea typeface="Calibri" pitchFamily="34" charset="-122"/>
                 <a:cs typeface="Calibri" pitchFamily="34" charset="-120"/>
               </a:rPr>
-              <a:t>Transfert transfrontalier : attention aux serveurs hors Suisse/UE</a:t>
-            </a:r>
-            <a:endParaRPr lang="en-US" sz="1300" dirty="0"/>
-          </a:p>
-        </p:txBody>
-      </p:sp>
-      <p:sp>
-        <p:nvSpPr>
-          <p:cNvPr id="19" name="Text 17"/>
-          <p:cNvSpPr/>
-          <p:nvPr/>
-        </p:nvSpPr>
-        <p:spPr>
-          <a:xfrm>
-            <a:off x="8229600" y="4754880"/>
-            <a:ext cx="731520" cy="274320"/>
+              <a:t>5. Limitation de conservation : supprimer quand plus nécessaire</a:t>
+            </a:r>
+            <a:endParaRPr lang="en-US" sz="1200" dirty="0"/>
+          </a:p>
+        </p:txBody>
+      </p:sp>
+      <p:sp>
+        <p:nvSpPr>
+          <p:cNvPr id="19" name="Shape 17"/>
+          <p:cNvSpPr/>
+          <p:nvPr/>
+        </p:nvSpPr>
+        <p:spPr>
+          <a:xfrm>
+            <a:off x="457200" y="3371850"/>
+            <a:ext cx="8229600" cy="464058"/>
+          </a:xfrm>
+          <a:prstGeom prst="rect">
+            <a:avLst/>
+          </a:prstGeom>
+          <a:solidFill>
+            <a:srgbClr val="E3F2FD"/>
+          </a:solidFill>
+          <a:ln/>
+          <a:effectLst>
+            <a:outerShdw sx="100000" sy="100000" kx="0" ky="0" algn="bl" rotWithShape="0" blurRad="50800" dist="25400" dir="8100000">
+              <a:srgbClr val="000000">
+                <a:alpha val="12000"/>
+              </a:srgbClr>
+            </a:outerShdw>
+          </a:effectLst>
+        </p:spPr>
+      </p:sp>
+      <p:sp>
+        <p:nvSpPr>
+          <p:cNvPr id="20" name="Shape 18"/>
+          <p:cNvSpPr/>
+          <p:nvPr/>
+        </p:nvSpPr>
+        <p:spPr>
+          <a:xfrm>
+            <a:off x="457200" y="3371850"/>
+            <a:ext cx="45720" cy="464058"/>
+          </a:xfrm>
+          <a:prstGeom prst="rect">
+            <a:avLst/>
+          </a:prstGeom>
+          <a:solidFill>
+            <a:srgbClr val="1565C0"/>
+          </a:solidFill>
+          <a:ln/>
+        </p:spPr>
+      </p:sp>
+      <p:sp>
+        <p:nvSpPr>
+          <p:cNvPr id="21" name="Text 19"/>
+          <p:cNvSpPr/>
+          <p:nvPr/>
+        </p:nvSpPr>
+        <p:spPr>
+          <a:xfrm>
+            <a:off x="685800" y="3371850"/>
+            <a:ext cx="7818120" cy="464058"/>
           </a:xfrm>
           <a:prstGeom prst="rect">
             <a:avLst/>
@@ -3396,21 +3587,193 @@
           <a:bodyPr wrap="square" lIns="0" tIns="0" rIns="0" bIns="0" rtlCol="0" anchor="ctr"/>
           <a:lstStyle/>
           <a:p>
-            <a:pPr algn="r" indent="0" marL="0">
+            <a:pPr indent="0" marL="0">
               <a:buNone/>
             </a:pPr>
             <a:r>
-              <a:rPr lang="en-US" sz="900" dirty="0">
+              <a:rPr lang="en-US" sz="1200" dirty="0">
                 <a:solidFill>
-                  <a:srgbClr val="AAAAAA"/>
+                  <a:srgbClr val="1A1A2E"/>
                 </a:solidFill>
                 <a:latin typeface="Calibri" pitchFamily="34" charset="0"/>
                 <a:ea typeface="Calibri" pitchFamily="34" charset="-122"/>
                 <a:cs typeface="Calibri" pitchFamily="34" charset="-120"/>
               </a:rPr>
-              <a:t>4/6</a:t>
-            </a:r>
-            <a:endParaRPr lang="en-US" sz="900" dirty="0"/>
+              <a:t>6. Intégrité et confidentialité : protéger contre accès non autorisé</a:t>
+            </a:r>
+            <a:endParaRPr lang="en-US" sz="1200" dirty="0"/>
+          </a:p>
+        </p:txBody>
+      </p:sp>
+      <p:sp>
+        <p:nvSpPr>
+          <p:cNvPr id="22" name="Shape 20"/>
+          <p:cNvSpPr/>
+          <p:nvPr/>
+        </p:nvSpPr>
+        <p:spPr>
+          <a:xfrm>
+            <a:off x="457200" y="3863340"/>
+            <a:ext cx="8229600" cy="464058"/>
+          </a:xfrm>
+          <a:prstGeom prst="rect">
+            <a:avLst/>
+          </a:prstGeom>
+          <a:solidFill>
+            <a:srgbClr val="FFFFFF"/>
+          </a:solidFill>
+          <a:ln/>
+          <a:effectLst>
+            <a:outerShdw sx="100000" sy="100000" kx="0" ky="0" algn="bl" rotWithShape="0" blurRad="50800" dist="25400" dir="8100000">
+              <a:srgbClr val="000000">
+                <a:alpha val="12000"/>
+              </a:srgbClr>
+            </a:outerShdw>
+          </a:effectLst>
+        </p:spPr>
+      </p:sp>
+      <p:sp>
+        <p:nvSpPr>
+          <p:cNvPr id="23" name="Shape 21"/>
+          <p:cNvSpPr/>
+          <p:nvPr/>
+        </p:nvSpPr>
+        <p:spPr>
+          <a:xfrm>
+            <a:off x="457200" y="3863340"/>
+            <a:ext cx="45720" cy="464058"/>
+          </a:xfrm>
+          <a:prstGeom prst="rect">
+            <a:avLst/>
+          </a:prstGeom>
+          <a:solidFill>
+            <a:srgbClr val="1565C0"/>
+          </a:solidFill>
+          <a:ln/>
+        </p:spPr>
+      </p:sp>
+      <p:sp>
+        <p:nvSpPr>
+          <p:cNvPr id="24" name="Text 22"/>
+          <p:cNvSpPr/>
+          <p:nvPr/>
+        </p:nvSpPr>
+        <p:spPr>
+          <a:xfrm>
+            <a:off x="685800" y="3863340"/>
+            <a:ext cx="7818120" cy="464058"/>
+          </a:xfrm>
+          <a:prstGeom prst="rect">
+            <a:avLst/>
+          </a:prstGeom>
+          <a:noFill/>
+          <a:ln/>
+        </p:spPr>
+        <p:txBody>
+          <a:bodyPr wrap="square" lIns="0" tIns="0" rIns="0" bIns="0" rtlCol="0" anchor="ctr"/>
+          <a:lstStyle/>
+          <a:p>
+            <a:pPr indent="0" marL="0">
+              <a:buNone/>
+            </a:pPr>
+            <a:r>
+              <a:rPr lang="en-US" sz="1200" dirty="0">
+                <a:solidFill>
+                  <a:srgbClr val="1A1A2E"/>
+                </a:solidFill>
+                <a:latin typeface="Calibri" pitchFamily="34" charset="0"/>
+                <a:ea typeface="Calibri" pitchFamily="34" charset="-122"/>
+                <a:cs typeface="Calibri" pitchFamily="34" charset="-120"/>
+              </a:rPr>
+              <a:t>7. Responsabilité : documenter et prouver la conformité</a:t>
+            </a:r>
+            <a:endParaRPr lang="en-US" sz="1200" dirty="0"/>
+          </a:p>
+        </p:txBody>
+      </p:sp>
+      <p:sp>
+        <p:nvSpPr>
+          <p:cNvPr id="25" name="Shape 23"/>
+          <p:cNvSpPr/>
+          <p:nvPr/>
+        </p:nvSpPr>
+        <p:spPr>
+          <a:xfrm>
+            <a:off x="457200" y="4354830"/>
+            <a:ext cx="8229600" cy="464058"/>
+          </a:xfrm>
+          <a:prstGeom prst="rect">
+            <a:avLst/>
+          </a:prstGeom>
+          <a:solidFill>
+            <a:srgbClr val="E3F2FD"/>
+          </a:solidFill>
+          <a:ln/>
+          <a:effectLst>
+            <a:outerShdw sx="100000" sy="100000" kx="0" ky="0" algn="bl" rotWithShape="0" blurRad="50800" dist="25400" dir="8100000">
+              <a:srgbClr val="000000">
+                <a:alpha val="12000"/>
+              </a:srgbClr>
+            </a:outerShdw>
+          </a:effectLst>
+        </p:spPr>
+      </p:sp>
+      <p:sp>
+        <p:nvSpPr>
+          <p:cNvPr id="26" name="Shape 24"/>
+          <p:cNvSpPr/>
+          <p:nvPr/>
+        </p:nvSpPr>
+        <p:spPr>
+          <a:xfrm>
+            <a:off x="457200" y="4354830"/>
+            <a:ext cx="45720" cy="464058"/>
+          </a:xfrm>
+          <a:prstGeom prst="rect">
+            <a:avLst/>
+          </a:prstGeom>
+          <a:solidFill>
+            <a:srgbClr val="1565C0"/>
+          </a:solidFill>
+          <a:ln/>
+        </p:spPr>
+      </p:sp>
+      <p:sp>
+        <p:nvSpPr>
+          <p:cNvPr id="27" name="Text 25"/>
+          <p:cNvSpPr/>
+          <p:nvPr/>
+        </p:nvSpPr>
+        <p:spPr>
+          <a:xfrm>
+            <a:off x="685800" y="4354830"/>
+            <a:ext cx="7818120" cy="464058"/>
+          </a:xfrm>
+          <a:prstGeom prst="rect">
+            <a:avLst/>
+          </a:prstGeom>
+          <a:noFill/>
+          <a:ln/>
+        </p:spPr>
+        <p:txBody>
+          <a:bodyPr wrap="square" lIns="0" tIns="0" rIns="0" bIns="0" rtlCol="0" anchor="ctr"/>
+          <a:lstStyle/>
+          <a:p>
+            <a:pPr indent="0" marL="0">
+              <a:buNone/>
+            </a:pPr>
+            <a:r>
+              <a:rPr lang="en-US" sz="1200" dirty="0">
+                <a:solidFill>
+                  <a:srgbClr val="1A1A2E"/>
+                </a:solidFill>
+                <a:latin typeface="Calibri" pitchFamily="34" charset="0"/>
+                <a:ea typeface="Calibri" pitchFamily="34" charset="-122"/>
+                <a:cs typeface="Calibri" pitchFamily="34" charset="-120"/>
+              </a:rPr>
+              <a:t>SwissSound : emails + téléphones des artistes = données personnelles RGPD</a:t>
+            </a:r>
+            <a:endParaRPr lang="en-US" sz="1200" dirty="0"/>
           </a:p>
         </p:txBody>
       </p:sp>
@@ -3455,7 +3818,7 @@
         <p:spPr>
           <a:xfrm>
             <a:off x="0" y="0"/>
-            <a:ext cx="9144000" cy="73152"/>
+            <a:ext cx="9144000" cy="54864"/>
           </a:xfrm>
           <a:prstGeom prst="rect">
             <a:avLst/>
@@ -3474,8 +3837,8 @@
         </p:nvSpPr>
         <p:spPr>
           <a:xfrm>
-            <a:off x="457200" y="228600"/>
-            <a:ext cx="8229600" cy="640080"/>
+            <a:off x="457200" y="182880"/>
+            <a:ext cx="8229600" cy="594360"/>
           </a:xfrm>
           <a:prstGeom prst="rect">
             <a:avLst/>
@@ -3491,7 +3854,7 @@
               <a:buNone/>
             </a:pPr>
             <a:r>
-              <a:rPr lang="en-US" sz="2600" b="1" dirty="0">
+              <a:rPr lang="en-US" sz="2400" b="1" dirty="0">
                 <a:solidFill>
                   <a:srgbClr val="0D47A1"/>
                 </a:solidFill>
@@ -3499,9 +3862,9 @@
                 <a:ea typeface="Trebuchet MS" pitchFamily="34" charset="-122"/>
                 <a:cs typeface="Trebuchet MS" pitchFamily="34" charset="-120"/>
               </a:rPr>
-              <a:t>Chiffrement + D2</a:t>
-            </a:r>
-            <a:endParaRPr lang="en-US" sz="2600" dirty="0"/>
+              <a:t>Chiffrement et D2</a:t>
+            </a:r>
+            <a:endParaRPr lang="en-US" sz="2400" dirty="0"/>
           </a:p>
         </p:txBody>
       </p:sp>
@@ -3513,8 +3876,8 @@
         </p:nvSpPr>
         <p:spPr>
           <a:xfrm>
-            <a:off x="457200" y="1051560"/>
-            <a:ext cx="8229600" cy="640080"/>
+            <a:off x="457200" y="914400"/>
+            <a:ext cx="8229600" cy="464058"/>
           </a:xfrm>
           <a:prstGeom prst="rect">
             <a:avLst/>
@@ -3540,8 +3903,8 @@
         </p:nvSpPr>
         <p:spPr>
           <a:xfrm>
-            <a:off x="457200" y="1051560"/>
-            <a:ext cx="54864" cy="640080"/>
+            <a:off x="457200" y="914400"/>
+            <a:ext cx="45720" cy="464058"/>
           </a:xfrm>
           <a:prstGeom prst="rect">
             <a:avLst/>
@@ -3560,8 +3923,8 @@
         </p:nvSpPr>
         <p:spPr>
           <a:xfrm>
-            <a:off x="731520" y="1051560"/>
-            <a:ext cx="7772400" cy="640080"/>
+            <a:off x="685800" y="914400"/>
+            <a:ext cx="7818120" cy="464058"/>
           </a:xfrm>
           <a:prstGeom prst="rect">
             <a:avLst/>
@@ -3577,7 +3940,7 @@
               <a:buNone/>
             </a:pPr>
             <a:r>
-              <a:rPr lang="en-US" sz="1100" dirty="0">
+              <a:rPr lang="en-US" sz="1000" dirty="0">
                 <a:solidFill>
                   <a:srgbClr val="0D47A1"/>
                 </a:solidFill>
@@ -3585,9 +3948,9 @@
                 <a:ea typeface="JetBrains Mono" pitchFamily="34" charset="-122"/>
                 <a:cs typeface="JetBrains Mono" pitchFamily="34" charset="-120"/>
               </a:rPr>
-              <a:t>AES_ENCRYPT(email, 'clé_secrète') → stockage chiffré</a:t>
-            </a:r>
-            <a:endParaRPr lang="en-US" sz="1100" dirty="0"/>
+              <a:t>AES_ENCRYPT(email, 'cle_secrete') → stockage chiffré</a:t>
+            </a:r>
+            <a:endParaRPr lang="en-US" sz="1000" dirty="0"/>
           </a:p>
         </p:txBody>
       </p:sp>
@@ -3599,8 +3962,8 @@
         </p:nvSpPr>
         <p:spPr>
           <a:xfrm>
-            <a:off x="457200" y="1783080"/>
-            <a:ext cx="8229600" cy="640080"/>
+            <a:off x="457200" y="1405890"/>
+            <a:ext cx="8229600" cy="464058"/>
           </a:xfrm>
           <a:prstGeom prst="rect">
             <a:avLst/>
@@ -3626,8 +3989,8 @@
         </p:nvSpPr>
         <p:spPr>
           <a:xfrm>
-            <a:off x="457200" y="1783080"/>
-            <a:ext cx="54864" cy="640080"/>
+            <a:off x="457200" y="1405890"/>
+            <a:ext cx="45720" cy="464058"/>
           </a:xfrm>
           <a:prstGeom prst="rect">
             <a:avLst/>
@@ -3646,8 +4009,8 @@
         </p:nvSpPr>
         <p:spPr>
           <a:xfrm>
-            <a:off x="731520" y="1783080"/>
-            <a:ext cx="7772400" cy="640080"/>
+            <a:off x="685800" y="1405890"/>
+            <a:ext cx="7818120" cy="464058"/>
           </a:xfrm>
           <a:prstGeom prst="rect">
             <a:avLst/>
@@ -3663,7 +4026,7 @@
               <a:buNone/>
             </a:pPr>
             <a:r>
-              <a:rPr lang="en-US" sz="1100" dirty="0">
+              <a:rPr lang="en-US" sz="1000" dirty="0">
                 <a:solidFill>
                   <a:srgbClr val="0D47A1"/>
                 </a:solidFill>
@@ -3671,9 +4034,9 @@
                 <a:ea typeface="JetBrains Mono" pitchFamily="34" charset="-122"/>
                 <a:cs typeface="JetBrains Mono" pitchFamily="34" charset="-120"/>
               </a:rPr>
-              <a:t>AES_DECRYPT(email_chiffre, 'clé_secrète') → lecture</a:t>
-            </a:r>
-            <a:endParaRPr lang="en-US" sz="1100" dirty="0"/>
+              <a:t>AES_DECRYPT(email_chiffre, 'cle_secrete') → lecture</a:t>
+            </a:r>
+            <a:endParaRPr lang="en-US" sz="1000" dirty="0"/>
           </a:p>
         </p:txBody>
       </p:sp>
@@ -3685,8 +4048,8 @@
         </p:nvSpPr>
         <p:spPr>
           <a:xfrm>
-            <a:off x="457200" y="2514600"/>
-            <a:ext cx="8229600" cy="640080"/>
+            <a:off x="457200" y="1897380"/>
+            <a:ext cx="8229600" cy="464058"/>
           </a:xfrm>
           <a:prstGeom prst="rect">
             <a:avLst/>
@@ -3712,8 +4075,8 @@
         </p:nvSpPr>
         <p:spPr>
           <a:xfrm>
-            <a:off x="457200" y="2514600"/>
-            <a:ext cx="54864" cy="640080"/>
+            <a:off x="457200" y="1897380"/>
+            <a:ext cx="45720" cy="464058"/>
           </a:xfrm>
           <a:prstGeom prst="rect">
             <a:avLst/>
@@ -3732,8 +4095,8 @@
         </p:nvSpPr>
         <p:spPr>
           <a:xfrm>
-            <a:off x="731520" y="2514600"/>
-            <a:ext cx="7772400" cy="640080"/>
+            <a:off x="685800" y="1897380"/>
+            <a:ext cx="7818120" cy="464058"/>
           </a:xfrm>
           <a:prstGeom prst="rect">
             <a:avLst/>
@@ -3749,17 +4112,17 @@
               <a:buNone/>
             </a:pPr>
             <a:r>
-              <a:rPr lang="en-US" sz="1100" dirty="0">
+              <a:rPr lang="en-US" sz="1200" dirty="0">
                 <a:solidFill>
-                  <a:srgbClr val="0D47A1"/>
+                  <a:srgbClr val="1A1A2E"/>
                 </a:solidFill>
-                <a:latin typeface="JetBrains Mono" pitchFamily="34" charset="0"/>
-                <a:ea typeface="JetBrains Mono" pitchFamily="34" charset="-122"/>
-                <a:cs typeface="JetBrains Mono" pitchFamily="34" charset="-120"/>
+                <a:latin typeface="Calibri" pitchFamily="34" charset="0"/>
+                <a:ea typeface="Calibri" pitchFamily="34" charset="-122"/>
+                <a:cs typeface="Calibri" pitchFamily="34" charset="-120"/>
               </a:rPr>
-              <a:t>Mots de passe : ne JAMAIS stocker en clair → hash (SHA2)</a:t>
-            </a:r>
-            <a:endParaRPr lang="en-US" sz="1100" dirty="0"/>
+              <a:t>SHA2('motdepasse', 256) → hash irréversible (pour les mots de passe)</a:t>
+            </a:r>
+            <a:endParaRPr lang="en-US" sz="1200" dirty="0"/>
           </a:p>
         </p:txBody>
       </p:sp>
@@ -3771,8 +4134,8 @@
         </p:nvSpPr>
         <p:spPr>
           <a:xfrm>
-            <a:off x="457200" y="3246120"/>
-            <a:ext cx="8229600" cy="640080"/>
+            <a:off x="457200" y="2388870"/>
+            <a:ext cx="8229600" cy="464058"/>
           </a:xfrm>
           <a:prstGeom prst="rect">
             <a:avLst/>
@@ -3798,8 +4161,8 @@
         </p:nvSpPr>
         <p:spPr>
           <a:xfrm>
-            <a:off x="457200" y="3246120"/>
-            <a:ext cx="54864" cy="640080"/>
+            <a:off x="457200" y="2388870"/>
+            <a:ext cx="45720" cy="464058"/>
           </a:xfrm>
           <a:prstGeom prst="rect">
             <a:avLst/>
@@ -3818,8 +4181,8 @@
         </p:nvSpPr>
         <p:spPr>
           <a:xfrm>
-            <a:off x="731520" y="3246120"/>
-            <a:ext cx="7772400" cy="640080"/>
+            <a:off x="685800" y="2388870"/>
+            <a:ext cx="7818120" cy="464058"/>
           </a:xfrm>
           <a:prstGeom prst="rect">
             <a:avLst/>
@@ -3835,7 +4198,7 @@
               <a:buNone/>
             </a:pPr>
             <a:r>
-              <a:rPr lang="en-US" sz="1300" dirty="0">
+              <a:rPr lang="en-US" sz="1200" dirty="0">
                 <a:solidFill>
                   <a:srgbClr val="1A1A2E"/>
                 </a:solidFill>
@@ -3843,9 +4206,9 @@
                 <a:ea typeface="Calibri" pitchFamily="34" charset="-122"/>
                 <a:cs typeface="Calibri" pitchFamily="34" charset="-120"/>
               </a:rPr>
-              <a:t>D2 : évaluer l'efficacité de SwissSound + 5 améliorations</a:t>
-            </a:r>
-            <a:endParaRPr lang="en-US" sz="1300" dirty="0"/>
+              <a:t>Ne JAMAIS stocker un mot de passe en clair !</a:t>
+            </a:r>
+            <a:endParaRPr lang="en-US" sz="1200" dirty="0"/>
           </a:p>
         </p:txBody>
       </p:sp>
@@ -3857,8 +4220,8 @@
         </p:nvSpPr>
         <p:spPr>
           <a:xfrm>
-            <a:off x="457200" y="3977640"/>
-            <a:ext cx="8229600" cy="640080"/>
+            <a:off x="457200" y="2880360"/>
+            <a:ext cx="8229600" cy="464058"/>
           </a:xfrm>
           <a:prstGeom prst="rect">
             <a:avLst/>
@@ -3884,8 +4247,8 @@
         </p:nvSpPr>
         <p:spPr>
           <a:xfrm>
-            <a:off x="457200" y="3977640"/>
-            <a:ext cx="54864" cy="640080"/>
+            <a:off x="457200" y="2880360"/>
+            <a:ext cx="45720" cy="464058"/>
           </a:xfrm>
           <a:prstGeom prst="rect">
             <a:avLst/>
@@ -3904,8 +4267,8 @@
         </p:nvSpPr>
         <p:spPr>
           <a:xfrm>
-            <a:off x="731520" y="3977640"/>
-            <a:ext cx="7772400" cy="640080"/>
+            <a:off x="685800" y="2880360"/>
+            <a:ext cx="7818120" cy="464058"/>
           </a:xfrm>
           <a:prstGeom prst="rect">
             <a:avLst/>
@@ -3921,7 +4284,7 @@
               <a:buNone/>
             </a:pPr>
             <a:r>
-              <a:rPr lang="en-US" sz="1300" dirty="0">
+              <a:rPr lang="en-US" sz="1200" dirty="0">
                 <a:solidFill>
                   <a:srgbClr val="1A1A2E"/>
                 </a:solidFill>
@@ -3929,22 +4292,69 @@
                 <a:ea typeface="Calibri" pitchFamily="34" charset="-122"/>
                 <a:cs typeface="Calibri" pitchFamily="34" charset="-120"/>
               </a:rPr>
-              <a:t>Penser : performances, sécurité, scalabilité, UX, maintenance</a:t>
-            </a:r>
-            <a:endParaRPr lang="en-US" sz="1300" dirty="0"/>
-          </a:p>
-        </p:txBody>
-      </p:sp>
-      <p:sp>
-        <p:nvSpPr>
-          <p:cNvPr id="19" name="Text 17"/>
-          <p:cNvSpPr/>
-          <p:nvPr/>
-        </p:nvSpPr>
-        <p:spPr>
-          <a:xfrm>
-            <a:off x="8229600" y="4754880"/>
-            <a:ext cx="731520" cy="274320"/>
+              <a:t>D2 : évaluer l'efficacité de la solution SwissSound</a:t>
+            </a:r>
+            <a:endParaRPr lang="en-US" sz="1200" dirty="0"/>
+          </a:p>
+        </p:txBody>
+      </p:sp>
+      <p:sp>
+        <p:nvSpPr>
+          <p:cNvPr id="19" name="Shape 17"/>
+          <p:cNvSpPr/>
+          <p:nvPr/>
+        </p:nvSpPr>
+        <p:spPr>
+          <a:xfrm>
+            <a:off x="457200" y="3371850"/>
+            <a:ext cx="8229600" cy="464058"/>
+          </a:xfrm>
+          <a:prstGeom prst="rect">
+            <a:avLst/>
+          </a:prstGeom>
+          <a:solidFill>
+            <a:srgbClr val="E3F2FD"/>
+          </a:solidFill>
+          <a:ln/>
+          <a:effectLst>
+            <a:outerShdw sx="100000" sy="100000" kx="0" ky="0" algn="bl" rotWithShape="0" blurRad="50800" dist="25400" dir="8100000">
+              <a:srgbClr val="000000">
+                <a:alpha val="12000"/>
+              </a:srgbClr>
+            </a:outerShdw>
+          </a:effectLst>
+        </p:spPr>
+      </p:sp>
+      <p:sp>
+        <p:nvSpPr>
+          <p:cNvPr id="20" name="Shape 18"/>
+          <p:cNvSpPr/>
+          <p:nvPr/>
+        </p:nvSpPr>
+        <p:spPr>
+          <a:xfrm>
+            <a:off x="457200" y="3371850"/>
+            <a:ext cx="45720" cy="464058"/>
+          </a:xfrm>
+          <a:prstGeom prst="rect">
+            <a:avLst/>
+          </a:prstGeom>
+          <a:solidFill>
+            <a:srgbClr val="1565C0"/>
+          </a:solidFill>
+          <a:ln/>
+        </p:spPr>
+      </p:sp>
+      <p:sp>
+        <p:nvSpPr>
+          <p:cNvPr id="21" name="Text 19"/>
+          <p:cNvSpPr/>
+          <p:nvPr/>
+        </p:nvSpPr>
+        <p:spPr>
+          <a:xfrm>
+            <a:off x="685800" y="3371850"/>
+            <a:ext cx="7818120" cy="464058"/>
           </a:xfrm>
           <a:prstGeom prst="rect">
             <a:avLst/>
@@ -3956,21 +4366,193 @@
           <a:bodyPr wrap="square" lIns="0" tIns="0" rIns="0" bIns="0" rtlCol="0" anchor="ctr"/>
           <a:lstStyle/>
           <a:p>
-            <a:pPr algn="r" indent="0" marL="0">
+            <a:pPr indent="0" marL="0">
               <a:buNone/>
             </a:pPr>
             <a:r>
-              <a:rPr lang="en-US" sz="900" dirty="0">
+              <a:rPr lang="en-US" sz="1200" dirty="0">
                 <a:solidFill>
-                  <a:srgbClr val="AAAAAA"/>
+                  <a:srgbClr val="1A1A2E"/>
                 </a:solidFill>
                 <a:latin typeface="Calibri" pitchFamily="34" charset="0"/>
                 <a:ea typeface="Calibri" pitchFamily="34" charset="-122"/>
                 <a:cs typeface="Calibri" pitchFamily="34" charset="-120"/>
               </a:rPr>
-              <a:t>5/6</a:t>
-            </a:r>
-            <a:endParaRPr lang="en-US" sz="900" dirty="0"/>
+              <a:t>→ Forces : 3NF, intégrité FK, contraintes, vues de sécurité</a:t>
+            </a:r>
+            <a:endParaRPr lang="en-US" sz="1200" dirty="0"/>
+          </a:p>
+        </p:txBody>
+      </p:sp>
+      <p:sp>
+        <p:nvSpPr>
+          <p:cNvPr id="22" name="Shape 20"/>
+          <p:cNvSpPr/>
+          <p:nvPr/>
+        </p:nvSpPr>
+        <p:spPr>
+          <a:xfrm>
+            <a:off x="457200" y="3863340"/>
+            <a:ext cx="8229600" cy="464058"/>
+          </a:xfrm>
+          <a:prstGeom prst="rect">
+            <a:avLst/>
+          </a:prstGeom>
+          <a:solidFill>
+            <a:srgbClr val="FFFFFF"/>
+          </a:solidFill>
+          <a:ln/>
+          <a:effectLst>
+            <a:outerShdw sx="100000" sy="100000" kx="0" ky="0" algn="bl" rotWithShape="0" blurRad="50800" dist="25400" dir="8100000">
+              <a:srgbClr val="000000">
+                <a:alpha val="12000"/>
+              </a:srgbClr>
+            </a:outerShdw>
+          </a:effectLst>
+        </p:spPr>
+      </p:sp>
+      <p:sp>
+        <p:nvSpPr>
+          <p:cNvPr id="23" name="Shape 21"/>
+          <p:cNvSpPr/>
+          <p:nvPr/>
+        </p:nvSpPr>
+        <p:spPr>
+          <a:xfrm>
+            <a:off x="457200" y="3863340"/>
+            <a:ext cx="45720" cy="464058"/>
+          </a:xfrm>
+          <a:prstGeom prst="rect">
+            <a:avLst/>
+          </a:prstGeom>
+          <a:solidFill>
+            <a:srgbClr val="1565C0"/>
+          </a:solidFill>
+          <a:ln/>
+        </p:spPr>
+      </p:sp>
+      <p:sp>
+        <p:nvSpPr>
+          <p:cNvPr id="24" name="Text 22"/>
+          <p:cNvSpPr/>
+          <p:nvPr/>
+        </p:nvSpPr>
+        <p:spPr>
+          <a:xfrm>
+            <a:off x="685800" y="3863340"/>
+            <a:ext cx="7818120" cy="464058"/>
+          </a:xfrm>
+          <a:prstGeom prst="rect">
+            <a:avLst/>
+          </a:prstGeom>
+          <a:noFill/>
+          <a:ln/>
+        </p:spPr>
+        <p:txBody>
+          <a:bodyPr wrap="square" lIns="0" tIns="0" rIns="0" bIns="0" rtlCol="0" anchor="ctr"/>
+          <a:lstStyle/>
+          <a:p>
+            <a:pPr indent="0" marL="0">
+              <a:buNone/>
+            </a:pPr>
+            <a:r>
+              <a:rPr lang="en-US" sz="1200" dirty="0">
+                <a:solidFill>
+                  <a:srgbClr val="1A1A2E"/>
+                </a:solidFill>
+                <a:latin typeface="Calibri" pitchFamily="34" charset="0"/>
+                <a:ea typeface="Calibri" pitchFamily="34" charset="-122"/>
+                <a:cs typeface="Calibri" pitchFamily="34" charset="-120"/>
+              </a:rPr>
+              <a:t>→ Faiblesses : pas de chiffrement par défaut, pas d'audit trail</a:t>
+            </a:r>
+            <a:endParaRPr lang="en-US" sz="1200" dirty="0"/>
+          </a:p>
+        </p:txBody>
+      </p:sp>
+      <p:sp>
+        <p:nvSpPr>
+          <p:cNvPr id="25" name="Shape 23"/>
+          <p:cNvSpPr/>
+          <p:nvPr/>
+        </p:nvSpPr>
+        <p:spPr>
+          <a:xfrm>
+            <a:off x="457200" y="4354830"/>
+            <a:ext cx="8229600" cy="464058"/>
+          </a:xfrm>
+          <a:prstGeom prst="rect">
+            <a:avLst/>
+          </a:prstGeom>
+          <a:solidFill>
+            <a:srgbClr val="E3F2FD"/>
+          </a:solidFill>
+          <a:ln/>
+          <a:effectLst>
+            <a:outerShdw sx="100000" sy="100000" kx="0" ky="0" algn="bl" rotWithShape="0" blurRad="50800" dist="25400" dir="8100000">
+              <a:srgbClr val="000000">
+                <a:alpha val="12000"/>
+              </a:srgbClr>
+            </a:outerShdw>
+          </a:effectLst>
+        </p:spPr>
+      </p:sp>
+      <p:sp>
+        <p:nvSpPr>
+          <p:cNvPr id="26" name="Shape 24"/>
+          <p:cNvSpPr/>
+          <p:nvPr/>
+        </p:nvSpPr>
+        <p:spPr>
+          <a:xfrm>
+            <a:off x="457200" y="4354830"/>
+            <a:ext cx="45720" cy="464058"/>
+          </a:xfrm>
+          <a:prstGeom prst="rect">
+            <a:avLst/>
+          </a:prstGeom>
+          <a:solidFill>
+            <a:srgbClr val="1565C0"/>
+          </a:solidFill>
+          <a:ln/>
+        </p:spPr>
+      </p:sp>
+      <p:sp>
+        <p:nvSpPr>
+          <p:cNvPr id="27" name="Text 25"/>
+          <p:cNvSpPr/>
+          <p:nvPr/>
+        </p:nvSpPr>
+        <p:spPr>
+          <a:xfrm>
+            <a:off x="685800" y="4354830"/>
+            <a:ext cx="7818120" cy="464058"/>
+          </a:xfrm>
+          <a:prstGeom prst="rect">
+            <a:avLst/>
+          </a:prstGeom>
+          <a:noFill/>
+          <a:ln/>
+        </p:spPr>
+        <p:txBody>
+          <a:bodyPr wrap="square" lIns="0" tIns="0" rIns="0" bIns="0" rtlCol="0" anchor="ctr"/>
+          <a:lstStyle/>
+          <a:p>
+            <a:pPr indent="0" marL="0">
+              <a:buNone/>
+            </a:pPr>
+            <a:r>
+              <a:rPr lang="en-US" sz="1200" dirty="0">
+                <a:solidFill>
+                  <a:srgbClr val="1A1A2E"/>
+                </a:solidFill>
+                <a:latin typeface="Calibri" pitchFamily="34" charset="0"/>
+                <a:ea typeface="Calibri" pitchFamily="34" charset="-122"/>
+                <a:cs typeface="Calibri" pitchFamily="34" charset="-120"/>
+              </a:rPr>
+              <a:t>→ Améliorations : backup automatique, logs d'accès, SSL</a:t>
+            </a:r>
+            <a:endParaRPr lang="en-US" sz="1200" dirty="0"/>
           </a:p>
         </p:txBody>
       </p:sp>
@@ -3985,6 +4567,613 @@
 <file path=ppt/slides/slide6.xml><?xml version="1.0" encoding="utf-8"?>
 <p:sld xmlns:a="http://schemas.openxmlformats.org/drawingml/2006/main" xmlns:r="http://schemas.openxmlformats.org/officeDocument/2006/relationships" xmlns:p="http://schemas.openxmlformats.org/presentationml/2006/main">
   <p:cSld name="Slide 6">
+    <p:bg>
+      <p:bgPr>
+        <a:solidFill>
+          <a:srgbClr val="F5F7FA"/>
+        </a:solidFill>
+      </p:bgPr>
+    </p:bg>
+    <p:spTree>
+      <p:nvGrpSpPr>
+        <p:cNvPr id="1" name=""/>
+        <p:cNvGrpSpPr/>
+        <p:nvPr/>
+      </p:nvGrpSpPr>
+      <p:grpSpPr>
+        <a:xfrm>
+          <a:off x="0" y="0"/>
+          <a:ext cx="0" cy="0"/>
+          <a:chOff x="0" y="0"/>
+          <a:chExt cx="0" cy="0"/>
+        </a:xfrm>
+      </p:grpSpPr>
+      <p:sp>
+        <p:nvSpPr>
+          <p:cNvPr id="2" name="Shape 0"/>
+          <p:cNvSpPr/>
+          <p:nvPr/>
+        </p:nvSpPr>
+        <p:spPr>
+          <a:xfrm>
+            <a:off x="0" y="0"/>
+            <a:ext cx="9144000" cy="54864"/>
+          </a:xfrm>
+          <a:prstGeom prst="rect">
+            <a:avLst/>
+          </a:prstGeom>
+          <a:solidFill>
+            <a:srgbClr val="1565C0"/>
+          </a:solidFill>
+          <a:ln/>
+        </p:spPr>
+      </p:sp>
+      <p:sp>
+        <p:nvSpPr>
+          <p:cNvPr id="3" name="Text 1"/>
+          <p:cNvSpPr/>
+          <p:nvPr/>
+        </p:nvSpPr>
+        <p:spPr>
+          <a:xfrm>
+            <a:off x="457200" y="182880"/>
+            <a:ext cx="8229600" cy="594360"/>
+          </a:xfrm>
+          <a:prstGeom prst="rect">
+            <a:avLst/>
+          </a:prstGeom>
+          <a:noFill/>
+          <a:ln/>
+        </p:spPr>
+        <p:txBody>
+          <a:bodyPr wrap="square" lIns="0" tIns="0" rIns="0" bIns="0" rtlCol="0" anchor="ctr"/>
+          <a:lstStyle/>
+          <a:p>
+            <a:pPr indent="0" marL="0">
+              <a:buNone/>
+            </a:pPr>
+            <a:r>
+              <a:rPr lang="en-US" sz="2400" b="1" dirty="0">
+                <a:solidFill>
+                  <a:srgbClr val="0D47A1"/>
+                </a:solidFill>
+                <a:latin typeface="Trebuchet MS" pitchFamily="34" charset="0"/>
+                <a:ea typeface="Trebuchet MS" pitchFamily="34" charset="-122"/>
+                <a:cs typeface="Trebuchet MS" pitchFamily="34" charset="-120"/>
+              </a:rPr>
+              <a:t>Exercice Module 16</a:t>
+            </a:r>
+            <a:endParaRPr lang="en-US" sz="2400" dirty="0"/>
+          </a:p>
+        </p:txBody>
+      </p:sp>
+      <p:sp>
+        <p:nvSpPr>
+          <p:cNvPr id="4" name="Shape 2"/>
+          <p:cNvSpPr/>
+          <p:nvPr/>
+        </p:nvSpPr>
+        <p:spPr>
+          <a:xfrm>
+            <a:off x="457200" y="914400"/>
+            <a:ext cx="8229600" cy="521208"/>
+          </a:xfrm>
+          <a:prstGeom prst="rect">
+            <a:avLst/>
+          </a:prstGeom>
+          <a:solidFill>
+            <a:srgbClr val="FFFFFF"/>
+          </a:solidFill>
+          <a:ln/>
+          <a:effectLst>
+            <a:outerShdw sx="100000" sy="100000" kx="0" ky="0" algn="bl" rotWithShape="0" blurRad="50800" dist="25400" dir="8100000">
+              <a:srgbClr val="000000">
+                <a:alpha val="12000"/>
+              </a:srgbClr>
+            </a:outerShdw>
+          </a:effectLst>
+        </p:spPr>
+      </p:sp>
+      <p:sp>
+        <p:nvSpPr>
+          <p:cNvPr id="5" name="Shape 3"/>
+          <p:cNvSpPr/>
+          <p:nvPr/>
+        </p:nvSpPr>
+        <p:spPr>
+          <a:xfrm>
+            <a:off x="457200" y="914400"/>
+            <a:ext cx="45720" cy="521208"/>
+          </a:xfrm>
+          <a:prstGeom prst="rect">
+            <a:avLst/>
+          </a:prstGeom>
+          <a:solidFill>
+            <a:srgbClr val="1565C0"/>
+          </a:solidFill>
+          <a:ln/>
+        </p:spPr>
+      </p:sp>
+      <p:sp>
+        <p:nvSpPr>
+          <p:cNvPr id="6" name="Text 4"/>
+          <p:cNvSpPr/>
+          <p:nvPr/>
+        </p:nvSpPr>
+        <p:spPr>
+          <a:xfrm>
+            <a:off x="685800" y="914400"/>
+            <a:ext cx="7818120" cy="521208"/>
+          </a:xfrm>
+          <a:prstGeom prst="rect">
+            <a:avLst/>
+          </a:prstGeom>
+          <a:noFill/>
+          <a:ln/>
+        </p:spPr>
+        <p:txBody>
+          <a:bodyPr wrap="square" lIns="0" tIns="0" rIns="0" bIns="0" rtlCol="0" anchor="ctr"/>
+          <a:lstStyle/>
+          <a:p>
+            <a:pPr indent="0" marL="0">
+              <a:buNone/>
+            </a:pPr>
+            <a:r>
+              <a:rPr lang="en-US" sz="1200" dirty="0">
+                <a:solidFill>
+                  <a:srgbClr val="1A1A2E"/>
+                </a:solidFill>
+                <a:latin typeface="Calibri" pitchFamily="34" charset="0"/>
+                <a:ea typeface="Calibri" pitchFamily="34" charset="-122"/>
+                <a:cs typeface="Calibri" pitchFamily="34" charset="-120"/>
+              </a:rPr>
+              <a:t>Créer les 4 utilisateurs SwissSound avec mots de passe forts</a:t>
+            </a:r>
+            <a:endParaRPr lang="en-US" sz="1200" dirty="0"/>
+          </a:p>
+        </p:txBody>
+      </p:sp>
+      <p:sp>
+        <p:nvSpPr>
+          <p:cNvPr id="7" name="Shape 5"/>
+          <p:cNvSpPr/>
+          <p:nvPr/>
+        </p:nvSpPr>
+        <p:spPr>
+          <a:xfrm>
+            <a:off x="457200" y="1463040"/>
+            <a:ext cx="8229600" cy="521208"/>
+          </a:xfrm>
+          <a:prstGeom prst="rect">
+            <a:avLst/>
+          </a:prstGeom>
+          <a:solidFill>
+            <a:srgbClr val="E3F2FD"/>
+          </a:solidFill>
+          <a:ln/>
+          <a:effectLst>
+            <a:outerShdw sx="100000" sy="100000" kx="0" ky="0" algn="bl" rotWithShape="0" blurRad="50800" dist="25400" dir="8100000">
+              <a:srgbClr val="000000">
+                <a:alpha val="12000"/>
+              </a:srgbClr>
+            </a:outerShdw>
+          </a:effectLst>
+        </p:spPr>
+      </p:sp>
+      <p:sp>
+        <p:nvSpPr>
+          <p:cNvPr id="8" name="Shape 6"/>
+          <p:cNvSpPr/>
+          <p:nvPr/>
+        </p:nvSpPr>
+        <p:spPr>
+          <a:xfrm>
+            <a:off x="457200" y="1463040"/>
+            <a:ext cx="45720" cy="521208"/>
+          </a:xfrm>
+          <a:prstGeom prst="rect">
+            <a:avLst/>
+          </a:prstGeom>
+          <a:solidFill>
+            <a:srgbClr val="1565C0"/>
+          </a:solidFill>
+          <a:ln/>
+        </p:spPr>
+      </p:sp>
+      <p:sp>
+        <p:nvSpPr>
+          <p:cNvPr id="9" name="Text 7"/>
+          <p:cNvSpPr/>
+          <p:nvPr/>
+        </p:nvSpPr>
+        <p:spPr>
+          <a:xfrm>
+            <a:off x="685800" y="1463040"/>
+            <a:ext cx="7818120" cy="521208"/>
+          </a:xfrm>
+          <a:prstGeom prst="rect">
+            <a:avLst/>
+          </a:prstGeom>
+          <a:noFill/>
+          <a:ln/>
+        </p:spPr>
+        <p:txBody>
+          <a:bodyPr wrap="square" lIns="0" tIns="0" rIns="0" bIns="0" rtlCol="0" anchor="ctr"/>
+          <a:lstStyle/>
+          <a:p>
+            <a:pPr indent="0" marL="0">
+              <a:buNone/>
+            </a:pPr>
+            <a:r>
+              <a:rPr lang="en-US" sz="1200" dirty="0">
+                <a:solidFill>
+                  <a:srgbClr val="1A1A2E"/>
+                </a:solidFill>
+                <a:latin typeface="Calibri" pitchFamily="34" charset="0"/>
+                <a:ea typeface="Calibri" pitchFamily="34" charset="-122"/>
+                <a:cs typeface="Calibri" pitchFamily="34" charset="-120"/>
+              </a:rPr>
+              <a:t>Attribuer les droits selon la matrice (GRANT)</a:t>
+            </a:r>
+            <a:endParaRPr lang="en-US" sz="1200" dirty="0"/>
+          </a:p>
+        </p:txBody>
+      </p:sp>
+      <p:sp>
+        <p:nvSpPr>
+          <p:cNvPr id="10" name="Shape 8"/>
+          <p:cNvSpPr/>
+          <p:nvPr/>
+        </p:nvSpPr>
+        <p:spPr>
+          <a:xfrm>
+            <a:off x="457200" y="2011680"/>
+            <a:ext cx="8229600" cy="521208"/>
+          </a:xfrm>
+          <a:prstGeom prst="rect">
+            <a:avLst/>
+          </a:prstGeom>
+          <a:solidFill>
+            <a:srgbClr val="FFFFFF"/>
+          </a:solidFill>
+          <a:ln/>
+          <a:effectLst>
+            <a:outerShdw sx="100000" sy="100000" kx="0" ky="0" algn="bl" rotWithShape="0" blurRad="50800" dist="25400" dir="8100000">
+              <a:srgbClr val="000000">
+                <a:alpha val="12000"/>
+              </a:srgbClr>
+            </a:outerShdw>
+          </a:effectLst>
+        </p:spPr>
+      </p:sp>
+      <p:sp>
+        <p:nvSpPr>
+          <p:cNvPr id="11" name="Shape 9"/>
+          <p:cNvSpPr/>
+          <p:nvPr/>
+        </p:nvSpPr>
+        <p:spPr>
+          <a:xfrm>
+            <a:off x="457200" y="2011680"/>
+            <a:ext cx="45720" cy="521208"/>
+          </a:xfrm>
+          <a:prstGeom prst="rect">
+            <a:avLst/>
+          </a:prstGeom>
+          <a:solidFill>
+            <a:srgbClr val="1565C0"/>
+          </a:solidFill>
+          <a:ln/>
+        </p:spPr>
+      </p:sp>
+      <p:sp>
+        <p:nvSpPr>
+          <p:cNvPr id="12" name="Text 10"/>
+          <p:cNvSpPr/>
+          <p:nvPr/>
+        </p:nvSpPr>
+        <p:spPr>
+          <a:xfrm>
+            <a:off x="685800" y="2011680"/>
+            <a:ext cx="7818120" cy="521208"/>
+          </a:xfrm>
+          <a:prstGeom prst="rect">
+            <a:avLst/>
+          </a:prstGeom>
+          <a:noFill/>
+          <a:ln/>
+        </p:spPr>
+        <p:txBody>
+          <a:bodyPr wrap="square" lIns="0" tIns="0" rIns="0" bIns="0" rtlCol="0" anchor="ctr"/>
+          <a:lstStyle/>
+          <a:p>
+            <a:pPr indent="0" marL="0">
+              <a:buNone/>
+            </a:pPr>
+            <a:r>
+              <a:rPr lang="en-US" sz="1200" dirty="0">
+                <a:solidFill>
+                  <a:srgbClr val="1A1A2E"/>
+                </a:solidFill>
+                <a:latin typeface="Calibri" pitchFamily="34" charset="0"/>
+                <a:ea typeface="Calibri" pitchFamily="34" charset="-122"/>
+                <a:cs typeface="Calibri" pitchFamily="34" charset="-120"/>
+              </a:rPr>
+              <a:t>Tester : se connecter comme 'ingenieur_son' et essayer DELETE → bloqué !</a:t>
+            </a:r>
+            <a:endParaRPr lang="en-US" sz="1200" dirty="0"/>
+          </a:p>
+        </p:txBody>
+      </p:sp>
+      <p:sp>
+        <p:nvSpPr>
+          <p:cNvPr id="13" name="Shape 11"/>
+          <p:cNvSpPr/>
+          <p:nvPr/>
+        </p:nvSpPr>
+        <p:spPr>
+          <a:xfrm>
+            <a:off x="457200" y="2560320"/>
+            <a:ext cx="8229600" cy="521208"/>
+          </a:xfrm>
+          <a:prstGeom prst="rect">
+            <a:avLst/>
+          </a:prstGeom>
+          <a:solidFill>
+            <a:srgbClr val="E3F2FD"/>
+          </a:solidFill>
+          <a:ln/>
+          <a:effectLst>
+            <a:outerShdw sx="100000" sy="100000" kx="0" ky="0" algn="bl" rotWithShape="0" blurRad="50800" dist="25400" dir="8100000">
+              <a:srgbClr val="000000">
+                <a:alpha val="12000"/>
+              </a:srgbClr>
+            </a:outerShdw>
+          </a:effectLst>
+        </p:spPr>
+      </p:sp>
+      <p:sp>
+        <p:nvSpPr>
+          <p:cNvPr id="14" name="Shape 12"/>
+          <p:cNvSpPr/>
+          <p:nvPr/>
+        </p:nvSpPr>
+        <p:spPr>
+          <a:xfrm>
+            <a:off x="457200" y="2560320"/>
+            <a:ext cx="45720" cy="521208"/>
+          </a:xfrm>
+          <a:prstGeom prst="rect">
+            <a:avLst/>
+          </a:prstGeom>
+          <a:solidFill>
+            <a:srgbClr val="1565C0"/>
+          </a:solidFill>
+          <a:ln/>
+        </p:spPr>
+      </p:sp>
+      <p:sp>
+        <p:nvSpPr>
+          <p:cNvPr id="15" name="Text 13"/>
+          <p:cNvSpPr/>
+          <p:nvPr/>
+        </p:nvSpPr>
+        <p:spPr>
+          <a:xfrm>
+            <a:off x="685800" y="2560320"/>
+            <a:ext cx="7818120" cy="521208"/>
+          </a:xfrm>
+          <a:prstGeom prst="rect">
+            <a:avLst/>
+          </a:prstGeom>
+          <a:noFill/>
+          <a:ln/>
+        </p:spPr>
+        <p:txBody>
+          <a:bodyPr wrap="square" lIns="0" tIns="0" rIns="0" bIns="0" rtlCol="0" anchor="ctr"/>
+          <a:lstStyle/>
+          <a:p>
+            <a:pPr indent="0" marL="0">
+              <a:buNone/>
+            </a:pPr>
+            <a:r>
+              <a:rPr lang="en-US" sz="1200" dirty="0">
+                <a:solidFill>
+                  <a:srgbClr val="1A1A2E"/>
+                </a:solidFill>
+                <a:latin typeface="Calibri" pitchFamily="34" charset="0"/>
+                <a:ea typeface="Calibri" pitchFamily="34" charset="-122"/>
+                <a:cs typeface="Calibri" pitchFamily="34" charset="-120"/>
+              </a:rPr>
+              <a:t>Rédiger la politique RGPD de SwissSound (1 page)</a:t>
+            </a:r>
+            <a:endParaRPr lang="en-US" sz="1200" dirty="0"/>
+          </a:p>
+        </p:txBody>
+      </p:sp>
+      <p:sp>
+        <p:nvSpPr>
+          <p:cNvPr id="16" name="Shape 14"/>
+          <p:cNvSpPr/>
+          <p:nvPr/>
+        </p:nvSpPr>
+        <p:spPr>
+          <a:xfrm>
+            <a:off x="457200" y="3108960"/>
+            <a:ext cx="8229600" cy="521208"/>
+          </a:xfrm>
+          <a:prstGeom prst="rect">
+            <a:avLst/>
+          </a:prstGeom>
+          <a:solidFill>
+            <a:srgbClr val="FFFFFF"/>
+          </a:solidFill>
+          <a:ln/>
+          <a:effectLst>
+            <a:outerShdw sx="100000" sy="100000" kx="0" ky="0" algn="bl" rotWithShape="0" blurRad="50800" dist="25400" dir="8100000">
+              <a:srgbClr val="000000">
+                <a:alpha val="12000"/>
+              </a:srgbClr>
+            </a:outerShdw>
+          </a:effectLst>
+        </p:spPr>
+      </p:sp>
+      <p:sp>
+        <p:nvSpPr>
+          <p:cNvPr id="17" name="Shape 15"/>
+          <p:cNvSpPr/>
+          <p:nvPr/>
+        </p:nvSpPr>
+        <p:spPr>
+          <a:xfrm>
+            <a:off x="457200" y="3108960"/>
+            <a:ext cx="45720" cy="521208"/>
+          </a:xfrm>
+          <a:prstGeom prst="rect">
+            <a:avLst/>
+          </a:prstGeom>
+          <a:solidFill>
+            <a:srgbClr val="1565C0"/>
+          </a:solidFill>
+          <a:ln/>
+        </p:spPr>
+      </p:sp>
+      <p:sp>
+        <p:nvSpPr>
+          <p:cNvPr id="18" name="Text 16"/>
+          <p:cNvSpPr/>
+          <p:nvPr/>
+        </p:nvSpPr>
+        <p:spPr>
+          <a:xfrm>
+            <a:off x="685800" y="3108960"/>
+            <a:ext cx="7818120" cy="521208"/>
+          </a:xfrm>
+          <a:prstGeom prst="rect">
+            <a:avLst/>
+          </a:prstGeom>
+          <a:noFill/>
+          <a:ln/>
+        </p:spPr>
+        <p:txBody>
+          <a:bodyPr wrap="square" lIns="0" tIns="0" rIns="0" bIns="0" rtlCol="0" anchor="ctr"/>
+          <a:lstStyle/>
+          <a:p>
+            <a:pPr indent="0" marL="0">
+              <a:buNone/>
+            </a:pPr>
+            <a:r>
+              <a:rPr lang="en-US" sz="1200" dirty="0">
+                <a:solidFill>
+                  <a:srgbClr val="1A1A2E"/>
+                </a:solidFill>
+                <a:latin typeface="Calibri" pitchFamily="34" charset="0"/>
+                <a:ea typeface="Calibri" pitchFamily="34" charset="-122"/>
+                <a:cs typeface="Calibri" pitchFamily="34" charset="-120"/>
+              </a:rPr>
+              <a:t>Chiffrer les emails avec AES_ENCRYPT (optionnel)</a:t>
+            </a:r>
+            <a:endParaRPr lang="en-US" sz="1200" dirty="0"/>
+          </a:p>
+        </p:txBody>
+      </p:sp>
+      <p:sp>
+        <p:nvSpPr>
+          <p:cNvPr id="19" name="Shape 17"/>
+          <p:cNvSpPr/>
+          <p:nvPr/>
+        </p:nvSpPr>
+        <p:spPr>
+          <a:xfrm>
+            <a:off x="457200" y="3657600"/>
+            <a:ext cx="8229600" cy="521208"/>
+          </a:xfrm>
+          <a:prstGeom prst="rect">
+            <a:avLst/>
+          </a:prstGeom>
+          <a:solidFill>
+            <a:srgbClr val="E3F2FD"/>
+          </a:solidFill>
+          <a:ln/>
+          <a:effectLst>
+            <a:outerShdw sx="100000" sy="100000" kx="0" ky="0" algn="bl" rotWithShape="0" blurRad="50800" dist="25400" dir="8100000">
+              <a:srgbClr val="000000">
+                <a:alpha val="12000"/>
+              </a:srgbClr>
+            </a:outerShdw>
+          </a:effectLst>
+        </p:spPr>
+      </p:sp>
+      <p:sp>
+        <p:nvSpPr>
+          <p:cNvPr id="20" name="Shape 18"/>
+          <p:cNvSpPr/>
+          <p:nvPr/>
+        </p:nvSpPr>
+        <p:spPr>
+          <a:xfrm>
+            <a:off x="457200" y="3657600"/>
+            <a:ext cx="45720" cy="521208"/>
+          </a:xfrm>
+          <a:prstGeom prst="rect">
+            <a:avLst/>
+          </a:prstGeom>
+          <a:solidFill>
+            <a:srgbClr val="1565C0"/>
+          </a:solidFill>
+          <a:ln/>
+        </p:spPr>
+      </p:sp>
+      <p:sp>
+        <p:nvSpPr>
+          <p:cNvPr id="21" name="Text 19"/>
+          <p:cNvSpPr/>
+          <p:nvPr/>
+        </p:nvSpPr>
+        <p:spPr>
+          <a:xfrm>
+            <a:off x="685800" y="3657600"/>
+            <a:ext cx="7818120" cy="521208"/>
+          </a:xfrm>
+          <a:prstGeom prst="rect">
+            <a:avLst/>
+          </a:prstGeom>
+          <a:noFill/>
+          <a:ln/>
+        </p:spPr>
+        <p:txBody>
+          <a:bodyPr wrap="square" lIns="0" tIns="0" rIns="0" bIns="0" rtlCol="0" anchor="ctr"/>
+          <a:lstStyle/>
+          <a:p>
+            <a:pPr indent="0" marL="0">
+              <a:buNone/>
+            </a:pPr>
+            <a:r>
+              <a:rPr lang="en-US" sz="1200" dirty="0">
+                <a:solidFill>
+                  <a:srgbClr val="1A1A2E"/>
+                </a:solidFill>
+                <a:latin typeface="Calibri" pitchFamily="34" charset="0"/>
+                <a:ea typeface="Calibri" pitchFamily="34" charset="-122"/>
+                <a:cs typeface="Calibri" pitchFamily="34" charset="-120"/>
+              </a:rPr>
+              <a:t>DÉFI D2 : évaluation critique complète + 5 améliorations argumentées</a:t>
+            </a:r>
+            <a:endParaRPr lang="en-US" sz="1200" dirty="0"/>
+          </a:p>
+        </p:txBody>
+      </p:sp>
+    </p:spTree>
+  </p:cSld>
+  <p:clrMapOvr>
+    <a:masterClrMapping/>
+  </p:clrMapOvr>
+</p:sld>
+</file>
+
+<file path=ppt/slides/slide7.xml><?xml version="1.0" encoding="utf-8"?>
+<p:sld xmlns:a="http://schemas.openxmlformats.org/drawingml/2006/main" xmlns:r="http://schemas.openxmlformats.org/officeDocument/2006/relationships" xmlns:p="http://schemas.openxmlformats.org/presentationml/2006/main">
+  <p:cSld name="Slide 7">
     <p:bg>
       <p:bgPr>
         <a:solidFill>
@@ -4006,39 +5195,51 @@
           <a:chExt cx="0" cy="0"/>
         </a:xfrm>
       </p:grpSpPr>
-      <p:pic>
-        <p:nvPicPr>
-          <p:cNvPr id="2" name="Image 0" descr="preencoded.png">    </p:cNvPr>
-          <p:cNvPicPr>
-            <a:picLocks noChangeAspect="1"/>
-          </p:cNvPicPr>
-          <p:nvPr/>
-        </p:nvPicPr>
-        <p:blipFill>
-          <a:blip r:embed="rId1"/>
-          <a:stretch>
-            <a:fillRect/>
-          </a:stretch>
-        </p:blipFill>
-        <p:spPr>
-          <a:xfrm>
-            <a:off x="4023360" y="457200"/>
-            <a:ext cx="1097280" cy="1097280"/>
-          </a:xfrm>
-          <a:prstGeom prst="rect">
-            <a:avLst/>
-          </a:prstGeom>
-        </p:spPr>
-      </p:pic>
-      <p:sp>
-        <p:nvSpPr>
-          <p:cNvPr id="3" name="Text 0"/>
-          <p:cNvSpPr/>
-          <p:nvPr/>
-        </p:nvSpPr>
-        <p:spPr>
-          <a:xfrm>
-            <a:off x="457200" y="1737360"/>
+      <p:sp>
+        <p:nvSpPr>
+          <p:cNvPr id="2" name="Text 0"/>
+          <p:cNvSpPr/>
+          <p:nvPr/>
+        </p:nvSpPr>
+        <p:spPr>
+          <a:xfrm>
+            <a:off x="3840480" y="457200"/>
+            <a:ext cx="1463040" cy="1097280"/>
+          </a:xfrm>
+          <a:prstGeom prst="rect">
+            <a:avLst/>
+          </a:prstGeom>
+          <a:noFill/>
+          <a:ln/>
+        </p:spPr>
+        <p:txBody>
+          <a:bodyPr wrap="square" lIns="0" tIns="0" rIns="0" bIns="0" rtlCol="0" anchor="ctr"/>
+          <a:lstStyle/>
+          <a:p>
+            <a:pPr algn="ctr" indent="0" marL="0">
+              <a:buNone/>
+            </a:pPr>
+            <a:r>
+              <a:rPr lang="en-US" sz="6000" dirty="0">
+                <a:solidFill>
+                  <a:srgbClr val="000000"/>
+                </a:solidFill>
+              </a:rPr>
+              <a:t>🎮</a:t>
+            </a:r>
+            <a:endParaRPr lang="en-US" sz="6000" dirty="0"/>
+          </a:p>
+        </p:txBody>
+      </p:sp>
+      <p:sp>
+        <p:nvSpPr>
+          <p:cNvPr id="3" name="Text 1"/>
+          <p:cNvSpPr/>
+          <p:nvPr/>
+        </p:nvSpPr>
+        <p:spPr>
+          <a:xfrm>
+            <a:off x="457200" y="1645920"/>
             <a:ext cx="8229600" cy="548640"/>
           </a:xfrm>
           <a:prstGeom prst="rect">
@@ -4063,7 +5264,7 @@
                 <a:ea typeface="Trebuchet MS" pitchFamily="34" charset="-122"/>
                 <a:cs typeface="Trebuchet MS" pitchFamily="34" charset="-120"/>
               </a:rPr>
-              <a:t>🎮 Mini-jeu : Module 16</a:t>
+              <a:t>Mini-jeu : Le Coffre-Fort</a:t>
             </a:r>
             <a:endParaRPr lang="en-US" sz="2600" dirty="0"/>
           </a:p>
@@ -4071,14 +5272,14 @@
       </p:sp>
       <p:sp>
         <p:nvSpPr>
-          <p:cNvPr id="4" name="Text 1"/>
-          <p:cNvSpPr/>
-          <p:nvPr/>
-        </p:nvSpPr>
-        <p:spPr>
-          <a:xfrm>
-            <a:off x="914400" y="2377440"/>
-            <a:ext cx="7315200" cy="457200"/>
+          <p:cNvPr id="4" name="Text 2"/>
+          <p:cNvSpPr/>
+          <p:nvPr/>
+        </p:nvSpPr>
+        <p:spPr>
+          <a:xfrm>
+            <a:off x="1371600" y="2286000"/>
+            <a:ext cx="6400800" cy="731520"/>
           </a:xfrm>
           <a:prstGeom prst="rect">
             <a:avLst/>
@@ -4102,7 +5303,7 @@
                 <a:ea typeface="Calibri" pitchFamily="34" charset="-122"/>
                 <a:cs typeface="Calibri" pitchFamily="34" charset="-120"/>
               </a:rPr>
-              <a:t>Quiz interactif + Score + Correction automatique</a:t>
+              <a:t>Donnez les bons GRANT sans créer de faille !</a:t>
             </a:r>
             <a:endParaRPr lang="en-US" sz="1400" dirty="0"/>
           </a:p>
@@ -4110,13 +5311,13 @@
       </p:sp>
       <p:sp>
         <p:nvSpPr>
-          <p:cNvPr id="5" name="Shape 2"/>
-          <p:cNvSpPr/>
-          <p:nvPr/>
-        </p:nvSpPr>
-        <p:spPr>
-          <a:xfrm>
-            <a:off x="2286000" y="3200400"/>
+          <p:cNvPr id="5" name="Shape 3"/>
+          <p:cNvSpPr/>
+          <p:nvPr/>
+        </p:nvSpPr>
+        <p:spPr>
+          <a:xfrm>
+            <a:off x="2286000" y="3291840"/>
             <a:ext cx="4572000" cy="548640"/>
           </a:xfrm>
           <a:prstGeom prst="rect">
@@ -4130,13 +5331,13 @@
       </p:sp>
       <p:sp>
         <p:nvSpPr>
-          <p:cNvPr id="6" name="Text 3"/>
-          <p:cNvSpPr/>
-          <p:nvPr/>
-        </p:nvSpPr>
-        <p:spPr>
-          <a:xfrm>
-            <a:off x="2286000" y="3200400"/>
+          <p:cNvPr id="6" name="Text 4"/>
+          <p:cNvSpPr/>
+          <p:nvPr/>
+        </p:nvSpPr>
+        <p:spPr>
+          <a:xfrm>
+            <a:off x="2286000" y="3291840"/>
             <a:ext cx="4572000" cy="548640"/>
           </a:xfrm>
           <a:prstGeom prst="rect">
@@ -4161,7 +5362,7 @@
                 <a:ea typeface="Trebuchet MS" pitchFamily="34" charset="-122"/>
                 <a:cs typeface="Trebuchet MS" pitchFamily="34" charset="-120"/>
               </a:rPr>
-              <a:t>▶  Lancer le jeu sur Vercel</a:t>
+              <a:t>▶  Lancer le jeu</a:t>
             </a:r>
             <a:endParaRPr lang="en-US" sz="1800" dirty="0"/>
           </a:p>
@@ -4175,9 +5376,9 @@
 </p:sld>
 </file>
 
-<file path=ppt/slides/slide7.xml><?xml version="1.0" encoding="utf-8"?>
+<file path=ppt/slides/slide8.xml><?xml version="1.0" encoding="utf-8"?>
 <p:sld xmlns:a="http://schemas.openxmlformats.org/drawingml/2006/main" xmlns:r="http://schemas.openxmlformats.org/officeDocument/2006/relationships" xmlns:p="http://schemas.openxmlformats.org/presentationml/2006/main">
-  <p:cSld name="Slide 7">
+  <p:cSld name="Slide 8">
     <p:bg>
       <p:bgPr>
         <a:solidFill>
@@ -4207,8 +5408,8 @@
         </p:nvSpPr>
         <p:spPr>
           <a:xfrm>
-            <a:off x="457200" y="228600"/>
-            <a:ext cx="8229600" cy="457200"/>
+            <a:off x="457200" y="137160"/>
+            <a:ext cx="5486400" cy="411480"/>
           </a:xfrm>
           <a:prstGeom prst="rect">
             <a:avLst/>
@@ -4224,7 +5425,7 @@
               <a:buNone/>
             </a:pPr>
             <a:r>
-              <a:rPr lang="en-US" sz="2000" b="1" dirty="0">
+              <a:rPr lang="en-US" sz="1800" b="1" dirty="0">
                 <a:solidFill>
                   <a:srgbClr val="0D47A1"/>
                 </a:solidFill>
@@ -4232,9 +5433,9 @@
                 <a:ea typeface="Trebuchet MS" pitchFamily="34" charset="-122"/>
                 <a:cs typeface="Trebuchet MS" pitchFamily="34" charset="-120"/>
               </a:rPr>
-              <a:t>📋 Mémo Module 16 — Sécurité, RGPD, chiffrement</a:t>
-            </a:r>
-            <a:endParaRPr lang="en-US" sz="2000" dirty="0"/>
+              <a:t>📋 Mémo Module 16</a:t>
+            </a:r>
+            <a:endParaRPr lang="en-US" sz="1800" dirty="0"/>
           </a:p>
         </p:txBody>
       </p:sp>
@@ -4246,8 +5447,8 @@
         </p:nvSpPr>
         <p:spPr>
           <a:xfrm>
-            <a:off x="457200" y="731520"/>
-            <a:ext cx="8229600" cy="320040"/>
+            <a:off x="457200" y="548640"/>
+            <a:ext cx="8229600" cy="274320"/>
           </a:xfrm>
           <a:prstGeom prst="rect">
             <a:avLst/>
@@ -4266,8 +5467,8 @@
         </p:nvSpPr>
         <p:spPr>
           <a:xfrm>
-            <a:off x="640080" y="731520"/>
-            <a:ext cx="7772400" cy="320040"/>
+            <a:off x="640080" y="548640"/>
+            <a:ext cx="7772400" cy="274320"/>
           </a:xfrm>
           <a:prstGeom prst="rect">
             <a:avLst/>
@@ -4283,7 +5484,7 @@
               <a:buNone/>
             </a:pPr>
             <a:r>
-              <a:rPr lang="en-US" sz="1000" b="1" dirty="0">
+              <a:rPr lang="en-US" sz="900" b="1" dirty="0">
                 <a:solidFill>
                   <a:srgbClr val="E65100"/>
                 </a:solidFill>
@@ -4291,9 +5492,9 @@
                 <a:ea typeface="Calibri" pitchFamily="34" charset="-122"/>
                 <a:cs typeface="Calibri" pitchFamily="34" charset="-120"/>
               </a:rPr>
-              <a:t>🔒 Ce mémo se débloque quand toutes les phases du module sont terminées !</a:t>
-            </a:r>
-            <a:endParaRPr lang="en-US" sz="1000" dirty="0"/>
+              <a:t>🔒 Déblocable après complétion</a:t>
+            </a:r>
+            <a:endParaRPr lang="en-US" sz="900" dirty="0"/>
           </a:p>
         </p:txBody>
       </p:sp>
@@ -4305,8 +5506,8 @@
         </p:nvSpPr>
         <p:spPr>
           <a:xfrm>
-            <a:off x="457200" y="1188720"/>
-            <a:ext cx="8229600" cy="713232"/>
+            <a:off x="457200" y="960120"/>
+            <a:ext cx="2286000" cy="475488"/>
           </a:xfrm>
           <a:prstGeom prst="rect">
             <a:avLst/>
@@ -4325,8 +5526,8 @@
         </p:nvSpPr>
         <p:spPr>
           <a:xfrm>
-            <a:off x="640080" y="1188720"/>
-            <a:ext cx="2560320" cy="713232"/>
+            <a:off x="548640" y="960120"/>
+            <a:ext cx="2103120" cy="475488"/>
           </a:xfrm>
           <a:prstGeom prst="rect">
             <a:avLst/>
@@ -4342,7 +5543,7 @@
               <a:buNone/>
             </a:pPr>
             <a:r>
-              <a:rPr lang="en-US" sz="1000" b="1" dirty="0">
+              <a:rPr lang="en-US" sz="900" b="1" dirty="0">
                 <a:solidFill>
                   <a:srgbClr val="0D47A1"/>
                 </a:solidFill>
@@ -4350,22 +5551,42 @@
                 <a:ea typeface="Trebuchet MS" pitchFamily="34" charset="-122"/>
                 <a:cs typeface="Trebuchet MS" pitchFamily="34" charset="-120"/>
               </a:rPr>
-              <a:t>Gestion des utilisateurs MySQL</a:t>
-            </a:r>
-            <a:endParaRPr lang="en-US" sz="1000" dirty="0"/>
-          </a:p>
-        </p:txBody>
-      </p:sp>
-      <p:sp>
-        <p:nvSpPr>
-          <p:cNvPr id="7" name="Text 5"/>
-          <p:cNvSpPr/>
-          <p:nvPr/>
-        </p:nvSpPr>
-        <p:spPr>
-          <a:xfrm>
-            <a:off x="3291840" y="1188720"/>
-            <a:ext cx="5212080" cy="713232"/>
+              <a:t>CREATE USER</a:t>
+            </a:r>
+            <a:endParaRPr lang="en-US" sz="900" dirty="0"/>
+          </a:p>
+        </p:txBody>
+      </p:sp>
+      <p:sp>
+        <p:nvSpPr>
+          <p:cNvPr id="7" name="Shape 5"/>
+          <p:cNvSpPr/>
+          <p:nvPr/>
+        </p:nvSpPr>
+        <p:spPr>
+          <a:xfrm>
+            <a:off x="2743200" y="960120"/>
+            <a:ext cx="5943600" cy="475488"/>
+          </a:xfrm>
+          <a:prstGeom prst="rect">
+            <a:avLst/>
+          </a:prstGeom>
+          <a:solidFill>
+            <a:srgbClr val="E3F2FD"/>
+          </a:solidFill>
+          <a:ln/>
+        </p:spPr>
+      </p:sp>
+      <p:sp>
+        <p:nvSpPr>
+          <p:cNvPr id="8" name="Text 6"/>
+          <p:cNvSpPr/>
+          <p:nvPr/>
+        </p:nvSpPr>
+        <p:spPr>
+          <a:xfrm>
+            <a:off x="2834640" y="960120"/>
+            <a:ext cx="5760720" cy="475488"/>
           </a:xfrm>
           <a:prstGeom prst="rect">
             <a:avLst/>
@@ -4389,7 +5610,7 @@
                 <a:ea typeface="Calibri" pitchFamily="34" charset="-122"/>
                 <a:cs typeface="Calibri" pitchFamily="34" charset="-120"/>
               </a:rPr>
-              <a:t>CREATE USER 'comptable'@'localhost' IDENTIFIED BY 'MotDePasse!'; | GRANT SELECT, INSERT ON swisssound.facture TO 'compta...</a:t>
+              <a:t>'nom'@'localhost' IDENTIFIED BY 'motdepasse'</a:t>
             </a:r>
             <a:endParaRPr lang="en-US" sz="900" dirty="0"/>
           </a:p>
@@ -4397,34 +5618,34 @@
       </p:sp>
       <p:sp>
         <p:nvSpPr>
-          <p:cNvPr id="8" name="Shape 6"/>
-          <p:cNvSpPr/>
-          <p:nvPr/>
-        </p:nvSpPr>
-        <p:spPr>
-          <a:xfrm>
-            <a:off x="457200" y="1965960"/>
-            <a:ext cx="8229600" cy="713232"/>
-          </a:xfrm>
-          <a:prstGeom prst="rect">
-            <a:avLst/>
-          </a:prstGeom>
-          <a:solidFill>
-            <a:srgbClr val="FFFFFF"/>
-          </a:solidFill>
-          <a:ln/>
-        </p:spPr>
-      </p:sp>
-      <p:sp>
-        <p:nvSpPr>
-          <p:cNvPr id="9" name="Text 7"/>
-          <p:cNvSpPr/>
-          <p:nvPr/>
-        </p:nvSpPr>
-        <p:spPr>
-          <a:xfrm>
-            <a:off x="640080" y="1965960"/>
-            <a:ext cx="2560320" cy="713232"/>
+          <p:cNvPr id="9" name="Shape 7"/>
+          <p:cNvSpPr/>
+          <p:nvPr/>
+        </p:nvSpPr>
+        <p:spPr>
+          <a:xfrm>
+            <a:off x="457200" y="1463040"/>
+            <a:ext cx="2286000" cy="475488"/>
+          </a:xfrm>
+          <a:prstGeom prst="rect">
+            <a:avLst/>
+          </a:prstGeom>
+          <a:solidFill>
+            <a:srgbClr val="F0F0F0"/>
+          </a:solidFill>
+          <a:ln/>
+        </p:spPr>
+      </p:sp>
+      <p:sp>
+        <p:nvSpPr>
+          <p:cNvPr id="10" name="Text 8"/>
+          <p:cNvSpPr/>
+          <p:nvPr/>
+        </p:nvSpPr>
+        <p:spPr>
+          <a:xfrm>
+            <a:off x="548640" y="1463040"/>
+            <a:ext cx="2103120" cy="475488"/>
           </a:xfrm>
           <a:prstGeom prst="rect">
             <a:avLst/>
@@ -4440,7 +5661,7 @@
               <a:buNone/>
             </a:pPr>
             <a:r>
-              <a:rPr lang="en-US" sz="1000" b="1" dirty="0">
+              <a:rPr lang="en-US" sz="900" b="1" dirty="0">
                 <a:solidFill>
                   <a:srgbClr val="0D47A1"/>
                 </a:solidFill>
@@ -4448,22 +5669,42 @@
                 <a:ea typeface="Trebuchet MS" pitchFamily="34" charset="-122"/>
                 <a:cs typeface="Trebuchet MS" pitchFamily="34" charset="-120"/>
               </a:rPr>
-              <a:t>Principe du moindre privilège</a:t>
-            </a:r>
-            <a:endParaRPr lang="en-US" sz="1000" dirty="0"/>
-          </a:p>
-        </p:txBody>
-      </p:sp>
-      <p:sp>
-        <p:nvSpPr>
-          <p:cNvPr id="10" name="Text 8"/>
-          <p:cNvSpPr/>
-          <p:nvPr/>
-        </p:nvSpPr>
-        <p:spPr>
-          <a:xfrm>
-            <a:off x="3291840" y="1965960"/>
-            <a:ext cx="5212080" cy="713232"/>
+              <a:t>GRANT</a:t>
+            </a:r>
+            <a:endParaRPr lang="en-US" sz="900" dirty="0"/>
+          </a:p>
+        </p:txBody>
+      </p:sp>
+      <p:sp>
+        <p:nvSpPr>
+          <p:cNvPr id="11" name="Shape 9"/>
+          <p:cNvSpPr/>
+          <p:nvPr/>
+        </p:nvSpPr>
+        <p:spPr>
+          <a:xfrm>
+            <a:off x="2743200" y="1463040"/>
+            <a:ext cx="5943600" cy="475488"/>
+          </a:xfrm>
+          <a:prstGeom prst="rect">
+            <a:avLst/>
+          </a:prstGeom>
+          <a:solidFill>
+            <a:srgbClr val="F0F0F0"/>
+          </a:solidFill>
+          <a:ln/>
+        </p:spPr>
+      </p:sp>
+      <p:sp>
+        <p:nvSpPr>
+          <p:cNvPr id="12" name="Text 10"/>
+          <p:cNvSpPr/>
+          <p:nvPr/>
+        </p:nvSpPr>
+        <p:spPr>
+          <a:xfrm>
+            <a:off x="2834640" y="1463040"/>
+            <a:ext cx="5760720" cy="475488"/>
           </a:xfrm>
           <a:prstGeom prst="rect">
             <a:avLst/>
@@ -4487,7 +5728,7 @@
                 <a:ea typeface="Calibri" pitchFamily="34" charset="-122"/>
                 <a:cs typeface="Calibri" pitchFamily="34" charset="-120"/>
               </a:rPr>
-              <a:t>Donner UNIQUEMENT les droits strictement nécessaires | admin_studio : ALL PRIVILEGES (seul admin) | ingenieur_son : SELE...</a:t>
+              <a:t>Donner des droits : GRANT SELECT ON table TO user</a:t>
             </a:r>
             <a:endParaRPr lang="en-US" sz="900" dirty="0"/>
           </a:p>
@@ -4495,14 +5736,14 @@
       </p:sp>
       <p:sp>
         <p:nvSpPr>
-          <p:cNvPr id="11" name="Shape 9"/>
-          <p:cNvSpPr/>
-          <p:nvPr/>
-        </p:nvSpPr>
-        <p:spPr>
-          <a:xfrm>
-            <a:off x="457200" y="2743200"/>
-            <a:ext cx="8229600" cy="713232"/>
+          <p:cNvPr id="13" name="Shape 11"/>
+          <p:cNvSpPr/>
+          <p:nvPr/>
+        </p:nvSpPr>
+        <p:spPr>
+          <a:xfrm>
+            <a:off x="457200" y="1965960"/>
+            <a:ext cx="2286000" cy="475488"/>
           </a:xfrm>
           <a:prstGeom prst="rect">
             <a:avLst/>
@@ -4515,14 +5756,14 @@
       </p:sp>
       <p:sp>
         <p:nvSpPr>
-          <p:cNvPr id="12" name="Text 10"/>
-          <p:cNvSpPr/>
-          <p:nvPr/>
-        </p:nvSpPr>
-        <p:spPr>
-          <a:xfrm>
-            <a:off x="640080" y="2743200"/>
-            <a:ext cx="2560320" cy="713232"/>
+          <p:cNvPr id="14" name="Text 12"/>
+          <p:cNvSpPr/>
+          <p:nvPr/>
+        </p:nvSpPr>
+        <p:spPr>
+          <a:xfrm>
+            <a:off x="548640" y="1965960"/>
+            <a:ext cx="2103120" cy="475488"/>
           </a:xfrm>
           <a:prstGeom prst="rect">
             <a:avLst/>
@@ -4538,7 +5779,7 @@
               <a:buNone/>
             </a:pPr>
             <a:r>
-              <a:rPr lang="en-US" sz="1000" b="1" dirty="0">
+              <a:rPr lang="en-US" sz="900" b="1" dirty="0">
                 <a:solidFill>
                   <a:srgbClr val="0D47A1"/>
                 </a:solidFill>
@@ -4546,22 +5787,42 @@
                 <a:ea typeface="Trebuchet MS" pitchFamily="34" charset="-122"/>
                 <a:cs typeface="Trebuchet MS" pitchFamily="34" charset="-120"/>
               </a:rPr>
-              <a:t>RGPD et protection des données</a:t>
-            </a:r>
-            <a:endParaRPr lang="en-US" sz="1000" dirty="0"/>
-          </a:p>
-        </p:txBody>
-      </p:sp>
-      <p:sp>
-        <p:nvSpPr>
-          <p:cNvPr id="13" name="Text 11"/>
-          <p:cNvSpPr/>
-          <p:nvPr/>
-        </p:nvSpPr>
-        <p:spPr>
-          <a:xfrm>
-            <a:off x="3291840" y="2743200"/>
-            <a:ext cx="5212080" cy="713232"/>
+              <a:t>REVOKE</a:t>
+            </a:r>
+            <a:endParaRPr lang="en-US" sz="900" dirty="0"/>
+          </a:p>
+        </p:txBody>
+      </p:sp>
+      <p:sp>
+        <p:nvSpPr>
+          <p:cNvPr id="15" name="Shape 13"/>
+          <p:cNvSpPr/>
+          <p:nvPr/>
+        </p:nvSpPr>
+        <p:spPr>
+          <a:xfrm>
+            <a:off x="2743200" y="1965960"/>
+            <a:ext cx="5943600" cy="475488"/>
+          </a:xfrm>
+          <a:prstGeom prst="rect">
+            <a:avLst/>
+          </a:prstGeom>
+          <a:solidFill>
+            <a:srgbClr val="E3F2FD"/>
+          </a:solidFill>
+          <a:ln/>
+        </p:spPr>
+      </p:sp>
+      <p:sp>
+        <p:nvSpPr>
+          <p:cNvPr id="16" name="Text 14"/>
+          <p:cNvSpPr/>
+          <p:nvPr/>
+        </p:nvSpPr>
+        <p:spPr>
+          <a:xfrm>
+            <a:off x="2834640" y="1965960"/>
+            <a:ext cx="5760720" cy="475488"/>
           </a:xfrm>
           <a:prstGeom prst="rect">
             <a:avLst/>
@@ -4585,7 +5846,7 @@
                 <a:ea typeface="Calibri" pitchFamily="34" charset="-122"/>
                 <a:cs typeface="Calibri" pitchFamily="34" charset="-120"/>
               </a:rPr>
-              <a:t>Données personnelles : nom, email, téléphone des artistes | Droit d'accès : l'artiste peut demander ses données | Droit ...</a:t>
+              <a:t>Retirer des droits : REVOKE INSERT ON table FROM user</a:t>
             </a:r>
             <a:endParaRPr lang="en-US" sz="900" dirty="0"/>
           </a:p>
@@ -4593,34 +5854,34 @@
       </p:sp>
       <p:sp>
         <p:nvSpPr>
-          <p:cNvPr id="14" name="Shape 12"/>
-          <p:cNvSpPr/>
-          <p:nvPr/>
-        </p:nvSpPr>
-        <p:spPr>
-          <a:xfrm>
-            <a:off x="457200" y="3520440"/>
-            <a:ext cx="8229600" cy="713232"/>
-          </a:xfrm>
-          <a:prstGeom prst="rect">
-            <a:avLst/>
-          </a:prstGeom>
-          <a:solidFill>
-            <a:srgbClr val="FFFFFF"/>
-          </a:solidFill>
-          <a:ln/>
-        </p:spPr>
-      </p:sp>
-      <p:sp>
-        <p:nvSpPr>
-          <p:cNvPr id="15" name="Text 13"/>
-          <p:cNvSpPr/>
-          <p:nvPr/>
-        </p:nvSpPr>
-        <p:spPr>
-          <a:xfrm>
-            <a:off x="640080" y="3520440"/>
-            <a:ext cx="2560320" cy="713232"/>
+          <p:cNvPr id="17" name="Shape 15"/>
+          <p:cNvSpPr/>
+          <p:nvPr/>
+        </p:nvSpPr>
+        <p:spPr>
+          <a:xfrm>
+            <a:off x="457200" y="2468880"/>
+            <a:ext cx="2286000" cy="475488"/>
+          </a:xfrm>
+          <a:prstGeom prst="rect">
+            <a:avLst/>
+          </a:prstGeom>
+          <a:solidFill>
+            <a:srgbClr val="F0F0F0"/>
+          </a:solidFill>
+          <a:ln/>
+        </p:spPr>
+      </p:sp>
+      <p:sp>
+        <p:nvSpPr>
+          <p:cNvPr id="18" name="Text 16"/>
+          <p:cNvSpPr/>
+          <p:nvPr/>
+        </p:nvSpPr>
+        <p:spPr>
+          <a:xfrm>
+            <a:off x="548640" y="2468880"/>
+            <a:ext cx="2103120" cy="475488"/>
           </a:xfrm>
           <a:prstGeom prst="rect">
             <a:avLst/>
@@ -4636,7 +5897,7 @@
               <a:buNone/>
             </a:pPr>
             <a:r>
-              <a:rPr lang="en-US" sz="1000" b="1" dirty="0">
+              <a:rPr lang="en-US" sz="900" b="1" dirty="0">
                 <a:solidFill>
                   <a:srgbClr val="0D47A1"/>
                 </a:solidFill>
@@ -4644,22 +5905,42 @@
                 <a:ea typeface="Trebuchet MS" pitchFamily="34" charset="-122"/>
                 <a:cs typeface="Trebuchet MS" pitchFamily="34" charset="-120"/>
               </a:rPr>
-              <a:t>Chiffrement + D2</a:t>
-            </a:r>
-            <a:endParaRPr lang="en-US" sz="1000" dirty="0"/>
-          </a:p>
-        </p:txBody>
-      </p:sp>
-      <p:sp>
-        <p:nvSpPr>
-          <p:cNvPr id="16" name="Text 14"/>
-          <p:cNvSpPr/>
-          <p:nvPr/>
-        </p:nvSpPr>
-        <p:spPr>
-          <a:xfrm>
-            <a:off x="3291840" y="3520440"/>
-            <a:ext cx="5212080" cy="713232"/>
+              <a:t>Moindre privilège</a:t>
+            </a:r>
+            <a:endParaRPr lang="en-US" sz="900" dirty="0"/>
+          </a:p>
+        </p:txBody>
+      </p:sp>
+      <p:sp>
+        <p:nvSpPr>
+          <p:cNvPr id="19" name="Shape 17"/>
+          <p:cNvSpPr/>
+          <p:nvPr/>
+        </p:nvSpPr>
+        <p:spPr>
+          <a:xfrm>
+            <a:off x="2743200" y="2468880"/>
+            <a:ext cx="5943600" cy="475488"/>
+          </a:xfrm>
+          <a:prstGeom prst="rect">
+            <a:avLst/>
+          </a:prstGeom>
+          <a:solidFill>
+            <a:srgbClr val="F0F0F0"/>
+          </a:solidFill>
+          <a:ln/>
+        </p:spPr>
+      </p:sp>
+      <p:sp>
+        <p:nvSpPr>
+          <p:cNvPr id="20" name="Text 18"/>
+          <p:cNvSpPr/>
+          <p:nvPr/>
+        </p:nvSpPr>
+        <p:spPr>
+          <a:xfrm>
+            <a:off x="2834640" y="2468880"/>
+            <a:ext cx="5760720" cy="475488"/>
           </a:xfrm>
           <a:prstGeom prst="rect">
             <a:avLst/>
@@ -4683,7 +5964,361 @@
                 <a:ea typeface="Calibri" pitchFamily="34" charset="-122"/>
                 <a:cs typeface="Calibri" pitchFamily="34" charset="-120"/>
               </a:rPr>
-              <a:t>AES_ENCRYPT(email, 'clé_secrète') → stockage chiffré | AES_DECRYPT(email_chiffre, 'clé_secrète') → lecture | Mots de pas...</a:t>
+              <a:t>Uniquement les droits STRICTEMENT nécessaires</a:t>
+            </a:r>
+            <a:endParaRPr lang="en-US" sz="900" dirty="0"/>
+          </a:p>
+        </p:txBody>
+      </p:sp>
+      <p:sp>
+        <p:nvSpPr>
+          <p:cNvPr id="21" name="Shape 19"/>
+          <p:cNvSpPr/>
+          <p:nvPr/>
+        </p:nvSpPr>
+        <p:spPr>
+          <a:xfrm>
+            <a:off x="457200" y="2971800"/>
+            <a:ext cx="2286000" cy="475488"/>
+          </a:xfrm>
+          <a:prstGeom prst="rect">
+            <a:avLst/>
+          </a:prstGeom>
+          <a:solidFill>
+            <a:srgbClr val="E3F2FD"/>
+          </a:solidFill>
+          <a:ln/>
+        </p:spPr>
+      </p:sp>
+      <p:sp>
+        <p:nvSpPr>
+          <p:cNvPr id="22" name="Text 20"/>
+          <p:cNvSpPr/>
+          <p:nvPr/>
+        </p:nvSpPr>
+        <p:spPr>
+          <a:xfrm>
+            <a:off x="548640" y="2971800"/>
+            <a:ext cx="2103120" cy="475488"/>
+          </a:xfrm>
+          <a:prstGeom prst="rect">
+            <a:avLst/>
+          </a:prstGeom>
+          <a:noFill/>
+          <a:ln/>
+        </p:spPr>
+        <p:txBody>
+          <a:bodyPr wrap="square" lIns="0" tIns="0" rIns="0" bIns="0" rtlCol="0" anchor="ctr"/>
+          <a:lstStyle/>
+          <a:p>
+            <a:pPr indent="0" marL="0">
+              <a:buNone/>
+            </a:pPr>
+            <a:r>
+              <a:rPr lang="en-US" sz="900" b="1" dirty="0">
+                <a:solidFill>
+                  <a:srgbClr val="0D47A1"/>
+                </a:solidFill>
+                <a:latin typeface="Trebuchet MS" pitchFamily="34" charset="0"/>
+                <a:ea typeface="Trebuchet MS" pitchFamily="34" charset="-122"/>
+                <a:cs typeface="Trebuchet MS" pitchFamily="34" charset="-120"/>
+              </a:rPr>
+              <a:t>RGPD</a:t>
+            </a:r>
+            <a:endParaRPr lang="en-US" sz="900" dirty="0"/>
+          </a:p>
+        </p:txBody>
+      </p:sp>
+      <p:sp>
+        <p:nvSpPr>
+          <p:cNvPr id="23" name="Shape 21"/>
+          <p:cNvSpPr/>
+          <p:nvPr/>
+        </p:nvSpPr>
+        <p:spPr>
+          <a:xfrm>
+            <a:off x="2743200" y="2971800"/>
+            <a:ext cx="5943600" cy="475488"/>
+          </a:xfrm>
+          <a:prstGeom prst="rect">
+            <a:avLst/>
+          </a:prstGeom>
+          <a:solidFill>
+            <a:srgbClr val="E3F2FD"/>
+          </a:solidFill>
+          <a:ln/>
+        </p:spPr>
+      </p:sp>
+      <p:sp>
+        <p:nvSpPr>
+          <p:cNvPr id="24" name="Text 22"/>
+          <p:cNvSpPr/>
+          <p:nvPr/>
+        </p:nvSpPr>
+        <p:spPr>
+          <a:xfrm>
+            <a:off x="2834640" y="2971800"/>
+            <a:ext cx="5760720" cy="475488"/>
+          </a:xfrm>
+          <a:prstGeom prst="rect">
+            <a:avLst/>
+          </a:prstGeom>
+          <a:noFill/>
+          <a:ln/>
+        </p:spPr>
+        <p:txBody>
+          <a:bodyPr wrap="square" lIns="0" tIns="0" rIns="0" bIns="0" rtlCol="0" anchor="ctr"/>
+          <a:lstStyle/>
+          <a:p>
+            <a:pPr indent="0" marL="0">
+              <a:buNone/>
+            </a:pPr>
+            <a:r>
+              <a:rPr lang="en-US" sz="900" dirty="0">
+                <a:solidFill>
+                  <a:srgbClr val="333333"/>
+                </a:solidFill>
+                <a:latin typeface="Calibri" pitchFamily="34" charset="0"/>
+                <a:ea typeface="Calibri" pitchFamily="34" charset="-122"/>
+                <a:cs typeface="Calibri" pitchFamily="34" charset="-120"/>
+              </a:rPr>
+              <a:t>Données personnelles : consentement, minimisation, droit à l'oubli</a:t>
+            </a:r>
+            <a:endParaRPr lang="en-US" sz="900" dirty="0"/>
+          </a:p>
+        </p:txBody>
+      </p:sp>
+      <p:sp>
+        <p:nvSpPr>
+          <p:cNvPr id="25" name="Shape 23"/>
+          <p:cNvSpPr/>
+          <p:nvPr/>
+        </p:nvSpPr>
+        <p:spPr>
+          <a:xfrm>
+            <a:off x="457200" y="3474720"/>
+            <a:ext cx="2286000" cy="475488"/>
+          </a:xfrm>
+          <a:prstGeom prst="rect">
+            <a:avLst/>
+          </a:prstGeom>
+          <a:solidFill>
+            <a:srgbClr val="F0F0F0"/>
+          </a:solidFill>
+          <a:ln/>
+        </p:spPr>
+      </p:sp>
+      <p:sp>
+        <p:nvSpPr>
+          <p:cNvPr id="26" name="Text 24"/>
+          <p:cNvSpPr/>
+          <p:nvPr/>
+        </p:nvSpPr>
+        <p:spPr>
+          <a:xfrm>
+            <a:off x="548640" y="3474720"/>
+            <a:ext cx="2103120" cy="475488"/>
+          </a:xfrm>
+          <a:prstGeom prst="rect">
+            <a:avLst/>
+          </a:prstGeom>
+          <a:noFill/>
+          <a:ln/>
+        </p:spPr>
+        <p:txBody>
+          <a:bodyPr wrap="square" lIns="0" tIns="0" rIns="0" bIns="0" rtlCol="0" anchor="ctr"/>
+          <a:lstStyle/>
+          <a:p>
+            <a:pPr indent="0" marL="0">
+              <a:buNone/>
+            </a:pPr>
+            <a:r>
+              <a:rPr lang="en-US" sz="900" b="1" dirty="0">
+                <a:solidFill>
+                  <a:srgbClr val="0D47A1"/>
+                </a:solidFill>
+                <a:latin typeface="Trebuchet MS" pitchFamily="34" charset="0"/>
+                <a:ea typeface="Trebuchet MS" pitchFamily="34" charset="-122"/>
+                <a:cs typeface="Trebuchet MS" pitchFamily="34" charset="-120"/>
+              </a:rPr>
+              <a:t>AES</a:t>
+            </a:r>
+            <a:endParaRPr lang="en-US" sz="900" dirty="0"/>
+          </a:p>
+        </p:txBody>
+      </p:sp>
+      <p:sp>
+        <p:nvSpPr>
+          <p:cNvPr id="27" name="Shape 25"/>
+          <p:cNvSpPr/>
+          <p:nvPr/>
+        </p:nvSpPr>
+        <p:spPr>
+          <a:xfrm>
+            <a:off x="2743200" y="3474720"/>
+            <a:ext cx="5943600" cy="475488"/>
+          </a:xfrm>
+          <a:prstGeom prst="rect">
+            <a:avLst/>
+          </a:prstGeom>
+          <a:solidFill>
+            <a:srgbClr val="F0F0F0"/>
+          </a:solidFill>
+          <a:ln/>
+        </p:spPr>
+      </p:sp>
+      <p:sp>
+        <p:nvSpPr>
+          <p:cNvPr id="28" name="Text 26"/>
+          <p:cNvSpPr/>
+          <p:nvPr/>
+        </p:nvSpPr>
+        <p:spPr>
+          <a:xfrm>
+            <a:off x="2834640" y="3474720"/>
+            <a:ext cx="5760720" cy="475488"/>
+          </a:xfrm>
+          <a:prstGeom prst="rect">
+            <a:avLst/>
+          </a:prstGeom>
+          <a:noFill/>
+          <a:ln/>
+        </p:spPr>
+        <p:txBody>
+          <a:bodyPr wrap="square" lIns="0" tIns="0" rIns="0" bIns="0" rtlCol="0" anchor="ctr"/>
+          <a:lstStyle/>
+          <a:p>
+            <a:pPr indent="0" marL="0">
+              <a:buNone/>
+            </a:pPr>
+            <a:r>
+              <a:rPr lang="en-US" sz="900" dirty="0">
+                <a:solidFill>
+                  <a:srgbClr val="333333"/>
+                </a:solidFill>
+                <a:latin typeface="Calibri" pitchFamily="34" charset="0"/>
+                <a:ea typeface="Calibri" pitchFamily="34" charset="-122"/>
+                <a:cs typeface="Calibri" pitchFamily="34" charset="-120"/>
+              </a:rPr>
+              <a:t>ENCRYPT/DECRYPT : chiffrement réversible pour données sensibles</a:t>
+            </a:r>
+            <a:endParaRPr lang="en-US" sz="900" dirty="0"/>
+          </a:p>
+        </p:txBody>
+      </p:sp>
+      <p:sp>
+        <p:nvSpPr>
+          <p:cNvPr id="29" name="Shape 27"/>
+          <p:cNvSpPr/>
+          <p:nvPr/>
+        </p:nvSpPr>
+        <p:spPr>
+          <a:xfrm>
+            <a:off x="457200" y="3977640"/>
+            <a:ext cx="2286000" cy="475488"/>
+          </a:xfrm>
+          <a:prstGeom prst="rect">
+            <a:avLst/>
+          </a:prstGeom>
+          <a:solidFill>
+            <a:srgbClr val="E3F2FD"/>
+          </a:solidFill>
+          <a:ln/>
+        </p:spPr>
+      </p:sp>
+      <p:sp>
+        <p:nvSpPr>
+          <p:cNvPr id="30" name="Text 28"/>
+          <p:cNvSpPr/>
+          <p:nvPr/>
+        </p:nvSpPr>
+        <p:spPr>
+          <a:xfrm>
+            <a:off x="548640" y="3977640"/>
+            <a:ext cx="2103120" cy="475488"/>
+          </a:xfrm>
+          <a:prstGeom prst="rect">
+            <a:avLst/>
+          </a:prstGeom>
+          <a:noFill/>
+          <a:ln/>
+        </p:spPr>
+        <p:txBody>
+          <a:bodyPr wrap="square" lIns="0" tIns="0" rIns="0" bIns="0" rtlCol="0" anchor="ctr"/>
+          <a:lstStyle/>
+          <a:p>
+            <a:pPr indent="0" marL="0">
+              <a:buNone/>
+            </a:pPr>
+            <a:r>
+              <a:rPr lang="en-US" sz="900" b="1" dirty="0">
+                <a:solidFill>
+                  <a:srgbClr val="0D47A1"/>
+                </a:solidFill>
+                <a:latin typeface="Trebuchet MS" pitchFamily="34" charset="0"/>
+                <a:ea typeface="Trebuchet MS" pitchFamily="34" charset="-122"/>
+                <a:cs typeface="Trebuchet MS" pitchFamily="34" charset="-120"/>
+              </a:rPr>
+              <a:t>SHA2</a:t>
+            </a:r>
+            <a:endParaRPr lang="en-US" sz="900" dirty="0"/>
+          </a:p>
+        </p:txBody>
+      </p:sp>
+      <p:sp>
+        <p:nvSpPr>
+          <p:cNvPr id="31" name="Shape 29"/>
+          <p:cNvSpPr/>
+          <p:nvPr/>
+        </p:nvSpPr>
+        <p:spPr>
+          <a:xfrm>
+            <a:off x="2743200" y="3977640"/>
+            <a:ext cx="5943600" cy="475488"/>
+          </a:xfrm>
+          <a:prstGeom prst="rect">
+            <a:avLst/>
+          </a:prstGeom>
+          <a:solidFill>
+            <a:srgbClr val="E3F2FD"/>
+          </a:solidFill>
+          <a:ln/>
+        </p:spPr>
+      </p:sp>
+      <p:sp>
+        <p:nvSpPr>
+          <p:cNvPr id="32" name="Text 30"/>
+          <p:cNvSpPr/>
+          <p:nvPr/>
+        </p:nvSpPr>
+        <p:spPr>
+          <a:xfrm>
+            <a:off x="2834640" y="3977640"/>
+            <a:ext cx="5760720" cy="475488"/>
+          </a:xfrm>
+          <a:prstGeom prst="rect">
+            <a:avLst/>
+          </a:prstGeom>
+          <a:noFill/>
+          <a:ln/>
+        </p:spPr>
+        <p:txBody>
+          <a:bodyPr wrap="square" lIns="0" tIns="0" rIns="0" bIns="0" rtlCol="0" anchor="ctr"/>
+          <a:lstStyle/>
+          <a:p>
+            <a:pPr indent="0" marL="0">
+              <a:buNone/>
+            </a:pPr>
+            <a:r>
+              <a:rPr lang="en-US" sz="900" dirty="0">
+                <a:solidFill>
+                  <a:srgbClr val="333333"/>
+                </a:solidFill>
+                <a:latin typeface="Calibri" pitchFamily="34" charset="0"/>
+                <a:ea typeface="Calibri" pitchFamily="34" charset="-122"/>
+                <a:cs typeface="Calibri" pitchFamily="34" charset="-120"/>
+              </a:rPr>
+              <a:t>Hash irréversible pour mots de passe (jamais en clair !)</a:t>
             </a:r>
             <a:endParaRPr lang="en-US" sz="900" dirty="0"/>
           </a:p>

--- a/pptx/Module16_Sécurité_RGPD_chiffrement.pptx
+++ b/pptx/Module16_Sécurité_RGPD_chiffrement.pptx
@@ -13,9 +13,10 @@
     <p:sldId id="261" r:id="rId7"/>
     <p:sldId id="262" r:id="rId8"/>
     <p:sldId id="263" r:id="rId9"/>
+    <p:sldId id="264" r:id="rId10"/>
   </p:sldIdLst>
   <p:notesMasterIdLst>
-    <p:notesMasterId r:id="rId10"/>
+    <p:notesMasterId r:id="rId11"/>
   </p:notesMasterIdLst>
   <p:sldSz cx="9144000" cy="5143500"/>
   <p:notesSz cx="5143500" cy="9144000"/>
@@ -597,7 +598,7 @@
           <a:p>
             <a:r>
               <a:rPr lang="en-US" dirty="0"/>
-              <a:t>Toujours vérifier les droits après GRANT avec SHOW GRANTS.</a:t>
+              <a:t>Toujours vérifier avec SHOW GRANTS après un GRANT.</a:t>
             </a:r>
             <a:endParaRPr lang="en-US" dirty="0"/>
           </a:p>
@@ -685,7 +686,7 @@
           <a:p>
             <a:r>
               <a:rPr lang="en-US" dirty="0"/>
-              <a:t>Exercice : dessiner la matrice de droits au tableau et vérifier que chaque rôle a le minimum nécessaire.</a:t>
+              <a:t>Dessiner la matrice de droits au tableau.</a:t>
             </a:r>
             <a:endParaRPr lang="en-US" dirty="0"/>
           </a:p>
@@ -773,7 +774,7 @@
           <a:p>
             <a:r>
               <a:rPr lang="en-US" dirty="0"/>
-              <a:t>En Suisse, la LPD (Loi sur la Protection des Données) s'aligne sur le RGPD européen.</a:t>
+              <a:t>En Suisse, la LPD s'aligne sur le RGPD.</a:t>
             </a:r>
             <a:endParaRPr lang="en-US" dirty="0"/>
           </a:p>
@@ -861,7 +862,7 @@
           <a:p>
             <a:r>
               <a:rPr lang="en-US" dirty="0"/>
-              <a:t>D2 est un critère Distinction. Les étudiants doivent ARGUMENTER, pas juste décrire.</a:t>
+              <a:t>Chiffrement = reversible (données). Hash = irréversible (mots de passe).</a:t>
             </a:r>
             <a:endParaRPr lang="en-US" dirty="0"/>
           </a:p>
@@ -949,7 +950,7 @@
           <a:p>
             <a:r>
               <a:rPr lang="en-US" dirty="0"/>
-              <a:t>Ce module clôture la LO2. L'étudiant a maintenant un système complet avec SQL + sécurité.</a:t>
+              <a:t>D2 = Distinction. ARGUMENTER, pas juste décrire.</a:t>
             </a:r>
             <a:endParaRPr lang="en-US" dirty="0"/>
           </a:p>
@@ -1037,7 +1038,7 @@
           <a:p>
             <a:r>
               <a:rPr lang="en-US" dirty="0"/>
-              <a:t/>
+              <a:t>Ce module clôture la LO2.</a:t>
             </a:r>
             <a:endParaRPr lang="en-US" dirty="0"/>
           </a:p>
@@ -1149,6 +1150,94 @@
             <a:fld id="{F7021451-1387-4CA6-816F-3879F97B5CBC}" type="slidenum">
               <a:rPr lang="en-US"/>
               <a:t>8</a:t>
+            </a:fld>
+            <a:endParaRPr lang="en-US"/>
+          </a:p>
+        </p:txBody>
+      </p:sp>
+    </p:spTree>
+    <p:extLst>
+      <p:ext uri="{BB962C8B-B14F-4D97-AF65-F5344CB8AC3E}">
+        <p14:creationId xmlns:p14="http://schemas.microsoft.com/office/powerpoint/2010/main" val="1024086991"/>
+      </p:ext>
+    </p:extLst>
+  </p:cSld>
+  <p:clrMapOvr>
+    <a:masterClrMapping/>
+  </p:clrMapOvr>
+</p:notes>
+</file>
+
+<file path=ppt/notesSlides/notesSlide9.xml><?xml version="1.0" encoding="utf-8"?>
+<p:notes xmlns:a="http://schemas.openxmlformats.org/drawingml/2006/main" xmlns:r="http://schemas.openxmlformats.org/officeDocument/2006/relationships" xmlns:p="http://schemas.openxmlformats.org/presentationml/2006/main">
+  <p:cSld>
+    <p:spTree>
+      <p:nvGrpSpPr>
+        <p:cNvPr id="1" name=""/>
+        <p:cNvGrpSpPr/>
+        <p:nvPr/>
+      </p:nvGrpSpPr>
+      <p:grpSpPr>
+        <a:xfrm>
+          <a:off x="0" y="0"/>
+          <a:ext cx="0" cy="0"/>
+          <a:chOff x="0" y="0"/>
+          <a:chExt cx="0" cy="0"/>
+        </a:xfrm>
+      </p:grpSpPr>
+      <p:sp>
+        <p:nvSpPr>
+          <p:cNvPr id="2" name="Slide Image Placeholder 1"/>
+          <p:cNvSpPr>
+            <a:spLocks noGrp="1" noRot="1" noChangeAspect="1"/>
+          </p:cNvSpPr>
+          <p:nvPr>
+            <p:ph type="sldImg"/>
+          </p:nvPr>
+        </p:nvSpPr>
+        <p:spPr/>
+      </p:sp>
+      <p:sp>
+        <p:nvSpPr>
+          <p:cNvPr id="3" name="Notes Placeholder 2"/>
+          <p:cNvSpPr>
+            <a:spLocks noGrp="1"/>
+          </p:cNvSpPr>
+          <p:nvPr>
+            <p:ph type="body" idx="1"/>
+          </p:nvPr>
+        </p:nvSpPr>
+        <p:spPr/>
+        <p:txBody>
+          <a:bodyPr/>
+          <a:lstStyle/>
+          <a:p>
+            <a:r>
+              <a:rPr lang="en-US" dirty="0"/>
+              <a:t/>
+            </a:r>
+            <a:endParaRPr lang="en-US" dirty="0"/>
+          </a:p>
+        </p:txBody>
+      </p:sp>
+      <p:sp>
+        <p:nvSpPr>
+          <p:cNvPr id="4" name="Slide Number Placeholder 3"/>
+          <p:cNvSpPr>
+            <a:spLocks noGrp="1"/>
+          </p:cNvSpPr>
+          <p:nvPr>
+            <p:ph type="sldNum" sz="quarter" idx="10"/>
+          </p:nvPr>
+        </p:nvSpPr>
+        <p:spPr/>
+        <p:txBody>
+          <a:bodyPr/>
+          <a:lstStyle/>
+          <a:p>
+            <a:fld id="{F7021451-1387-4CA6-816F-3879F97B5CBC}" type="slidenum">
+              <a:rPr lang="en-US"/>
+              <a:t>9</a:t>
             </a:fld>
             <a:endParaRPr lang="en-US"/>
           </a:p>
@@ -1606,7 +1695,7 @@
               <a:buNone/>
             </a:pPr>
             <a:r>
-              <a:rPr lang="en-US" sz="3200" b="1" dirty="0">
+              <a:rPr lang="en-US" sz="3000" b="1" dirty="0">
                 <a:solidFill>
                   <a:srgbClr val="FFFFFF"/>
                 </a:solidFill>
@@ -1614,9 +1703,9 @@
                 <a:ea typeface="Trebuchet MS" pitchFamily="34" charset="-122"/>
                 <a:cs typeface="Trebuchet MS" pitchFamily="34" charset="-120"/>
               </a:rPr>
-              <a:t>Sécurité RGPD chiffrement</a:t>
-            </a:r>
-            <a:endParaRPr lang="en-US" sz="3200" dirty="0"/>
+              <a:t>Securite, RGPD, chiffrement</a:t>
+            </a:r>
+            <a:endParaRPr lang="en-US" sz="3000" dirty="0"/>
           </a:p>
         </p:txBody>
       </p:sp>
@@ -1645,7 +1734,7 @@
               <a:buNone/>
             </a:pPr>
             <a:r>
-              <a:rPr lang="en-US" sz="1500" dirty="0">
+              <a:rPr lang="en-US" sz="1400" dirty="0">
                 <a:solidFill>
                   <a:srgbClr val="CCCCCC"/>
                 </a:solidFill>
@@ -1653,9 +1742,9 @@
                 <a:ea typeface="Calibri" pitchFamily="34" charset="-122"/>
                 <a:cs typeface="Calibri" pitchFamily="34" charset="-120"/>
               </a:rPr>
-              <a:t>GRANT · REVOKE · Moindre privilège · AES</a:t>
-            </a:r>
-            <a:endParaRPr lang="en-US" sz="1500" dirty="0"/>
+              <a:t>GRANT, REVOKE, moindre privilege, AES, RGPD, D2</a:t>
+            </a:r>
+            <a:endParaRPr lang="en-US" sz="1400" dirty="0"/>
           </a:p>
         </p:txBody>
       </p:sp>
@@ -1759,7 +1848,7 @@
         <p:spPr>
           <a:xfrm>
             <a:off x="457200" y="182880"/>
-            <a:ext cx="8229600" cy="594360"/>
+            <a:ext cx="8229600" cy="548640"/>
           </a:xfrm>
           <a:prstGeom prst="rect">
             <a:avLst/>
@@ -1775,7 +1864,7 @@
               <a:buNone/>
             </a:pPr>
             <a:r>
-              <a:rPr lang="en-US" sz="2400" b="1" dirty="0">
+              <a:rPr lang="en-US" sz="2200" b="1" dirty="0">
                 <a:solidFill>
                   <a:srgbClr val="0D47A1"/>
                 </a:solidFill>
@@ -1785,7 +1874,7 @@
               </a:rPr>
               <a:t>Gestion des utilisateurs MySQL</a:t>
             </a:r>
-            <a:endParaRPr lang="en-US" sz="2400" dirty="0"/>
+            <a:endParaRPr lang="en-US" sz="2200" dirty="0"/>
           </a:p>
         </p:txBody>
       </p:sp>
@@ -1797,8 +1886,8 @@
         </p:nvSpPr>
         <p:spPr>
           <a:xfrm>
-            <a:off x="457200" y="914400"/>
-            <a:ext cx="8229600" cy="521208"/>
+            <a:off x="457200" y="868680"/>
+            <a:ext cx="8229600" cy="475488"/>
           </a:xfrm>
           <a:prstGeom prst="rect">
             <a:avLst/>
@@ -1807,13 +1896,6 @@
             <a:srgbClr val="FFFFFF"/>
           </a:solidFill>
           <a:ln/>
-          <a:effectLst>
-            <a:outerShdw sx="100000" sy="100000" kx="0" ky="0" algn="bl" rotWithShape="0" blurRad="50800" dist="25400" dir="8100000">
-              <a:srgbClr val="000000">
-                <a:alpha val="12000"/>
-              </a:srgbClr>
-            </a:outerShdw>
-          </a:effectLst>
         </p:spPr>
       </p:sp>
       <p:sp>
@@ -1824,8 +1906,8 @@
         </p:nvSpPr>
         <p:spPr>
           <a:xfrm>
-            <a:off x="457200" y="914400"/>
-            <a:ext cx="45720" cy="521208"/>
+            <a:off x="457200" y="868680"/>
+            <a:ext cx="45720" cy="475488"/>
           </a:xfrm>
           <a:prstGeom prst="rect">
             <a:avLst/>
@@ -1844,8 +1926,8 @@
         </p:nvSpPr>
         <p:spPr>
           <a:xfrm>
-            <a:off x="685800" y="914400"/>
-            <a:ext cx="7818120" cy="521208"/>
+            <a:off x="640080" y="868680"/>
+            <a:ext cx="7863840" cy="475488"/>
           </a:xfrm>
           <a:prstGeom prst="rect">
             <a:avLst/>
@@ -1869,7 +1951,7 @@
                 <a:ea typeface="JetBrains Mono" pitchFamily="34" charset="-122"/>
                 <a:cs typeface="JetBrains Mono" pitchFamily="34" charset="-120"/>
               </a:rPr>
-              <a:t>CREATE USER 'comptable'@'localhost' IDENTIFIED BY 'C0mpt@ble!';</a:t>
+              <a:t>CREATE USER 'comptable'@'localhost' IDENTIFIED BY 'Str0ng!';</a:t>
             </a:r>
             <a:endParaRPr lang="en-US" sz="1000" dirty="0"/>
           </a:p>
@@ -1883,8 +1965,8 @@
         </p:nvSpPr>
         <p:spPr>
           <a:xfrm>
-            <a:off x="457200" y="1463040"/>
-            <a:ext cx="8229600" cy="521208"/>
+            <a:off x="457200" y="1371600"/>
+            <a:ext cx="8229600" cy="475488"/>
           </a:xfrm>
           <a:prstGeom prst="rect">
             <a:avLst/>
@@ -1893,13 +1975,6 @@
             <a:srgbClr val="E3F2FD"/>
           </a:solidFill>
           <a:ln/>
-          <a:effectLst>
-            <a:outerShdw sx="100000" sy="100000" kx="0" ky="0" algn="bl" rotWithShape="0" blurRad="50800" dist="25400" dir="8100000">
-              <a:srgbClr val="000000">
-                <a:alpha val="12000"/>
-              </a:srgbClr>
-            </a:outerShdw>
-          </a:effectLst>
         </p:spPr>
       </p:sp>
       <p:sp>
@@ -1910,8 +1985,8 @@
         </p:nvSpPr>
         <p:spPr>
           <a:xfrm>
-            <a:off x="457200" y="1463040"/>
-            <a:ext cx="45720" cy="521208"/>
+            <a:off x="457200" y="1371600"/>
+            <a:ext cx="45720" cy="475488"/>
           </a:xfrm>
           <a:prstGeom prst="rect">
             <a:avLst/>
@@ -1930,8 +2005,8 @@
         </p:nvSpPr>
         <p:spPr>
           <a:xfrm>
-            <a:off x="685800" y="1463040"/>
-            <a:ext cx="7818120" cy="521208"/>
+            <a:off x="640080" y="1371600"/>
+            <a:ext cx="7863840" cy="475488"/>
           </a:xfrm>
           <a:prstGeom prst="rect">
             <a:avLst/>
@@ -1969,8 +2044,8 @@
         </p:nvSpPr>
         <p:spPr>
           <a:xfrm>
-            <a:off x="457200" y="2011680"/>
-            <a:ext cx="8229600" cy="521208"/>
+            <a:off x="457200" y="1874520"/>
+            <a:ext cx="8229600" cy="475488"/>
           </a:xfrm>
           <a:prstGeom prst="rect">
             <a:avLst/>
@@ -1979,13 +2054,6 @@
             <a:srgbClr val="FFFFFF"/>
           </a:solidFill>
           <a:ln/>
-          <a:effectLst>
-            <a:outerShdw sx="100000" sy="100000" kx="0" ky="0" algn="bl" rotWithShape="0" blurRad="50800" dist="25400" dir="8100000">
-              <a:srgbClr val="000000">
-                <a:alpha val="12000"/>
-              </a:srgbClr>
-            </a:outerShdw>
-          </a:effectLst>
         </p:spPr>
       </p:sp>
       <p:sp>
@@ -1996,8 +2064,8 @@
         </p:nvSpPr>
         <p:spPr>
           <a:xfrm>
-            <a:off x="457200" y="2011680"/>
-            <a:ext cx="45720" cy="521208"/>
+            <a:off x="457200" y="1874520"/>
+            <a:ext cx="45720" cy="475488"/>
           </a:xfrm>
           <a:prstGeom prst="rect">
             <a:avLst/>
@@ -2016,8 +2084,8 @@
         </p:nvSpPr>
         <p:spPr>
           <a:xfrm>
-            <a:off x="685800" y="2011680"/>
-            <a:ext cx="7818120" cy="521208"/>
+            <a:off x="640080" y="1874520"/>
+            <a:ext cx="7863840" cy="475488"/>
           </a:xfrm>
           <a:prstGeom prst="rect">
             <a:avLst/>
@@ -2055,8 +2123,8 @@
         </p:nvSpPr>
         <p:spPr>
           <a:xfrm>
-            <a:off x="457200" y="2560320"/>
-            <a:ext cx="8229600" cy="521208"/>
+            <a:off x="457200" y="2377440"/>
+            <a:ext cx="8229600" cy="475488"/>
           </a:xfrm>
           <a:prstGeom prst="rect">
             <a:avLst/>
@@ -2065,13 +2133,6 @@
             <a:srgbClr val="E3F2FD"/>
           </a:solidFill>
           <a:ln/>
-          <a:effectLst>
-            <a:outerShdw sx="100000" sy="100000" kx="0" ky="0" algn="bl" rotWithShape="0" blurRad="50800" dist="25400" dir="8100000">
-              <a:srgbClr val="000000">
-                <a:alpha val="12000"/>
-              </a:srgbClr>
-            </a:outerShdw>
-          </a:effectLst>
         </p:spPr>
       </p:sp>
       <p:sp>
@@ -2082,8 +2143,8 @@
         </p:nvSpPr>
         <p:spPr>
           <a:xfrm>
-            <a:off x="457200" y="2560320"/>
-            <a:ext cx="45720" cy="521208"/>
+            <a:off x="457200" y="2377440"/>
+            <a:ext cx="45720" cy="475488"/>
           </a:xfrm>
           <a:prstGeom prst="rect">
             <a:avLst/>
@@ -2102,8 +2163,8 @@
         </p:nvSpPr>
         <p:spPr>
           <a:xfrm>
-            <a:off x="685800" y="2560320"/>
-            <a:ext cx="7818120" cy="521208"/>
+            <a:off x="640080" y="2377440"/>
+            <a:ext cx="7863840" cy="475488"/>
           </a:xfrm>
           <a:prstGeom prst="rect">
             <a:avLst/>
@@ -2141,8 +2202,8 @@
         </p:nvSpPr>
         <p:spPr>
           <a:xfrm>
-            <a:off x="457200" y="3108960"/>
-            <a:ext cx="8229600" cy="521208"/>
+            <a:off x="457200" y="2880360"/>
+            <a:ext cx="8229600" cy="475488"/>
           </a:xfrm>
           <a:prstGeom prst="rect">
             <a:avLst/>
@@ -2151,13 +2212,6 @@
             <a:srgbClr val="FFFFFF"/>
           </a:solidFill>
           <a:ln/>
-          <a:effectLst>
-            <a:outerShdw sx="100000" sy="100000" kx="0" ky="0" algn="bl" rotWithShape="0" blurRad="50800" dist="25400" dir="8100000">
-              <a:srgbClr val="000000">
-                <a:alpha val="12000"/>
-              </a:srgbClr>
-            </a:outerShdw>
-          </a:effectLst>
         </p:spPr>
       </p:sp>
       <p:sp>
@@ -2168,8 +2222,8 @@
         </p:nvSpPr>
         <p:spPr>
           <a:xfrm>
-            <a:off x="457200" y="3108960"/>
-            <a:ext cx="45720" cy="521208"/>
+            <a:off x="457200" y="2880360"/>
+            <a:ext cx="45720" cy="475488"/>
           </a:xfrm>
           <a:prstGeom prst="rect">
             <a:avLst/>
@@ -2188,8 +2242,8 @@
         </p:nvSpPr>
         <p:spPr>
           <a:xfrm>
-            <a:off x="685800" y="3108960"/>
-            <a:ext cx="7818120" cy="521208"/>
+            <a:off x="640080" y="2880360"/>
+            <a:ext cx="7863840" cy="475488"/>
           </a:xfrm>
           <a:prstGeom prst="rect">
             <a:avLst/>
@@ -2205,7 +2259,7 @@
               <a:buNone/>
             </a:pPr>
             <a:r>
-              <a:rPr lang="en-US" sz="1200" dirty="0">
+              <a:rPr lang="en-US" sz="1100" dirty="0">
                 <a:solidFill>
                   <a:srgbClr val="1A1A2E"/>
                 </a:solidFill>
@@ -2213,9 +2267,9 @@
                 <a:ea typeface="Calibri" pitchFamily="34" charset="-122"/>
                 <a:cs typeface="Calibri" pitchFamily="34" charset="-120"/>
               </a:rPr>
-              <a:t>FLUSH PRIVILEGES;  -- appliquer les changements</a:t>
-            </a:r>
-            <a:endParaRPr lang="en-US" sz="1200" dirty="0"/>
+              <a:t>FLUSH PRIVILEGES; — appliquer les changements</a:t>
+            </a:r>
+            <a:endParaRPr lang="en-US" sz="1100" dirty="0"/>
           </a:p>
         </p:txBody>
       </p:sp>
@@ -2227,8 +2281,8 @@
         </p:nvSpPr>
         <p:spPr>
           <a:xfrm>
-            <a:off x="457200" y="3657600"/>
-            <a:ext cx="8229600" cy="521208"/>
+            <a:off x="457200" y="3383280"/>
+            <a:ext cx="8229600" cy="475488"/>
           </a:xfrm>
           <a:prstGeom prst="rect">
             <a:avLst/>
@@ -2237,13 +2291,6 @@
             <a:srgbClr val="E3F2FD"/>
           </a:solidFill>
           <a:ln/>
-          <a:effectLst>
-            <a:outerShdw sx="100000" sy="100000" kx="0" ky="0" algn="bl" rotWithShape="0" blurRad="50800" dist="25400" dir="8100000">
-              <a:srgbClr val="000000">
-                <a:alpha val="12000"/>
-              </a:srgbClr>
-            </a:outerShdw>
-          </a:effectLst>
         </p:spPr>
       </p:sp>
       <p:sp>
@@ -2254,8 +2301,8 @@
         </p:nvSpPr>
         <p:spPr>
           <a:xfrm>
-            <a:off x="457200" y="3657600"/>
-            <a:ext cx="45720" cy="521208"/>
+            <a:off x="457200" y="3383280"/>
+            <a:ext cx="45720" cy="475488"/>
           </a:xfrm>
           <a:prstGeom prst="rect">
             <a:avLst/>
@@ -2274,8 +2321,8 @@
         </p:nvSpPr>
         <p:spPr>
           <a:xfrm>
-            <a:off x="685800" y="3657600"/>
-            <a:ext cx="7818120" cy="521208"/>
+            <a:off x="640080" y="3383280"/>
+            <a:ext cx="7863840" cy="475488"/>
           </a:xfrm>
           <a:prstGeom prst="rect">
             <a:avLst/>
@@ -2291,7 +2338,7 @@
               <a:buNone/>
             </a:pPr>
             <a:r>
-              <a:rPr lang="en-US" sz="1200" dirty="0">
+              <a:rPr lang="en-US" sz="1100" dirty="0">
                 <a:solidFill>
                   <a:srgbClr val="1A1A2E"/>
                 </a:solidFill>
@@ -2299,9 +2346,9 @@
                 <a:ea typeface="Calibri" pitchFamily="34" charset="-122"/>
                 <a:cs typeface="Calibri" pitchFamily="34" charset="-120"/>
               </a:rPr>
-              <a:t>SHOW GRANTS FOR 'comptable'@'localhost';  -- vérifier les droits</a:t>
-            </a:r>
-            <a:endParaRPr lang="en-US" sz="1200" dirty="0"/>
+              <a:t>SHOW GRANTS FOR 'comptable'@'localhost'; — verifier</a:t>
+            </a:r>
+            <a:endParaRPr lang="en-US" sz="1100" dirty="0"/>
           </a:p>
         </p:txBody>
       </p:sp>
@@ -2366,7 +2413,7 @@
         <p:spPr>
           <a:xfrm>
             <a:off x="457200" y="182880"/>
-            <a:ext cx="8229600" cy="594360"/>
+            <a:ext cx="8229600" cy="548640"/>
           </a:xfrm>
           <a:prstGeom prst="rect">
             <a:avLst/>
@@ -2382,7 +2429,7 @@
               <a:buNone/>
             </a:pPr>
             <a:r>
-              <a:rPr lang="en-US" sz="2400" b="1" dirty="0">
+              <a:rPr lang="en-US" sz="2200" b="1" dirty="0">
                 <a:solidFill>
                   <a:srgbClr val="0D47A1"/>
                 </a:solidFill>
@@ -2390,9 +2437,9 @@
                 <a:ea typeface="Trebuchet MS" pitchFamily="34" charset="-122"/>
                 <a:cs typeface="Trebuchet MS" pitchFamily="34" charset="-120"/>
               </a:rPr>
-              <a:t>Principe du moindre privilège — SwissSound</a:t>
-            </a:r>
-            <a:endParaRPr lang="en-US" sz="2400" dirty="0"/>
+              <a:t>Moindre privilege — matrice SwissSound</a:t>
+            </a:r>
+            <a:endParaRPr lang="en-US" sz="2200" dirty="0"/>
           </a:p>
         </p:txBody>
       </p:sp>
@@ -2404,8 +2451,8 @@
         </p:nvSpPr>
         <p:spPr>
           <a:xfrm>
-            <a:off x="457200" y="914400"/>
-            <a:ext cx="8229600" cy="521208"/>
+            <a:off x="457200" y="868680"/>
+            <a:ext cx="8229600" cy="475488"/>
           </a:xfrm>
           <a:prstGeom prst="rect">
             <a:avLst/>
@@ -2414,13 +2461,6 @@
             <a:srgbClr val="FFFFFF"/>
           </a:solidFill>
           <a:ln/>
-          <a:effectLst>
-            <a:outerShdw sx="100000" sy="100000" kx="0" ky="0" algn="bl" rotWithShape="0" blurRad="50800" dist="25400" dir="8100000">
-              <a:srgbClr val="000000">
-                <a:alpha val="12000"/>
-              </a:srgbClr>
-            </a:outerShdw>
-          </a:effectLst>
         </p:spPr>
       </p:sp>
       <p:sp>
@@ -2431,8 +2471,8 @@
         </p:nvSpPr>
         <p:spPr>
           <a:xfrm>
-            <a:off x="457200" y="914400"/>
-            <a:ext cx="45720" cy="521208"/>
+            <a:off x="457200" y="868680"/>
+            <a:ext cx="45720" cy="475488"/>
           </a:xfrm>
           <a:prstGeom prst="rect">
             <a:avLst/>
@@ -2451,8 +2491,8 @@
         </p:nvSpPr>
         <p:spPr>
           <a:xfrm>
-            <a:off x="685800" y="914400"/>
-            <a:ext cx="7818120" cy="521208"/>
+            <a:off x="640080" y="868680"/>
+            <a:ext cx="7863840" cy="475488"/>
           </a:xfrm>
           <a:prstGeom prst="rect">
             <a:avLst/>
@@ -2468,7 +2508,7 @@
               <a:buNone/>
             </a:pPr>
             <a:r>
-              <a:rPr lang="en-US" sz="1200" dirty="0">
+              <a:rPr lang="en-US" sz="1100" dirty="0">
                 <a:solidFill>
                   <a:srgbClr val="1A1A2E"/>
                 </a:solidFill>
@@ -2476,9 +2516,9 @@
                 <a:ea typeface="Calibri" pitchFamily="34" charset="-122"/>
                 <a:cs typeface="Calibri" pitchFamily="34" charset="-120"/>
               </a:rPr>
-              <a:t>admin_studio : ALL PRIVILEGES (seul compte avec DELETE/DROP)</a:t>
-            </a:r>
-            <a:endParaRPr lang="en-US" sz="1200" dirty="0"/>
+              <a:t>admin_studio : ALL PRIVILEGES (seul avec DELETE/DROP)</a:t>
+            </a:r>
+            <a:endParaRPr lang="en-US" sz="1100" dirty="0"/>
           </a:p>
         </p:txBody>
       </p:sp>
@@ -2490,8 +2530,8 @@
         </p:nvSpPr>
         <p:spPr>
           <a:xfrm>
-            <a:off x="457200" y="1463040"/>
-            <a:ext cx="8229600" cy="521208"/>
+            <a:off x="457200" y="1371600"/>
+            <a:ext cx="8229600" cy="475488"/>
           </a:xfrm>
           <a:prstGeom prst="rect">
             <a:avLst/>
@@ -2500,13 +2540,6 @@
             <a:srgbClr val="E3F2FD"/>
           </a:solidFill>
           <a:ln/>
-          <a:effectLst>
-            <a:outerShdw sx="100000" sy="100000" kx="0" ky="0" algn="bl" rotWithShape="0" blurRad="50800" dist="25400" dir="8100000">
-              <a:srgbClr val="000000">
-                <a:alpha val="12000"/>
-              </a:srgbClr>
-            </a:outerShdw>
-          </a:effectLst>
         </p:spPr>
       </p:sp>
       <p:sp>
@@ -2517,8 +2550,8 @@
         </p:nvSpPr>
         <p:spPr>
           <a:xfrm>
-            <a:off x="457200" y="1463040"/>
-            <a:ext cx="45720" cy="521208"/>
+            <a:off x="457200" y="1371600"/>
+            <a:ext cx="45720" cy="475488"/>
           </a:xfrm>
           <a:prstGeom prst="rect">
             <a:avLst/>
@@ -2537,8 +2570,8 @@
         </p:nvSpPr>
         <p:spPr>
           <a:xfrm>
-            <a:off x="685800" y="1463040"/>
-            <a:ext cx="7818120" cy="521208"/>
+            <a:off x="640080" y="1371600"/>
+            <a:ext cx="7863840" cy="475488"/>
           </a:xfrm>
           <a:prstGeom prst="rect">
             <a:avLst/>
@@ -2554,7 +2587,7 @@
               <a:buNone/>
             </a:pPr>
             <a:r>
-              <a:rPr lang="en-US" sz="1200" dirty="0">
+              <a:rPr lang="en-US" sz="1100" dirty="0">
                 <a:solidFill>
                   <a:srgbClr val="1A1A2E"/>
                 </a:solidFill>
@@ -2562,9 +2595,9 @@
                 <a:ea typeface="Calibri" pitchFamily="34" charset="-122"/>
                 <a:cs typeface="Calibri" pitchFamily="34" charset="-120"/>
               </a:rPr>
-              <a:t>ingenieur_son : SELECT + INSERT + UPDATE sur sessions, SELECT salles/artistes</a:t>
-            </a:r>
-            <a:endParaRPr lang="en-US" sz="1200" dirty="0"/>
+              <a:t>ingenieur_son : SELECT + INSERT + UPDATE sessions, SELECT salles/artistes</a:t>
+            </a:r>
+            <a:endParaRPr lang="en-US" sz="1100" dirty="0"/>
           </a:p>
         </p:txBody>
       </p:sp>
@@ -2576,8 +2609,8 @@
         </p:nvSpPr>
         <p:spPr>
           <a:xfrm>
-            <a:off x="457200" y="2011680"/>
-            <a:ext cx="8229600" cy="521208"/>
+            <a:off x="457200" y="1874520"/>
+            <a:ext cx="8229600" cy="475488"/>
           </a:xfrm>
           <a:prstGeom prst="rect">
             <a:avLst/>
@@ -2586,13 +2619,6 @@
             <a:srgbClr val="FFFFFF"/>
           </a:solidFill>
           <a:ln/>
-          <a:effectLst>
-            <a:outerShdw sx="100000" sy="100000" kx="0" ky="0" algn="bl" rotWithShape="0" blurRad="50800" dist="25400" dir="8100000">
-              <a:srgbClr val="000000">
-                <a:alpha val="12000"/>
-              </a:srgbClr>
-            </a:outerShdw>
-          </a:effectLst>
         </p:spPr>
       </p:sp>
       <p:sp>
@@ -2603,8 +2629,8 @@
         </p:nvSpPr>
         <p:spPr>
           <a:xfrm>
-            <a:off x="457200" y="2011680"/>
-            <a:ext cx="45720" cy="521208"/>
+            <a:off x="457200" y="1874520"/>
+            <a:ext cx="45720" cy="475488"/>
           </a:xfrm>
           <a:prstGeom prst="rect">
             <a:avLst/>
@@ -2623,8 +2649,8 @@
         </p:nvSpPr>
         <p:spPr>
           <a:xfrm>
-            <a:off x="685800" y="2011680"/>
-            <a:ext cx="7818120" cy="521208"/>
+            <a:off x="640080" y="1874520"/>
+            <a:ext cx="7863840" cy="475488"/>
           </a:xfrm>
           <a:prstGeom prst="rect">
             <a:avLst/>
@@ -2640,7 +2666,7 @@
               <a:buNone/>
             </a:pPr>
             <a:r>
-              <a:rPr lang="en-US" sz="1200" dirty="0">
+              <a:rPr lang="en-US" sz="1100" dirty="0">
                 <a:solidFill>
                   <a:srgbClr val="1A1A2E"/>
                 </a:solidFill>
@@ -2648,9 +2674,9 @@
                 <a:ea typeface="Calibri" pitchFamily="34" charset="-122"/>
                 <a:cs typeface="Calibri" pitchFamily="34" charset="-120"/>
               </a:rPr>
-              <a:t>comptable : SELECT + INSERT + UPDATE sur factures, SELECT artistes/sessions</a:t>
-            </a:r>
-            <a:endParaRPr lang="en-US" sz="1200" dirty="0"/>
+              <a:t>comptable : SELECT + INSERT + UPDATE factures, SELECT artistes/sessions</a:t>
+            </a:r>
+            <a:endParaRPr lang="en-US" sz="1100" dirty="0"/>
           </a:p>
         </p:txBody>
       </p:sp>
@@ -2662,8 +2688,8 @@
         </p:nvSpPr>
         <p:spPr>
           <a:xfrm>
-            <a:off x="457200" y="2560320"/>
-            <a:ext cx="8229600" cy="521208"/>
+            <a:off x="457200" y="2377440"/>
+            <a:ext cx="8229600" cy="475488"/>
           </a:xfrm>
           <a:prstGeom prst="rect">
             <a:avLst/>
@@ -2672,13 +2698,6 @@
             <a:srgbClr val="E3F2FD"/>
           </a:solidFill>
           <a:ln/>
-          <a:effectLst>
-            <a:outerShdw sx="100000" sy="100000" kx="0" ky="0" algn="bl" rotWithShape="0" blurRad="50800" dist="25400" dir="8100000">
-              <a:srgbClr val="000000">
-                <a:alpha val="12000"/>
-              </a:srgbClr>
-            </a:outerShdw>
-          </a:effectLst>
         </p:spPr>
       </p:sp>
       <p:sp>
@@ -2689,8 +2708,8 @@
         </p:nvSpPr>
         <p:spPr>
           <a:xfrm>
-            <a:off x="457200" y="2560320"/>
-            <a:ext cx="45720" cy="521208"/>
+            <a:off x="457200" y="2377440"/>
+            <a:ext cx="45720" cy="475488"/>
           </a:xfrm>
           <a:prstGeom prst="rect">
             <a:avLst/>
@@ -2709,8 +2728,8 @@
         </p:nvSpPr>
         <p:spPr>
           <a:xfrm>
-            <a:off x="685800" y="2560320"/>
-            <a:ext cx="7818120" cy="521208"/>
+            <a:off x="640080" y="2377440"/>
+            <a:ext cx="7863840" cy="475488"/>
           </a:xfrm>
           <a:prstGeom prst="rect">
             <a:avLst/>
@@ -2726,7 +2745,7 @@
               <a:buNone/>
             </a:pPr>
             <a:r>
-              <a:rPr lang="en-US" sz="1200" dirty="0">
+              <a:rPr lang="en-US" sz="1100" dirty="0">
                 <a:solidFill>
                   <a:srgbClr val="1A1A2E"/>
                 </a:solidFill>
@@ -2734,9 +2753,9 @@
                 <a:ea typeface="Calibri" pitchFamily="34" charset="-122"/>
                 <a:cs typeface="Calibri" pitchFamily="34" charset="-120"/>
               </a:rPr>
-              <a:t>reception : SELECT + INSERT + UPDATE sur artistes, SELECT genres</a:t>
-            </a:r>
-            <a:endParaRPr lang="en-US" sz="1200" dirty="0"/>
+              <a:t>reception : SELECT + INSERT + UPDATE artistes, SELECT genres</a:t>
+            </a:r>
+            <a:endParaRPr lang="en-US" sz="1100" dirty="0"/>
           </a:p>
         </p:txBody>
       </p:sp>
@@ -2748,8 +2767,8 @@
         </p:nvSpPr>
         <p:spPr>
           <a:xfrm>
-            <a:off x="457200" y="3108960"/>
-            <a:ext cx="8229600" cy="521208"/>
+            <a:off x="457200" y="2880360"/>
+            <a:ext cx="8229600" cy="475488"/>
           </a:xfrm>
           <a:prstGeom prst="rect">
             <a:avLst/>
@@ -2758,13 +2777,6 @@
             <a:srgbClr val="FFFFFF"/>
           </a:solidFill>
           <a:ln/>
-          <a:effectLst>
-            <a:outerShdw sx="100000" sy="100000" kx="0" ky="0" algn="bl" rotWithShape="0" blurRad="50800" dist="25400" dir="8100000">
-              <a:srgbClr val="000000">
-                <a:alpha val="12000"/>
-              </a:srgbClr>
-            </a:outerShdw>
-          </a:effectLst>
         </p:spPr>
       </p:sp>
       <p:sp>
@@ -2775,8 +2787,8 @@
         </p:nvSpPr>
         <p:spPr>
           <a:xfrm>
-            <a:off x="457200" y="3108960"/>
-            <a:ext cx="45720" cy="521208"/>
+            <a:off x="457200" y="2880360"/>
+            <a:ext cx="45720" cy="475488"/>
           </a:xfrm>
           <a:prstGeom prst="rect">
             <a:avLst/>
@@ -2795,8 +2807,8 @@
         </p:nvSpPr>
         <p:spPr>
           <a:xfrm>
-            <a:off x="685800" y="3108960"/>
-            <a:ext cx="7818120" cy="521208"/>
+            <a:off x="640080" y="2880360"/>
+            <a:ext cx="7863840" cy="475488"/>
           </a:xfrm>
           <a:prstGeom prst="rect">
             <a:avLst/>
@@ -2812,7 +2824,7 @@
               <a:buNone/>
             </a:pPr>
             <a:r>
-              <a:rPr lang="en-US" sz="1200" dirty="0">
+              <a:rPr lang="en-US" sz="1100" dirty="0">
                 <a:solidFill>
                   <a:srgbClr val="1A1A2E"/>
                 </a:solidFill>
@@ -2820,9 +2832,9 @@
                 <a:ea typeface="Calibri" pitchFamily="34" charset="-122"/>
                 <a:cs typeface="Calibri" pitchFamily="34" charset="-120"/>
               </a:rPr>
-              <a:t>JAMAIS : GRANT ALL TO everyone — faille de sécurité majeure !</a:t>
-            </a:r>
-            <a:endParaRPr lang="en-US" sz="1200" dirty="0"/>
+              <a:t>JAMAIS : GRANT ALL TO everyone !</a:t>
+            </a:r>
+            <a:endParaRPr lang="en-US" sz="1100" dirty="0"/>
           </a:p>
         </p:txBody>
       </p:sp>
@@ -2834,8 +2846,8 @@
         </p:nvSpPr>
         <p:spPr>
           <a:xfrm>
-            <a:off x="457200" y="3657600"/>
-            <a:ext cx="8229600" cy="521208"/>
+            <a:off x="457200" y="3383280"/>
+            <a:ext cx="8229600" cy="475488"/>
           </a:xfrm>
           <a:prstGeom prst="rect">
             <a:avLst/>
@@ -2844,13 +2856,6 @@
             <a:srgbClr val="E3F2FD"/>
           </a:solidFill>
           <a:ln/>
-          <a:effectLst>
-            <a:outerShdw sx="100000" sy="100000" kx="0" ky="0" algn="bl" rotWithShape="0" blurRad="50800" dist="25400" dir="8100000">
-              <a:srgbClr val="000000">
-                <a:alpha val="12000"/>
-              </a:srgbClr>
-            </a:outerShdw>
-          </a:effectLst>
         </p:spPr>
       </p:sp>
       <p:sp>
@@ -2861,8 +2866,8 @@
         </p:nvSpPr>
         <p:spPr>
           <a:xfrm>
-            <a:off x="457200" y="3657600"/>
-            <a:ext cx="45720" cy="521208"/>
+            <a:off x="457200" y="3383280"/>
+            <a:ext cx="45720" cy="475488"/>
           </a:xfrm>
           <a:prstGeom prst="rect">
             <a:avLst/>
@@ -2881,8 +2886,8 @@
         </p:nvSpPr>
         <p:spPr>
           <a:xfrm>
-            <a:off x="685800" y="3657600"/>
-            <a:ext cx="7818120" cy="521208"/>
+            <a:off x="640080" y="3383280"/>
+            <a:ext cx="7863840" cy="475488"/>
           </a:xfrm>
           <a:prstGeom prst="rect">
             <a:avLst/>
@@ -2898,7 +2903,7 @@
               <a:buNone/>
             </a:pPr>
             <a:r>
-              <a:rPr lang="en-US" sz="1200" dirty="0">
+              <a:rPr lang="en-US" sz="1100" dirty="0">
                 <a:solidFill>
                   <a:srgbClr val="1A1A2E"/>
                 </a:solidFill>
@@ -2906,9 +2911,9 @@
                 <a:ea typeface="Calibri" pitchFamily="34" charset="-122"/>
                 <a:cs typeface="Calibri" pitchFamily="34" charset="-120"/>
               </a:rPr>
-              <a:t>Chaque rôle = uniquement les droits nécessaires au travail</a:t>
-            </a:r>
-            <a:endParaRPr lang="en-US" sz="1200" dirty="0"/>
+              <a:t>Chaque role = uniquement les droits NECESSAIRES au travail</a:t>
+            </a:r>
+            <a:endParaRPr lang="en-US" sz="1100" dirty="0"/>
           </a:p>
         </p:txBody>
       </p:sp>
@@ -2920,8 +2925,8 @@
         </p:nvSpPr>
         <p:spPr>
           <a:xfrm>
-            <a:off x="457200" y="4206240"/>
-            <a:ext cx="8229600" cy="521208"/>
+            <a:off x="457200" y="3886200"/>
+            <a:ext cx="8229600" cy="475488"/>
           </a:xfrm>
           <a:prstGeom prst="rect">
             <a:avLst/>
@@ -2930,13 +2935,6 @@
             <a:srgbClr val="FFFFFF"/>
           </a:solidFill>
           <a:ln/>
-          <a:effectLst>
-            <a:outerShdw sx="100000" sy="100000" kx="0" ky="0" algn="bl" rotWithShape="0" blurRad="50800" dist="25400" dir="8100000">
-              <a:srgbClr val="000000">
-                <a:alpha val="12000"/>
-              </a:srgbClr>
-            </a:outerShdw>
-          </a:effectLst>
         </p:spPr>
       </p:sp>
       <p:sp>
@@ -2947,8 +2945,8 @@
         </p:nvSpPr>
         <p:spPr>
           <a:xfrm>
-            <a:off x="457200" y="4206240"/>
-            <a:ext cx="45720" cy="521208"/>
+            <a:off x="457200" y="3886200"/>
+            <a:ext cx="45720" cy="475488"/>
           </a:xfrm>
           <a:prstGeom prst="rect">
             <a:avLst/>
@@ -2967,8 +2965,8 @@
         </p:nvSpPr>
         <p:spPr>
           <a:xfrm>
-            <a:off x="685800" y="4206240"/>
-            <a:ext cx="7818120" cy="521208"/>
+            <a:off x="640080" y="3886200"/>
+            <a:ext cx="7863840" cy="475488"/>
           </a:xfrm>
           <a:prstGeom prst="rect">
             <a:avLst/>
@@ -2984,7 +2982,7 @@
               <a:buNone/>
             </a:pPr>
             <a:r>
-              <a:rPr lang="en-US" sz="1200" dirty="0">
+              <a:rPr lang="en-US" sz="1100" dirty="0">
                 <a:solidFill>
                   <a:srgbClr val="1A1A2E"/>
                 </a:solidFill>
@@ -2992,9 +2990,9 @@
                 <a:ea typeface="Calibri" pitchFamily="34" charset="-122"/>
                 <a:cs typeface="Calibri" pitchFamily="34" charset="-120"/>
               </a:rPr>
-              <a:t>Vues pour limiter l'accès : la reception voit v_artistes_actifs, pas la table complète</a:t>
-            </a:r>
-            <a:endParaRPr lang="en-US" sz="1200" dirty="0"/>
+              <a:t>Vues pour limiter : reception voit v_artistes_actifs, pas la table</a:t>
+            </a:r>
+            <a:endParaRPr lang="en-US" sz="1100" dirty="0"/>
           </a:p>
         </p:txBody>
       </p:sp>
@@ -3059,7 +3057,7 @@
         <p:spPr>
           <a:xfrm>
             <a:off x="457200" y="182880"/>
-            <a:ext cx="8229600" cy="594360"/>
+            <a:ext cx="8229600" cy="548640"/>
           </a:xfrm>
           <a:prstGeom prst="rect">
             <a:avLst/>
@@ -3075,7 +3073,7 @@
               <a:buNone/>
             </a:pPr>
             <a:r>
-              <a:rPr lang="en-US" sz="2400" b="1" dirty="0">
+              <a:rPr lang="en-US" sz="2200" b="1" dirty="0">
                 <a:solidFill>
                   <a:srgbClr val="0D47A1"/>
                 </a:solidFill>
@@ -3083,9 +3081,9 @@
                 <a:ea typeface="Trebuchet MS" pitchFamily="34" charset="-122"/>
                 <a:cs typeface="Trebuchet MS" pitchFamily="34" charset="-120"/>
               </a:rPr>
-              <a:t>RGPD : les 7 principes</a:t>
-            </a:r>
-            <a:endParaRPr lang="en-US" sz="2400" dirty="0"/>
+              <a:t>RGPD / LPD : les 7 principes</a:t>
+            </a:r>
+            <a:endParaRPr lang="en-US" sz="2200" dirty="0"/>
           </a:p>
         </p:txBody>
       </p:sp>
@@ -3097,7 +3095,7 @@
         </p:nvSpPr>
         <p:spPr>
           <a:xfrm>
-            <a:off x="457200" y="914400"/>
+            <a:off x="457200" y="868680"/>
             <a:ext cx="8229600" cy="464058"/>
           </a:xfrm>
           <a:prstGeom prst="rect">
@@ -3107,13 +3105,6 @@
             <a:srgbClr val="FFFFFF"/>
           </a:solidFill>
           <a:ln/>
-          <a:effectLst>
-            <a:outerShdw sx="100000" sy="100000" kx="0" ky="0" algn="bl" rotWithShape="0" blurRad="50800" dist="25400" dir="8100000">
-              <a:srgbClr val="000000">
-                <a:alpha val="12000"/>
-              </a:srgbClr>
-            </a:outerShdw>
-          </a:effectLst>
         </p:spPr>
       </p:sp>
       <p:sp>
@@ -3124,7 +3115,7 @@
         </p:nvSpPr>
         <p:spPr>
           <a:xfrm>
-            <a:off x="457200" y="914400"/>
+            <a:off x="457200" y="868680"/>
             <a:ext cx="45720" cy="464058"/>
           </a:xfrm>
           <a:prstGeom prst="rect">
@@ -3144,8 +3135,8 @@
         </p:nvSpPr>
         <p:spPr>
           <a:xfrm>
-            <a:off x="685800" y="914400"/>
-            <a:ext cx="7818120" cy="464058"/>
+            <a:off x="640080" y="868680"/>
+            <a:ext cx="7863840" cy="464058"/>
           </a:xfrm>
           <a:prstGeom prst="rect">
             <a:avLst/>
@@ -3161,7 +3152,7 @@
               <a:buNone/>
             </a:pPr>
             <a:r>
-              <a:rPr lang="en-US" sz="1200" dirty="0">
+              <a:rPr lang="en-US" sz="1100" dirty="0">
                 <a:solidFill>
                   <a:srgbClr val="1A1A2E"/>
                 </a:solidFill>
@@ -3169,9 +3160,9 @@
                 <a:ea typeface="Calibri" pitchFamily="34" charset="-122"/>
                 <a:cs typeface="Calibri" pitchFamily="34" charset="-120"/>
               </a:rPr>
-              <a:t>1. Licéité : base légale pour traiter les données (consentement, contrat...)</a:t>
-            </a:r>
-            <a:endParaRPr lang="en-US" sz="1200" dirty="0"/>
+              <a:t>1. Liceite : base legale (consentement, contrat...)</a:t>
+            </a:r>
+            <a:endParaRPr lang="en-US" sz="1100" dirty="0"/>
           </a:p>
         </p:txBody>
       </p:sp>
@@ -3183,7 +3174,7 @@
         </p:nvSpPr>
         <p:spPr>
           <a:xfrm>
-            <a:off x="457200" y="1405890"/>
+            <a:off x="457200" y="1360170"/>
             <a:ext cx="8229600" cy="464058"/>
           </a:xfrm>
           <a:prstGeom prst="rect">
@@ -3193,13 +3184,6 @@
             <a:srgbClr val="E3F2FD"/>
           </a:solidFill>
           <a:ln/>
-          <a:effectLst>
-            <a:outerShdw sx="100000" sy="100000" kx="0" ky="0" algn="bl" rotWithShape="0" blurRad="50800" dist="25400" dir="8100000">
-              <a:srgbClr val="000000">
-                <a:alpha val="12000"/>
-              </a:srgbClr>
-            </a:outerShdw>
-          </a:effectLst>
         </p:spPr>
       </p:sp>
       <p:sp>
@@ -3210,7 +3194,7 @@
         </p:nvSpPr>
         <p:spPr>
           <a:xfrm>
-            <a:off x="457200" y="1405890"/>
+            <a:off x="457200" y="1360170"/>
             <a:ext cx="45720" cy="464058"/>
           </a:xfrm>
           <a:prstGeom prst="rect">
@@ -3230,8 +3214,8 @@
         </p:nvSpPr>
         <p:spPr>
           <a:xfrm>
-            <a:off x="685800" y="1405890"/>
-            <a:ext cx="7818120" cy="464058"/>
+            <a:off x="640080" y="1360170"/>
+            <a:ext cx="7863840" cy="464058"/>
           </a:xfrm>
           <a:prstGeom prst="rect">
             <a:avLst/>
@@ -3247,7 +3231,7 @@
               <a:buNone/>
             </a:pPr>
             <a:r>
-              <a:rPr lang="en-US" sz="1200" dirty="0">
+              <a:rPr lang="en-US" sz="1100" dirty="0">
                 <a:solidFill>
                   <a:srgbClr val="1A1A2E"/>
                 </a:solidFill>
@@ -3255,9 +3239,9 @@
                 <a:ea typeface="Calibri" pitchFamily="34" charset="-122"/>
                 <a:cs typeface="Calibri" pitchFamily="34" charset="-120"/>
               </a:rPr>
-              <a:t>2. Limitation des finalités : collecter pour un but précis</a:t>
-            </a:r>
-            <a:endParaRPr lang="en-US" sz="1200" dirty="0"/>
+              <a:t>2. Limitation des finalites : but precis</a:t>
+            </a:r>
+            <a:endParaRPr lang="en-US" sz="1100" dirty="0"/>
           </a:p>
         </p:txBody>
       </p:sp>
@@ -3269,7 +3253,7 @@
         </p:nvSpPr>
         <p:spPr>
           <a:xfrm>
-            <a:off x="457200" y="1897380"/>
+            <a:off x="457200" y="1851660"/>
             <a:ext cx="8229600" cy="464058"/>
           </a:xfrm>
           <a:prstGeom prst="rect">
@@ -3279,13 +3263,6 @@
             <a:srgbClr val="FFFFFF"/>
           </a:solidFill>
           <a:ln/>
-          <a:effectLst>
-            <a:outerShdw sx="100000" sy="100000" kx="0" ky="0" algn="bl" rotWithShape="0" blurRad="50800" dist="25400" dir="8100000">
-              <a:srgbClr val="000000">
-                <a:alpha val="12000"/>
-              </a:srgbClr>
-            </a:outerShdw>
-          </a:effectLst>
         </p:spPr>
       </p:sp>
       <p:sp>
@@ -3296,7 +3273,7 @@
         </p:nvSpPr>
         <p:spPr>
           <a:xfrm>
-            <a:off x="457200" y="1897380"/>
+            <a:off x="457200" y="1851660"/>
             <a:ext cx="45720" cy="464058"/>
           </a:xfrm>
           <a:prstGeom prst="rect">
@@ -3316,8 +3293,8 @@
         </p:nvSpPr>
         <p:spPr>
           <a:xfrm>
-            <a:off x="685800" y="1897380"/>
-            <a:ext cx="7818120" cy="464058"/>
+            <a:off x="640080" y="1851660"/>
+            <a:ext cx="7863840" cy="464058"/>
           </a:xfrm>
           <a:prstGeom prst="rect">
             <a:avLst/>
@@ -3333,7 +3310,7 @@
               <a:buNone/>
             </a:pPr>
             <a:r>
-              <a:rPr lang="en-US" sz="1200" dirty="0">
+              <a:rPr lang="en-US" sz="1100" dirty="0">
                 <a:solidFill>
                   <a:srgbClr val="1A1A2E"/>
                 </a:solidFill>
@@ -3341,9 +3318,9 @@
                 <a:ea typeface="Calibri" pitchFamily="34" charset="-122"/>
                 <a:cs typeface="Calibri" pitchFamily="34" charset="-120"/>
               </a:rPr>
-              <a:t>3. Minimisation : ne collecter que le strict nécessaire</a:t>
-            </a:r>
-            <a:endParaRPr lang="en-US" sz="1200" dirty="0"/>
+              <a:t>3. Minimisation : strict necessaire</a:t>
+            </a:r>
+            <a:endParaRPr lang="en-US" sz="1100" dirty="0"/>
           </a:p>
         </p:txBody>
       </p:sp>
@@ -3355,7 +3332,7 @@
         </p:nvSpPr>
         <p:spPr>
           <a:xfrm>
-            <a:off x="457200" y="2388870"/>
+            <a:off x="457200" y="2343150"/>
             <a:ext cx="8229600" cy="464058"/>
           </a:xfrm>
           <a:prstGeom prst="rect">
@@ -3365,13 +3342,6 @@
             <a:srgbClr val="E3F2FD"/>
           </a:solidFill>
           <a:ln/>
-          <a:effectLst>
-            <a:outerShdw sx="100000" sy="100000" kx="0" ky="0" algn="bl" rotWithShape="0" blurRad="50800" dist="25400" dir="8100000">
-              <a:srgbClr val="000000">
-                <a:alpha val="12000"/>
-              </a:srgbClr>
-            </a:outerShdw>
-          </a:effectLst>
         </p:spPr>
       </p:sp>
       <p:sp>
@@ -3382,7 +3352,7 @@
         </p:nvSpPr>
         <p:spPr>
           <a:xfrm>
-            <a:off x="457200" y="2388870"/>
+            <a:off x="457200" y="2343150"/>
             <a:ext cx="45720" cy="464058"/>
           </a:xfrm>
           <a:prstGeom prst="rect">
@@ -3402,8 +3372,8 @@
         </p:nvSpPr>
         <p:spPr>
           <a:xfrm>
-            <a:off x="685800" y="2388870"/>
-            <a:ext cx="7818120" cy="464058"/>
+            <a:off x="640080" y="2343150"/>
+            <a:ext cx="7863840" cy="464058"/>
           </a:xfrm>
           <a:prstGeom prst="rect">
             <a:avLst/>
@@ -3419,7 +3389,7 @@
               <a:buNone/>
             </a:pPr>
             <a:r>
-              <a:rPr lang="en-US" sz="1200" dirty="0">
+              <a:rPr lang="en-US" sz="1100" dirty="0">
                 <a:solidFill>
                   <a:srgbClr val="1A1A2E"/>
                 </a:solidFill>
@@ -3427,9 +3397,9 @@
                 <a:ea typeface="Calibri" pitchFamily="34" charset="-122"/>
                 <a:cs typeface="Calibri" pitchFamily="34" charset="-120"/>
               </a:rPr>
-              <a:t>4. Exactitude : données à jour et correctes</a:t>
-            </a:r>
-            <a:endParaRPr lang="en-US" sz="1200" dirty="0"/>
+              <a:t>4. Exactitude : donnees a jour</a:t>
+            </a:r>
+            <a:endParaRPr lang="en-US" sz="1100" dirty="0"/>
           </a:p>
         </p:txBody>
       </p:sp>
@@ -3441,7 +3411,7 @@
         </p:nvSpPr>
         <p:spPr>
           <a:xfrm>
-            <a:off x="457200" y="2880360"/>
+            <a:off x="457200" y="2834640"/>
             <a:ext cx="8229600" cy="464058"/>
           </a:xfrm>
           <a:prstGeom prst="rect">
@@ -3451,13 +3421,6 @@
             <a:srgbClr val="FFFFFF"/>
           </a:solidFill>
           <a:ln/>
-          <a:effectLst>
-            <a:outerShdw sx="100000" sy="100000" kx="0" ky="0" algn="bl" rotWithShape="0" blurRad="50800" dist="25400" dir="8100000">
-              <a:srgbClr val="000000">
-                <a:alpha val="12000"/>
-              </a:srgbClr>
-            </a:outerShdw>
-          </a:effectLst>
         </p:spPr>
       </p:sp>
       <p:sp>
@@ -3468,7 +3431,7 @@
         </p:nvSpPr>
         <p:spPr>
           <a:xfrm>
-            <a:off x="457200" y="2880360"/>
+            <a:off x="457200" y="2834640"/>
             <a:ext cx="45720" cy="464058"/>
           </a:xfrm>
           <a:prstGeom prst="rect">
@@ -3488,8 +3451,8 @@
         </p:nvSpPr>
         <p:spPr>
           <a:xfrm>
-            <a:off x="685800" y="2880360"/>
-            <a:ext cx="7818120" cy="464058"/>
+            <a:off x="640080" y="2834640"/>
+            <a:ext cx="7863840" cy="464058"/>
           </a:xfrm>
           <a:prstGeom prst="rect">
             <a:avLst/>
@@ -3505,7 +3468,7 @@
               <a:buNone/>
             </a:pPr>
             <a:r>
-              <a:rPr lang="en-US" sz="1200" dirty="0">
+              <a:rPr lang="en-US" sz="1100" dirty="0">
                 <a:solidFill>
                   <a:srgbClr val="1A1A2E"/>
                 </a:solidFill>
@@ -3513,9 +3476,9 @@
                 <a:ea typeface="Calibri" pitchFamily="34" charset="-122"/>
                 <a:cs typeface="Calibri" pitchFamily="34" charset="-120"/>
               </a:rPr>
-              <a:t>5. Limitation de conservation : supprimer quand plus nécessaire</a:t>
-            </a:r>
-            <a:endParaRPr lang="en-US" sz="1200" dirty="0"/>
+              <a:t>5. Limitation de conservation : supprimer quand inutile</a:t>
+            </a:r>
+            <a:endParaRPr lang="en-US" sz="1100" dirty="0"/>
           </a:p>
         </p:txBody>
       </p:sp>
@@ -3527,7 +3490,7 @@
         </p:nvSpPr>
         <p:spPr>
           <a:xfrm>
-            <a:off x="457200" y="3371850"/>
+            <a:off x="457200" y="3326130"/>
             <a:ext cx="8229600" cy="464058"/>
           </a:xfrm>
           <a:prstGeom prst="rect">
@@ -3537,13 +3500,6 @@
             <a:srgbClr val="E3F2FD"/>
           </a:solidFill>
           <a:ln/>
-          <a:effectLst>
-            <a:outerShdw sx="100000" sy="100000" kx="0" ky="0" algn="bl" rotWithShape="0" blurRad="50800" dist="25400" dir="8100000">
-              <a:srgbClr val="000000">
-                <a:alpha val="12000"/>
-              </a:srgbClr>
-            </a:outerShdw>
-          </a:effectLst>
         </p:spPr>
       </p:sp>
       <p:sp>
@@ -3554,7 +3510,7 @@
         </p:nvSpPr>
         <p:spPr>
           <a:xfrm>
-            <a:off x="457200" y="3371850"/>
+            <a:off x="457200" y="3326130"/>
             <a:ext cx="45720" cy="464058"/>
           </a:xfrm>
           <a:prstGeom prst="rect">
@@ -3574,8 +3530,8 @@
         </p:nvSpPr>
         <p:spPr>
           <a:xfrm>
-            <a:off x="685800" y="3371850"/>
-            <a:ext cx="7818120" cy="464058"/>
+            <a:off x="640080" y="3326130"/>
+            <a:ext cx="7863840" cy="464058"/>
           </a:xfrm>
           <a:prstGeom prst="rect">
             <a:avLst/>
@@ -3591,7 +3547,7 @@
               <a:buNone/>
             </a:pPr>
             <a:r>
-              <a:rPr lang="en-US" sz="1200" dirty="0">
+              <a:rPr lang="en-US" sz="1100" dirty="0">
                 <a:solidFill>
                   <a:srgbClr val="1A1A2E"/>
                 </a:solidFill>
@@ -3599,9 +3555,9 @@
                 <a:ea typeface="Calibri" pitchFamily="34" charset="-122"/>
                 <a:cs typeface="Calibri" pitchFamily="34" charset="-120"/>
               </a:rPr>
-              <a:t>6. Intégrité et confidentialité : protéger contre accès non autorisé</a:t>
-            </a:r>
-            <a:endParaRPr lang="en-US" sz="1200" dirty="0"/>
+              <a:t>6. Integrite et confidentialite : proteger</a:t>
+            </a:r>
+            <a:endParaRPr lang="en-US" sz="1100" dirty="0"/>
           </a:p>
         </p:txBody>
       </p:sp>
@@ -3613,7 +3569,7 @@
         </p:nvSpPr>
         <p:spPr>
           <a:xfrm>
-            <a:off x="457200" y="3863340"/>
+            <a:off x="457200" y="3817620"/>
             <a:ext cx="8229600" cy="464058"/>
           </a:xfrm>
           <a:prstGeom prst="rect">
@@ -3623,13 +3579,6 @@
             <a:srgbClr val="FFFFFF"/>
           </a:solidFill>
           <a:ln/>
-          <a:effectLst>
-            <a:outerShdw sx="100000" sy="100000" kx="0" ky="0" algn="bl" rotWithShape="0" blurRad="50800" dist="25400" dir="8100000">
-              <a:srgbClr val="000000">
-                <a:alpha val="12000"/>
-              </a:srgbClr>
-            </a:outerShdw>
-          </a:effectLst>
         </p:spPr>
       </p:sp>
       <p:sp>
@@ -3640,7 +3589,7 @@
         </p:nvSpPr>
         <p:spPr>
           <a:xfrm>
-            <a:off x="457200" y="3863340"/>
+            <a:off x="457200" y="3817620"/>
             <a:ext cx="45720" cy="464058"/>
           </a:xfrm>
           <a:prstGeom prst="rect">
@@ -3660,8 +3609,8 @@
         </p:nvSpPr>
         <p:spPr>
           <a:xfrm>
-            <a:off x="685800" y="3863340"/>
-            <a:ext cx="7818120" cy="464058"/>
+            <a:off x="640080" y="3817620"/>
+            <a:ext cx="7863840" cy="464058"/>
           </a:xfrm>
           <a:prstGeom prst="rect">
             <a:avLst/>
@@ -3677,7 +3626,7 @@
               <a:buNone/>
             </a:pPr>
             <a:r>
-              <a:rPr lang="en-US" sz="1200" dirty="0">
+              <a:rPr lang="en-US" sz="1100" dirty="0">
                 <a:solidFill>
                   <a:srgbClr val="1A1A2E"/>
                 </a:solidFill>
@@ -3685,9 +3634,9 @@
                 <a:ea typeface="Calibri" pitchFamily="34" charset="-122"/>
                 <a:cs typeface="Calibri" pitchFamily="34" charset="-120"/>
               </a:rPr>
-              <a:t>7. Responsabilité : documenter et prouver la conformité</a:t>
-            </a:r>
-            <a:endParaRPr lang="en-US" sz="1200" dirty="0"/>
+              <a:t>7. Responsabilite : documenter la conformite</a:t>
+            </a:r>
+            <a:endParaRPr lang="en-US" sz="1100" dirty="0"/>
           </a:p>
         </p:txBody>
       </p:sp>
@@ -3699,7 +3648,7 @@
         </p:nvSpPr>
         <p:spPr>
           <a:xfrm>
-            <a:off x="457200" y="4354830"/>
+            <a:off x="457200" y="4309110"/>
             <a:ext cx="8229600" cy="464058"/>
           </a:xfrm>
           <a:prstGeom prst="rect">
@@ -3709,13 +3658,6 @@
             <a:srgbClr val="E3F2FD"/>
           </a:solidFill>
           <a:ln/>
-          <a:effectLst>
-            <a:outerShdw sx="100000" sy="100000" kx="0" ky="0" algn="bl" rotWithShape="0" blurRad="50800" dist="25400" dir="8100000">
-              <a:srgbClr val="000000">
-                <a:alpha val="12000"/>
-              </a:srgbClr>
-            </a:outerShdw>
-          </a:effectLst>
         </p:spPr>
       </p:sp>
       <p:sp>
@@ -3726,7 +3668,7 @@
         </p:nvSpPr>
         <p:spPr>
           <a:xfrm>
-            <a:off x="457200" y="4354830"/>
+            <a:off x="457200" y="4309110"/>
             <a:ext cx="45720" cy="464058"/>
           </a:xfrm>
           <a:prstGeom prst="rect">
@@ -3746,8 +3688,8 @@
         </p:nvSpPr>
         <p:spPr>
           <a:xfrm>
-            <a:off x="685800" y="4354830"/>
-            <a:ext cx="7818120" cy="464058"/>
+            <a:off x="640080" y="4309110"/>
+            <a:ext cx="7863840" cy="464058"/>
           </a:xfrm>
           <a:prstGeom prst="rect">
             <a:avLst/>
@@ -3763,7 +3705,7 @@
               <a:buNone/>
             </a:pPr>
             <a:r>
-              <a:rPr lang="en-US" sz="1200" dirty="0">
+              <a:rPr lang="en-US" sz="1100" dirty="0">
                 <a:solidFill>
                   <a:srgbClr val="1A1A2E"/>
                 </a:solidFill>
@@ -3771,9 +3713,9 @@
                 <a:ea typeface="Calibri" pitchFamily="34" charset="-122"/>
                 <a:cs typeface="Calibri" pitchFamily="34" charset="-120"/>
               </a:rPr>
-              <a:t>SwissSound : emails + téléphones des artistes = données personnelles RGPD</a:t>
-            </a:r>
-            <a:endParaRPr lang="en-US" sz="1200" dirty="0"/>
+              <a:t>SwissSound : emails + telephones = donnees personnelles RGPD</a:t>
+            </a:r>
+            <a:endParaRPr lang="en-US" sz="1100" dirty="0"/>
           </a:p>
         </p:txBody>
       </p:sp>
@@ -3838,7 +3780,7 @@
         <p:spPr>
           <a:xfrm>
             <a:off x="457200" y="182880"/>
-            <a:ext cx="8229600" cy="594360"/>
+            <a:ext cx="8229600" cy="548640"/>
           </a:xfrm>
           <a:prstGeom prst="rect">
             <a:avLst/>
@@ -3854,7 +3796,7 @@
               <a:buNone/>
             </a:pPr>
             <a:r>
-              <a:rPr lang="en-US" sz="2400" b="1" dirty="0">
+              <a:rPr lang="en-US" sz="2200" b="1" dirty="0">
                 <a:solidFill>
                   <a:srgbClr val="0D47A1"/>
                 </a:solidFill>
@@ -3862,9 +3804,9 @@
                 <a:ea typeface="Trebuchet MS" pitchFamily="34" charset="-122"/>
                 <a:cs typeface="Trebuchet MS" pitchFamily="34" charset="-120"/>
               </a:rPr>
-              <a:t>Chiffrement et D2</a:t>
-            </a:r>
-            <a:endParaRPr lang="en-US" sz="2400" dirty="0"/>
+              <a:t>Chiffrement et hash</a:t>
+            </a:r>
+            <a:endParaRPr lang="en-US" sz="2200" dirty="0"/>
           </a:p>
         </p:txBody>
       </p:sp>
@@ -3876,8 +3818,8 @@
         </p:nvSpPr>
         <p:spPr>
           <a:xfrm>
-            <a:off x="457200" y="914400"/>
-            <a:ext cx="8229600" cy="464058"/>
+            <a:off x="457200" y="868680"/>
+            <a:ext cx="8229600" cy="475488"/>
           </a:xfrm>
           <a:prstGeom prst="rect">
             <a:avLst/>
@@ -3886,13 +3828,6 @@
             <a:srgbClr val="FFFFFF"/>
           </a:solidFill>
           <a:ln/>
-          <a:effectLst>
-            <a:outerShdw sx="100000" sy="100000" kx="0" ky="0" algn="bl" rotWithShape="0" blurRad="50800" dist="25400" dir="8100000">
-              <a:srgbClr val="000000">
-                <a:alpha val="12000"/>
-              </a:srgbClr>
-            </a:outerShdw>
-          </a:effectLst>
         </p:spPr>
       </p:sp>
       <p:sp>
@@ -3903,8 +3838,8 @@
         </p:nvSpPr>
         <p:spPr>
           <a:xfrm>
-            <a:off x="457200" y="914400"/>
-            <a:ext cx="45720" cy="464058"/>
+            <a:off x="457200" y="868680"/>
+            <a:ext cx="45720" cy="475488"/>
           </a:xfrm>
           <a:prstGeom prst="rect">
             <a:avLst/>
@@ -3923,8 +3858,8 @@
         </p:nvSpPr>
         <p:spPr>
           <a:xfrm>
-            <a:off x="685800" y="914400"/>
-            <a:ext cx="7818120" cy="464058"/>
+            <a:off x="640080" y="868680"/>
+            <a:ext cx="7863840" cy="475488"/>
           </a:xfrm>
           <a:prstGeom prst="rect">
             <a:avLst/>
@@ -3948,7 +3883,7 @@
                 <a:ea typeface="JetBrains Mono" pitchFamily="34" charset="-122"/>
                 <a:cs typeface="JetBrains Mono" pitchFamily="34" charset="-120"/>
               </a:rPr>
-              <a:t>AES_ENCRYPT(email, 'cle_secrete') → stockage chiffré</a:t>
+              <a:t>AES_ENCRYPT(email, 'cle') → stockage chiffre (reversible)</a:t>
             </a:r>
             <a:endParaRPr lang="en-US" sz="1000" dirty="0"/>
           </a:p>
@@ -3962,8 +3897,8 @@
         </p:nvSpPr>
         <p:spPr>
           <a:xfrm>
-            <a:off x="457200" y="1405890"/>
-            <a:ext cx="8229600" cy="464058"/>
+            <a:off x="457200" y="1371600"/>
+            <a:ext cx="8229600" cy="475488"/>
           </a:xfrm>
           <a:prstGeom prst="rect">
             <a:avLst/>
@@ -3972,13 +3907,6 @@
             <a:srgbClr val="E3F2FD"/>
           </a:solidFill>
           <a:ln/>
-          <a:effectLst>
-            <a:outerShdw sx="100000" sy="100000" kx="0" ky="0" algn="bl" rotWithShape="0" blurRad="50800" dist="25400" dir="8100000">
-              <a:srgbClr val="000000">
-                <a:alpha val="12000"/>
-              </a:srgbClr>
-            </a:outerShdw>
-          </a:effectLst>
         </p:spPr>
       </p:sp>
       <p:sp>
@@ -3989,8 +3917,8 @@
         </p:nvSpPr>
         <p:spPr>
           <a:xfrm>
-            <a:off x="457200" y="1405890"/>
-            <a:ext cx="45720" cy="464058"/>
+            <a:off x="457200" y="1371600"/>
+            <a:ext cx="45720" cy="475488"/>
           </a:xfrm>
           <a:prstGeom prst="rect">
             <a:avLst/>
@@ -4009,8 +3937,8 @@
         </p:nvSpPr>
         <p:spPr>
           <a:xfrm>
-            <a:off x="685800" y="1405890"/>
-            <a:ext cx="7818120" cy="464058"/>
+            <a:off x="640080" y="1371600"/>
+            <a:ext cx="7863840" cy="475488"/>
           </a:xfrm>
           <a:prstGeom prst="rect">
             <a:avLst/>
@@ -4034,7 +3962,7 @@
                 <a:ea typeface="JetBrains Mono" pitchFamily="34" charset="-122"/>
                 <a:cs typeface="JetBrains Mono" pitchFamily="34" charset="-120"/>
               </a:rPr>
-              <a:t>AES_DECRYPT(email_chiffre, 'cle_secrete') → lecture</a:t>
+              <a:t>AES_DECRYPT(email_chiffre, 'cle') → lecture</a:t>
             </a:r>
             <a:endParaRPr lang="en-US" sz="1000" dirty="0"/>
           </a:p>
@@ -4048,8 +3976,8 @@
         </p:nvSpPr>
         <p:spPr>
           <a:xfrm>
-            <a:off x="457200" y="1897380"/>
-            <a:ext cx="8229600" cy="464058"/>
+            <a:off x="457200" y="1874520"/>
+            <a:ext cx="8229600" cy="475488"/>
           </a:xfrm>
           <a:prstGeom prst="rect">
             <a:avLst/>
@@ -4058,13 +3986,6 @@
             <a:srgbClr val="FFFFFF"/>
           </a:solidFill>
           <a:ln/>
-          <a:effectLst>
-            <a:outerShdw sx="100000" sy="100000" kx="0" ky="0" algn="bl" rotWithShape="0" blurRad="50800" dist="25400" dir="8100000">
-              <a:srgbClr val="000000">
-                <a:alpha val="12000"/>
-              </a:srgbClr>
-            </a:outerShdw>
-          </a:effectLst>
         </p:spPr>
       </p:sp>
       <p:sp>
@@ -4075,8 +3996,8 @@
         </p:nvSpPr>
         <p:spPr>
           <a:xfrm>
-            <a:off x="457200" y="1897380"/>
-            <a:ext cx="45720" cy="464058"/>
+            <a:off x="457200" y="1874520"/>
+            <a:ext cx="45720" cy="475488"/>
           </a:xfrm>
           <a:prstGeom prst="rect">
             <a:avLst/>
@@ -4095,8 +4016,8 @@
         </p:nvSpPr>
         <p:spPr>
           <a:xfrm>
-            <a:off x="685800" y="1897380"/>
-            <a:ext cx="7818120" cy="464058"/>
+            <a:off x="640080" y="1874520"/>
+            <a:ext cx="7863840" cy="475488"/>
           </a:xfrm>
           <a:prstGeom prst="rect">
             <a:avLst/>
@@ -4112,7 +4033,7 @@
               <a:buNone/>
             </a:pPr>
             <a:r>
-              <a:rPr lang="en-US" sz="1200" dirty="0">
+              <a:rPr lang="en-US" sz="1100" dirty="0">
                 <a:solidFill>
                   <a:srgbClr val="1A1A2E"/>
                 </a:solidFill>
@@ -4120,9 +4041,9 @@
                 <a:ea typeface="Calibri" pitchFamily="34" charset="-122"/>
                 <a:cs typeface="Calibri" pitchFamily="34" charset="-120"/>
               </a:rPr>
-              <a:t>SHA2('motdepasse', 256) → hash irréversible (pour les mots de passe)</a:t>
-            </a:r>
-            <a:endParaRPr lang="en-US" sz="1200" dirty="0"/>
+              <a:t>SHA2('motdepasse', 256) → hash IRREVERSIBLE (mots de passe)</a:t>
+            </a:r>
+            <a:endParaRPr lang="en-US" sz="1100" dirty="0"/>
           </a:p>
         </p:txBody>
       </p:sp>
@@ -4134,8 +4055,8 @@
         </p:nvSpPr>
         <p:spPr>
           <a:xfrm>
-            <a:off x="457200" y="2388870"/>
-            <a:ext cx="8229600" cy="464058"/>
+            <a:off x="457200" y="2377440"/>
+            <a:ext cx="8229600" cy="475488"/>
           </a:xfrm>
           <a:prstGeom prst="rect">
             <a:avLst/>
@@ -4144,13 +4065,6 @@
             <a:srgbClr val="E3F2FD"/>
           </a:solidFill>
           <a:ln/>
-          <a:effectLst>
-            <a:outerShdw sx="100000" sy="100000" kx="0" ky="0" algn="bl" rotWithShape="0" blurRad="50800" dist="25400" dir="8100000">
-              <a:srgbClr val="000000">
-                <a:alpha val="12000"/>
-              </a:srgbClr>
-            </a:outerShdw>
-          </a:effectLst>
         </p:spPr>
       </p:sp>
       <p:sp>
@@ -4161,8 +4075,8 @@
         </p:nvSpPr>
         <p:spPr>
           <a:xfrm>
-            <a:off x="457200" y="2388870"/>
-            <a:ext cx="45720" cy="464058"/>
+            <a:off x="457200" y="2377440"/>
+            <a:ext cx="45720" cy="475488"/>
           </a:xfrm>
           <a:prstGeom prst="rect">
             <a:avLst/>
@@ -4181,8 +4095,8 @@
         </p:nvSpPr>
         <p:spPr>
           <a:xfrm>
-            <a:off x="685800" y="2388870"/>
-            <a:ext cx="7818120" cy="464058"/>
+            <a:off x="640080" y="2377440"/>
+            <a:ext cx="7863840" cy="475488"/>
           </a:xfrm>
           <a:prstGeom prst="rect">
             <a:avLst/>
@@ -4198,7 +4112,7 @@
               <a:buNone/>
             </a:pPr>
             <a:r>
-              <a:rPr lang="en-US" sz="1200" dirty="0">
+              <a:rPr lang="en-US" sz="1100" dirty="0">
                 <a:solidFill>
                   <a:srgbClr val="1A1A2E"/>
                 </a:solidFill>
@@ -4208,7 +4122,7 @@
               </a:rPr>
               <a:t>Ne JAMAIS stocker un mot de passe en clair !</a:t>
             </a:r>
-            <a:endParaRPr lang="en-US" sz="1200" dirty="0"/>
+            <a:endParaRPr lang="en-US" sz="1100" dirty="0"/>
           </a:p>
         </p:txBody>
       </p:sp>
@@ -4221,7 +4135,7 @@
         <p:spPr>
           <a:xfrm>
             <a:off x="457200" y="2880360"/>
-            <a:ext cx="8229600" cy="464058"/>
+            <a:ext cx="8229600" cy="475488"/>
           </a:xfrm>
           <a:prstGeom prst="rect">
             <a:avLst/>
@@ -4230,13 +4144,6 @@
             <a:srgbClr val="FFFFFF"/>
           </a:solidFill>
           <a:ln/>
-          <a:effectLst>
-            <a:outerShdw sx="100000" sy="100000" kx="0" ky="0" algn="bl" rotWithShape="0" blurRad="50800" dist="25400" dir="8100000">
-              <a:srgbClr val="000000">
-                <a:alpha val="12000"/>
-              </a:srgbClr>
-            </a:outerShdw>
-          </a:effectLst>
         </p:spPr>
       </p:sp>
       <p:sp>
@@ -4248,7 +4155,7 @@
         <p:spPr>
           <a:xfrm>
             <a:off x="457200" y="2880360"/>
-            <a:ext cx="45720" cy="464058"/>
+            <a:ext cx="45720" cy="475488"/>
           </a:xfrm>
           <a:prstGeom prst="rect">
             <a:avLst/>
@@ -4267,8 +4174,8 @@
         </p:nvSpPr>
         <p:spPr>
           <a:xfrm>
-            <a:off x="685800" y="2880360"/>
-            <a:ext cx="7818120" cy="464058"/>
+            <a:off x="640080" y="2880360"/>
+            <a:ext cx="7863840" cy="475488"/>
           </a:xfrm>
           <a:prstGeom prst="rect">
             <a:avLst/>
@@ -4284,7 +4191,7 @@
               <a:buNone/>
             </a:pPr>
             <a:r>
-              <a:rPr lang="en-US" sz="1200" dirty="0">
+              <a:rPr lang="en-US" sz="1100" dirty="0">
                 <a:solidFill>
                   <a:srgbClr val="1A1A2E"/>
                 </a:solidFill>
@@ -4292,9 +4199,9 @@
                 <a:ea typeface="Calibri" pitchFamily="34" charset="-122"/>
                 <a:cs typeface="Calibri" pitchFamily="34" charset="-120"/>
               </a:rPr>
-              <a:t>D2 : évaluer l'efficacité de la solution SwissSound</a:t>
-            </a:r>
-            <a:endParaRPr lang="en-US" sz="1200" dirty="0"/>
+              <a:t>bcrypt &gt; SHA2 pour les mots de passe (salt integre)</a:t>
+            </a:r>
+            <a:endParaRPr lang="en-US" sz="1100" dirty="0"/>
           </a:p>
         </p:txBody>
       </p:sp>
@@ -4306,8 +4213,8 @@
         </p:nvSpPr>
         <p:spPr>
           <a:xfrm>
-            <a:off x="457200" y="3371850"/>
-            <a:ext cx="8229600" cy="464058"/>
+            <a:off x="457200" y="3383280"/>
+            <a:ext cx="8229600" cy="475488"/>
           </a:xfrm>
           <a:prstGeom prst="rect">
             <a:avLst/>
@@ -4316,13 +4223,6 @@
             <a:srgbClr val="E3F2FD"/>
           </a:solidFill>
           <a:ln/>
-          <a:effectLst>
-            <a:outerShdw sx="100000" sy="100000" kx="0" ky="0" algn="bl" rotWithShape="0" blurRad="50800" dist="25400" dir="8100000">
-              <a:srgbClr val="000000">
-                <a:alpha val="12000"/>
-              </a:srgbClr>
-            </a:outerShdw>
-          </a:effectLst>
         </p:spPr>
       </p:sp>
       <p:sp>
@@ -4333,8 +4233,8 @@
         </p:nvSpPr>
         <p:spPr>
           <a:xfrm>
-            <a:off x="457200" y="3371850"/>
-            <a:ext cx="45720" cy="464058"/>
+            <a:off x="457200" y="3383280"/>
+            <a:ext cx="45720" cy="475488"/>
           </a:xfrm>
           <a:prstGeom prst="rect">
             <a:avLst/>
@@ -4353,8 +4253,8 @@
         </p:nvSpPr>
         <p:spPr>
           <a:xfrm>
-            <a:off x="685800" y="3371850"/>
-            <a:ext cx="7818120" cy="464058"/>
+            <a:off x="640080" y="3383280"/>
+            <a:ext cx="7863840" cy="475488"/>
           </a:xfrm>
           <a:prstGeom prst="rect">
             <a:avLst/>
@@ -4370,7 +4270,7 @@
               <a:buNone/>
             </a:pPr>
             <a:r>
-              <a:rPr lang="en-US" sz="1200" dirty="0">
+              <a:rPr lang="en-US" sz="1100" dirty="0">
                 <a:solidFill>
                   <a:srgbClr val="1A1A2E"/>
                 </a:solidFill>
@@ -4378,9 +4278,9 @@
                 <a:ea typeface="Calibri" pitchFamily="34" charset="-122"/>
                 <a:cs typeface="Calibri" pitchFamily="34" charset="-120"/>
               </a:rPr>
-              <a:t>→ Forces : 3NF, intégrité FK, contraintes, vues de sécurité</a:t>
-            </a:r>
-            <a:endParaRPr lang="en-US" sz="1200" dirty="0"/>
+              <a:t>SSL/TLS pour les connexions reseau</a:t>
+            </a:r>
+            <a:endParaRPr lang="en-US" sz="1100" dirty="0"/>
           </a:p>
         </p:txBody>
       </p:sp>
@@ -4392,8 +4292,8 @@
         </p:nvSpPr>
         <p:spPr>
           <a:xfrm>
-            <a:off x="457200" y="3863340"/>
-            <a:ext cx="8229600" cy="464058"/>
+            <a:off x="457200" y="3886200"/>
+            <a:ext cx="8229600" cy="475488"/>
           </a:xfrm>
           <a:prstGeom prst="rect">
             <a:avLst/>
@@ -4402,13 +4302,6 @@
             <a:srgbClr val="FFFFFF"/>
           </a:solidFill>
           <a:ln/>
-          <a:effectLst>
-            <a:outerShdw sx="100000" sy="100000" kx="0" ky="0" algn="bl" rotWithShape="0" blurRad="50800" dist="25400" dir="8100000">
-              <a:srgbClr val="000000">
-                <a:alpha val="12000"/>
-              </a:srgbClr>
-            </a:outerShdw>
-          </a:effectLst>
         </p:spPr>
       </p:sp>
       <p:sp>
@@ -4419,8 +4312,8 @@
         </p:nvSpPr>
         <p:spPr>
           <a:xfrm>
-            <a:off x="457200" y="3863340"/>
-            <a:ext cx="45720" cy="464058"/>
+            <a:off x="457200" y="3886200"/>
+            <a:ext cx="45720" cy="475488"/>
           </a:xfrm>
           <a:prstGeom prst="rect">
             <a:avLst/>
@@ -4439,8 +4332,8 @@
         </p:nvSpPr>
         <p:spPr>
           <a:xfrm>
-            <a:off x="685800" y="3863340"/>
-            <a:ext cx="7818120" cy="464058"/>
+            <a:off x="640080" y="3886200"/>
+            <a:ext cx="7863840" cy="475488"/>
           </a:xfrm>
           <a:prstGeom prst="rect">
             <a:avLst/>
@@ -4456,7 +4349,7 @@
               <a:buNone/>
             </a:pPr>
             <a:r>
-              <a:rPr lang="en-US" sz="1200" dirty="0">
+              <a:rPr lang="en-US" sz="1100" dirty="0">
                 <a:solidFill>
                   <a:srgbClr val="1A1A2E"/>
                 </a:solidFill>
@@ -4464,95 +4357,9 @@
                 <a:ea typeface="Calibri" pitchFamily="34" charset="-122"/>
                 <a:cs typeface="Calibri" pitchFamily="34" charset="-120"/>
               </a:rPr>
-              <a:t>→ Faiblesses : pas de chiffrement par défaut, pas d'audit trail</a:t>
-            </a:r>
-            <a:endParaRPr lang="en-US" sz="1200" dirty="0"/>
-          </a:p>
-        </p:txBody>
-      </p:sp>
-      <p:sp>
-        <p:nvSpPr>
-          <p:cNvPr id="25" name="Shape 23"/>
-          <p:cNvSpPr/>
-          <p:nvPr/>
-        </p:nvSpPr>
-        <p:spPr>
-          <a:xfrm>
-            <a:off x="457200" y="4354830"/>
-            <a:ext cx="8229600" cy="464058"/>
-          </a:xfrm>
-          <a:prstGeom prst="rect">
-            <a:avLst/>
-          </a:prstGeom>
-          <a:solidFill>
-            <a:srgbClr val="E3F2FD"/>
-          </a:solidFill>
-          <a:ln/>
-          <a:effectLst>
-            <a:outerShdw sx="100000" sy="100000" kx="0" ky="0" algn="bl" rotWithShape="0" blurRad="50800" dist="25400" dir="8100000">
-              <a:srgbClr val="000000">
-                <a:alpha val="12000"/>
-              </a:srgbClr>
-            </a:outerShdw>
-          </a:effectLst>
-        </p:spPr>
-      </p:sp>
-      <p:sp>
-        <p:nvSpPr>
-          <p:cNvPr id="26" name="Shape 24"/>
-          <p:cNvSpPr/>
-          <p:nvPr/>
-        </p:nvSpPr>
-        <p:spPr>
-          <a:xfrm>
-            <a:off x="457200" y="4354830"/>
-            <a:ext cx="45720" cy="464058"/>
-          </a:xfrm>
-          <a:prstGeom prst="rect">
-            <a:avLst/>
-          </a:prstGeom>
-          <a:solidFill>
-            <a:srgbClr val="1565C0"/>
-          </a:solidFill>
-          <a:ln/>
-        </p:spPr>
-      </p:sp>
-      <p:sp>
-        <p:nvSpPr>
-          <p:cNvPr id="27" name="Text 25"/>
-          <p:cNvSpPr/>
-          <p:nvPr/>
-        </p:nvSpPr>
-        <p:spPr>
-          <a:xfrm>
-            <a:off x="685800" y="4354830"/>
-            <a:ext cx="7818120" cy="464058"/>
-          </a:xfrm>
-          <a:prstGeom prst="rect">
-            <a:avLst/>
-          </a:prstGeom>
-          <a:noFill/>
-          <a:ln/>
-        </p:spPr>
-        <p:txBody>
-          <a:bodyPr wrap="square" lIns="0" tIns="0" rIns="0" bIns="0" rtlCol="0" anchor="ctr"/>
-          <a:lstStyle/>
-          <a:p>
-            <a:pPr indent="0" marL="0">
-              <a:buNone/>
-            </a:pPr>
-            <a:r>
-              <a:rPr lang="en-US" sz="1200" dirty="0">
-                <a:solidFill>
-                  <a:srgbClr val="1A1A2E"/>
-                </a:solidFill>
-                <a:latin typeface="Calibri" pitchFamily="34" charset="0"/>
-                <a:ea typeface="Calibri" pitchFamily="34" charset="-122"/>
-                <a:cs typeface="Calibri" pitchFamily="34" charset="-120"/>
-              </a:rPr>
-              <a:t>→ Améliorations : backup automatique, logs d'accès, SSL</a:t>
-            </a:r>
-            <a:endParaRPr lang="en-US" sz="1200" dirty="0"/>
+              <a:t>Backup chiffre avec GPG ou AES</a:t>
+            </a:r>
+            <a:endParaRPr lang="en-US" sz="1100" dirty="0"/>
           </a:p>
         </p:txBody>
       </p:sp>
@@ -4617,7 +4424,7 @@
         <p:spPr>
           <a:xfrm>
             <a:off x="457200" y="182880"/>
-            <a:ext cx="8229600" cy="594360"/>
+            <a:ext cx="8229600" cy="548640"/>
           </a:xfrm>
           <a:prstGeom prst="rect">
             <a:avLst/>
@@ -4633,7 +4440,7 @@
               <a:buNone/>
             </a:pPr>
             <a:r>
-              <a:rPr lang="en-US" sz="2400" b="1" dirty="0">
+              <a:rPr lang="en-US" sz="2200" b="1" dirty="0">
                 <a:solidFill>
                   <a:srgbClr val="0D47A1"/>
                 </a:solidFill>
@@ -4641,9 +4448,9 @@
                 <a:ea typeface="Trebuchet MS" pitchFamily="34" charset="-122"/>
                 <a:cs typeface="Trebuchet MS" pitchFamily="34" charset="-120"/>
               </a:rPr>
-              <a:t>Exercice Module 16</a:t>
-            </a:r>
-            <a:endParaRPr lang="en-US" sz="2400" dirty="0"/>
+              <a:t>D2 : evaluer l'efficacite de la solution</a:t>
+            </a:r>
+            <a:endParaRPr lang="en-US" sz="2200" dirty="0"/>
           </a:p>
         </p:txBody>
       </p:sp>
@@ -4655,8 +4462,8 @@
         </p:nvSpPr>
         <p:spPr>
           <a:xfrm>
-            <a:off x="457200" y="914400"/>
-            <a:ext cx="8229600" cy="521208"/>
+            <a:off x="457200" y="868680"/>
+            <a:ext cx="8229600" cy="464058"/>
           </a:xfrm>
           <a:prstGeom prst="rect">
             <a:avLst/>
@@ -4665,13 +4472,6 @@
             <a:srgbClr val="FFFFFF"/>
           </a:solidFill>
           <a:ln/>
-          <a:effectLst>
-            <a:outerShdw sx="100000" sy="100000" kx="0" ky="0" algn="bl" rotWithShape="0" blurRad="50800" dist="25400" dir="8100000">
-              <a:srgbClr val="000000">
-                <a:alpha val="12000"/>
-              </a:srgbClr>
-            </a:outerShdw>
-          </a:effectLst>
         </p:spPr>
       </p:sp>
       <p:sp>
@@ -4682,8 +4482,8 @@
         </p:nvSpPr>
         <p:spPr>
           <a:xfrm>
-            <a:off x="457200" y="914400"/>
-            <a:ext cx="45720" cy="521208"/>
+            <a:off x="457200" y="868680"/>
+            <a:ext cx="45720" cy="464058"/>
           </a:xfrm>
           <a:prstGeom prst="rect">
             <a:avLst/>
@@ -4702,8 +4502,8 @@
         </p:nvSpPr>
         <p:spPr>
           <a:xfrm>
-            <a:off x="685800" y="914400"/>
-            <a:ext cx="7818120" cy="521208"/>
+            <a:off x="640080" y="868680"/>
+            <a:ext cx="7863840" cy="464058"/>
           </a:xfrm>
           <a:prstGeom prst="rect">
             <a:avLst/>
@@ -4719,7 +4519,7 @@
               <a:buNone/>
             </a:pPr>
             <a:r>
-              <a:rPr lang="en-US" sz="1200" dirty="0">
+              <a:rPr lang="en-US" sz="1100" dirty="0">
                 <a:solidFill>
                   <a:srgbClr val="1A1A2E"/>
                 </a:solidFill>
@@ -4727,9 +4527,9 @@
                 <a:ea typeface="Calibri" pitchFamily="34" charset="-122"/>
                 <a:cs typeface="Calibri" pitchFamily="34" charset="-120"/>
               </a:rPr>
-              <a:t>Créer les 4 utilisateurs SwissSound avec mots de passe forts</a:t>
-            </a:r>
-            <a:endParaRPr lang="en-US" sz="1200" dirty="0"/>
+              <a:t>Forces : 3NF, FK, contraintes, vues securisees, GRANT</a:t>
+            </a:r>
+            <a:endParaRPr lang="en-US" sz="1100" dirty="0"/>
           </a:p>
         </p:txBody>
       </p:sp>
@@ -4741,8 +4541,8 @@
         </p:nvSpPr>
         <p:spPr>
           <a:xfrm>
-            <a:off x="457200" y="1463040"/>
-            <a:ext cx="8229600" cy="521208"/>
+            <a:off x="457200" y="1360170"/>
+            <a:ext cx="8229600" cy="464058"/>
           </a:xfrm>
           <a:prstGeom prst="rect">
             <a:avLst/>
@@ -4751,13 +4551,6 @@
             <a:srgbClr val="E3F2FD"/>
           </a:solidFill>
           <a:ln/>
-          <a:effectLst>
-            <a:outerShdw sx="100000" sy="100000" kx="0" ky="0" algn="bl" rotWithShape="0" blurRad="50800" dist="25400" dir="8100000">
-              <a:srgbClr val="000000">
-                <a:alpha val="12000"/>
-              </a:srgbClr>
-            </a:outerShdw>
-          </a:effectLst>
         </p:spPr>
       </p:sp>
       <p:sp>
@@ -4768,8 +4561,8 @@
         </p:nvSpPr>
         <p:spPr>
           <a:xfrm>
-            <a:off x="457200" y="1463040"/>
-            <a:ext cx="45720" cy="521208"/>
+            <a:off x="457200" y="1360170"/>
+            <a:ext cx="45720" cy="464058"/>
           </a:xfrm>
           <a:prstGeom prst="rect">
             <a:avLst/>
@@ -4788,8 +4581,8 @@
         </p:nvSpPr>
         <p:spPr>
           <a:xfrm>
-            <a:off x="685800" y="1463040"/>
-            <a:ext cx="7818120" cy="521208"/>
+            <a:off x="640080" y="1360170"/>
+            <a:ext cx="7863840" cy="464058"/>
           </a:xfrm>
           <a:prstGeom prst="rect">
             <a:avLst/>
@@ -4805,7 +4598,7 @@
               <a:buNone/>
             </a:pPr>
             <a:r>
-              <a:rPr lang="en-US" sz="1200" dirty="0">
+              <a:rPr lang="en-US" sz="1100" dirty="0">
                 <a:solidFill>
                   <a:srgbClr val="1A1A2E"/>
                 </a:solidFill>
@@ -4813,9 +4606,9 @@
                 <a:ea typeface="Calibri" pitchFamily="34" charset="-122"/>
                 <a:cs typeface="Calibri" pitchFamily="34" charset="-120"/>
               </a:rPr>
-              <a:t>Attribuer les droits selon la matrice (GRANT)</a:t>
-            </a:r>
-            <a:endParaRPr lang="en-US" sz="1200" dirty="0"/>
+              <a:t>Faiblesses : pas de chiffrement par defaut, pas d'audit trail</a:t>
+            </a:r>
+            <a:endParaRPr lang="en-US" sz="1100" dirty="0"/>
           </a:p>
         </p:txBody>
       </p:sp>
@@ -4827,8 +4620,8 @@
         </p:nvSpPr>
         <p:spPr>
           <a:xfrm>
-            <a:off x="457200" y="2011680"/>
-            <a:ext cx="8229600" cy="521208"/>
+            <a:off x="457200" y="1851660"/>
+            <a:ext cx="8229600" cy="464058"/>
           </a:xfrm>
           <a:prstGeom prst="rect">
             <a:avLst/>
@@ -4837,13 +4630,6 @@
             <a:srgbClr val="FFFFFF"/>
           </a:solidFill>
           <a:ln/>
-          <a:effectLst>
-            <a:outerShdw sx="100000" sy="100000" kx="0" ky="0" algn="bl" rotWithShape="0" blurRad="50800" dist="25400" dir="8100000">
-              <a:srgbClr val="000000">
-                <a:alpha val="12000"/>
-              </a:srgbClr>
-            </a:outerShdw>
-          </a:effectLst>
         </p:spPr>
       </p:sp>
       <p:sp>
@@ -4854,8 +4640,8 @@
         </p:nvSpPr>
         <p:spPr>
           <a:xfrm>
-            <a:off x="457200" y="2011680"/>
-            <a:ext cx="45720" cy="521208"/>
+            <a:off x="457200" y="1851660"/>
+            <a:ext cx="45720" cy="464058"/>
           </a:xfrm>
           <a:prstGeom prst="rect">
             <a:avLst/>
@@ -4874,8 +4660,8 @@
         </p:nvSpPr>
         <p:spPr>
           <a:xfrm>
-            <a:off x="685800" y="2011680"/>
-            <a:ext cx="7818120" cy="521208"/>
+            <a:off x="640080" y="1851660"/>
+            <a:ext cx="7863840" cy="464058"/>
           </a:xfrm>
           <a:prstGeom prst="rect">
             <a:avLst/>
@@ -4891,7 +4677,7 @@
               <a:buNone/>
             </a:pPr>
             <a:r>
-              <a:rPr lang="en-US" sz="1200" dirty="0">
+              <a:rPr lang="en-US" sz="1100" dirty="0">
                 <a:solidFill>
                   <a:srgbClr val="1A1A2E"/>
                 </a:solidFill>
@@ -4899,9 +4685,9 @@
                 <a:ea typeface="Calibri" pitchFamily="34" charset="-122"/>
                 <a:cs typeface="Calibri" pitchFamily="34" charset="-120"/>
               </a:rPr>
-              <a:t>Tester : se connecter comme 'ingenieur_son' et essayer DELETE → bloqué !</a:t>
-            </a:r>
-            <a:endParaRPr lang="en-US" sz="1200" dirty="0"/>
+              <a:t>Pas de multi-sites, pas d'historique des tarifs</a:t>
+            </a:r>
+            <a:endParaRPr lang="en-US" sz="1100" dirty="0"/>
           </a:p>
         </p:txBody>
       </p:sp>
@@ -4913,8 +4699,8 @@
         </p:nvSpPr>
         <p:spPr>
           <a:xfrm>
-            <a:off x="457200" y="2560320"/>
-            <a:ext cx="8229600" cy="521208"/>
+            <a:off x="457200" y="2343150"/>
+            <a:ext cx="8229600" cy="464058"/>
           </a:xfrm>
           <a:prstGeom prst="rect">
             <a:avLst/>
@@ -4923,13 +4709,6 @@
             <a:srgbClr val="E3F2FD"/>
           </a:solidFill>
           <a:ln/>
-          <a:effectLst>
-            <a:outerShdw sx="100000" sy="100000" kx="0" ky="0" algn="bl" rotWithShape="0" blurRad="50800" dist="25400" dir="8100000">
-              <a:srgbClr val="000000">
-                <a:alpha val="12000"/>
-              </a:srgbClr>
-            </a:outerShdw>
-          </a:effectLst>
         </p:spPr>
       </p:sp>
       <p:sp>
@@ -4940,8 +4719,8 @@
         </p:nvSpPr>
         <p:spPr>
           <a:xfrm>
-            <a:off x="457200" y="2560320"/>
-            <a:ext cx="45720" cy="521208"/>
+            <a:off x="457200" y="2343150"/>
+            <a:ext cx="45720" cy="464058"/>
           </a:xfrm>
           <a:prstGeom prst="rect">
             <a:avLst/>
@@ -4960,8 +4739,8 @@
         </p:nvSpPr>
         <p:spPr>
           <a:xfrm>
-            <a:off x="685800" y="2560320"/>
-            <a:ext cx="7818120" cy="521208"/>
+            <a:off x="640080" y="2343150"/>
+            <a:ext cx="7863840" cy="464058"/>
           </a:xfrm>
           <a:prstGeom prst="rect">
             <a:avLst/>
@@ -4977,7 +4756,7 @@
               <a:buNone/>
             </a:pPr>
             <a:r>
-              <a:rPr lang="en-US" sz="1200" dirty="0">
+              <a:rPr lang="en-US" sz="1100" dirty="0">
                 <a:solidFill>
                   <a:srgbClr val="1A1A2E"/>
                 </a:solidFill>
@@ -4985,9 +4764,9 @@
                 <a:ea typeface="Calibri" pitchFamily="34" charset="-122"/>
                 <a:cs typeface="Calibri" pitchFamily="34" charset="-120"/>
               </a:rPr>
-              <a:t>Rédiger la politique RGPD de SwissSound (1 page)</a:t>
-            </a:r>
-            <a:endParaRPr lang="en-US" sz="1200" dirty="0"/>
+              <a:t>Ameliorations proposees :</a:t>
+            </a:r>
+            <a:endParaRPr lang="en-US" sz="1100" dirty="0"/>
           </a:p>
         </p:txBody>
       </p:sp>
@@ -4999,8 +4778,8 @@
         </p:nvSpPr>
         <p:spPr>
           <a:xfrm>
-            <a:off x="457200" y="3108960"/>
-            <a:ext cx="8229600" cy="521208"/>
+            <a:off x="457200" y="2834640"/>
+            <a:ext cx="8229600" cy="464058"/>
           </a:xfrm>
           <a:prstGeom prst="rect">
             <a:avLst/>
@@ -5009,13 +4788,6 @@
             <a:srgbClr val="FFFFFF"/>
           </a:solidFill>
           <a:ln/>
-          <a:effectLst>
-            <a:outerShdw sx="100000" sy="100000" kx="0" ky="0" algn="bl" rotWithShape="0" blurRad="50800" dist="25400" dir="8100000">
-              <a:srgbClr val="000000">
-                <a:alpha val="12000"/>
-              </a:srgbClr>
-            </a:outerShdw>
-          </a:effectLst>
         </p:spPr>
       </p:sp>
       <p:sp>
@@ -5026,8 +4798,8 @@
         </p:nvSpPr>
         <p:spPr>
           <a:xfrm>
-            <a:off x="457200" y="3108960"/>
-            <a:ext cx="45720" cy="521208"/>
+            <a:off x="457200" y="2834640"/>
+            <a:ext cx="45720" cy="464058"/>
           </a:xfrm>
           <a:prstGeom prst="rect">
             <a:avLst/>
@@ -5046,8 +4818,8 @@
         </p:nvSpPr>
         <p:spPr>
           <a:xfrm>
-            <a:off x="685800" y="3108960"/>
-            <a:ext cx="7818120" cy="521208"/>
+            <a:off x="640080" y="2834640"/>
+            <a:ext cx="7863840" cy="464058"/>
           </a:xfrm>
           <a:prstGeom prst="rect">
             <a:avLst/>
@@ -5063,7 +4835,7 @@
               <a:buNone/>
             </a:pPr>
             <a:r>
-              <a:rPr lang="en-US" sz="1200" dirty="0">
+              <a:rPr lang="en-US" sz="1100" dirty="0">
                 <a:solidFill>
                   <a:srgbClr val="1A1A2E"/>
                 </a:solidFill>
@@ -5071,9 +4843,9 @@
                 <a:ea typeface="Calibri" pitchFamily="34" charset="-122"/>
                 <a:cs typeface="Calibri" pitchFamily="34" charset="-120"/>
               </a:rPr>
-              <a:t>Chiffrer les emails avec AES_ENCRYPT (optionnel)</a:t>
-            </a:r>
-            <a:endParaRPr lang="en-US" sz="1200" dirty="0"/>
+              <a:t>→ Cloud (AWS RDS, Supabase) pour haute disponibilite</a:t>
+            </a:r>
+            <a:endParaRPr lang="en-US" sz="1100" dirty="0"/>
           </a:p>
         </p:txBody>
       </p:sp>
@@ -5085,8 +4857,8 @@
         </p:nvSpPr>
         <p:spPr>
           <a:xfrm>
-            <a:off x="457200" y="3657600"/>
-            <a:ext cx="8229600" cy="521208"/>
+            <a:off x="457200" y="3326130"/>
+            <a:ext cx="8229600" cy="464058"/>
           </a:xfrm>
           <a:prstGeom prst="rect">
             <a:avLst/>
@@ -5095,13 +4867,6 @@
             <a:srgbClr val="E3F2FD"/>
           </a:solidFill>
           <a:ln/>
-          <a:effectLst>
-            <a:outerShdw sx="100000" sy="100000" kx="0" ky="0" algn="bl" rotWithShape="0" blurRad="50800" dist="25400" dir="8100000">
-              <a:srgbClr val="000000">
-                <a:alpha val="12000"/>
-              </a:srgbClr>
-            </a:outerShdw>
-          </a:effectLst>
         </p:spPr>
       </p:sp>
       <p:sp>
@@ -5112,8 +4877,8 @@
         </p:nvSpPr>
         <p:spPr>
           <a:xfrm>
-            <a:off x="457200" y="3657600"/>
-            <a:ext cx="45720" cy="521208"/>
+            <a:off x="457200" y="3326130"/>
+            <a:ext cx="45720" cy="464058"/>
           </a:xfrm>
           <a:prstGeom prst="rect">
             <a:avLst/>
@@ -5132,8 +4897,8 @@
         </p:nvSpPr>
         <p:spPr>
           <a:xfrm>
-            <a:off x="685800" y="3657600"/>
-            <a:ext cx="7818120" cy="521208"/>
+            <a:off x="640080" y="3326130"/>
+            <a:ext cx="7863840" cy="464058"/>
           </a:xfrm>
           <a:prstGeom prst="rect">
             <a:avLst/>
@@ -5149,7 +4914,7 @@
               <a:buNone/>
             </a:pPr>
             <a:r>
-              <a:rPr lang="en-US" sz="1200" dirty="0">
+              <a:rPr lang="en-US" sz="1100" dirty="0">
                 <a:solidFill>
                   <a:srgbClr val="1A1A2E"/>
                 </a:solidFill>
@@ -5157,9 +4922,167 @@
                 <a:ea typeface="Calibri" pitchFamily="34" charset="-122"/>
                 <a:cs typeface="Calibri" pitchFamily="34" charset="-120"/>
               </a:rPr>
-              <a:t>DÉFI D2 : évaluation critique complète + 5 améliorations argumentées</a:t>
-            </a:r>
-            <a:endParaRPr lang="en-US" sz="1200" dirty="0"/>
+              <a:t>→ API REST pour application mobile</a:t>
+            </a:r>
+            <a:endParaRPr lang="en-US" sz="1100" dirty="0"/>
+          </a:p>
+        </p:txBody>
+      </p:sp>
+      <p:sp>
+        <p:nvSpPr>
+          <p:cNvPr id="22" name="Shape 20"/>
+          <p:cNvSpPr/>
+          <p:nvPr/>
+        </p:nvSpPr>
+        <p:spPr>
+          <a:xfrm>
+            <a:off x="457200" y="3817620"/>
+            <a:ext cx="8229600" cy="464058"/>
+          </a:xfrm>
+          <a:prstGeom prst="rect">
+            <a:avLst/>
+          </a:prstGeom>
+          <a:solidFill>
+            <a:srgbClr val="FFFFFF"/>
+          </a:solidFill>
+          <a:ln/>
+        </p:spPr>
+      </p:sp>
+      <p:sp>
+        <p:nvSpPr>
+          <p:cNvPr id="23" name="Shape 21"/>
+          <p:cNvSpPr/>
+          <p:nvPr/>
+        </p:nvSpPr>
+        <p:spPr>
+          <a:xfrm>
+            <a:off x="457200" y="3817620"/>
+            <a:ext cx="45720" cy="464058"/>
+          </a:xfrm>
+          <a:prstGeom prst="rect">
+            <a:avLst/>
+          </a:prstGeom>
+          <a:solidFill>
+            <a:srgbClr val="1565C0"/>
+          </a:solidFill>
+          <a:ln/>
+        </p:spPr>
+      </p:sp>
+      <p:sp>
+        <p:nvSpPr>
+          <p:cNvPr id="24" name="Text 22"/>
+          <p:cNvSpPr/>
+          <p:nvPr/>
+        </p:nvSpPr>
+        <p:spPr>
+          <a:xfrm>
+            <a:off x="640080" y="3817620"/>
+            <a:ext cx="7863840" cy="464058"/>
+          </a:xfrm>
+          <a:prstGeom prst="rect">
+            <a:avLst/>
+          </a:prstGeom>
+          <a:noFill/>
+          <a:ln/>
+        </p:spPr>
+        <p:txBody>
+          <a:bodyPr wrap="square" lIns="0" tIns="0" rIns="0" bIns="0" rtlCol="0" anchor="ctr"/>
+          <a:lstStyle/>
+          <a:p>
+            <a:pPr indent="0" marL="0">
+              <a:buNone/>
+            </a:pPr>
+            <a:r>
+              <a:rPr lang="en-US" sz="1100" dirty="0">
+                <a:solidFill>
+                  <a:srgbClr val="1A1A2E"/>
+                </a:solidFill>
+                <a:latin typeface="Calibri" pitchFamily="34" charset="0"/>
+                <a:ea typeface="Calibri" pitchFamily="34" charset="-122"/>
+                <a:cs typeface="Calibri" pitchFamily="34" charset="-120"/>
+              </a:rPr>
+              <a:t>→ Dashboard BI (Metabase) pour le directeur</a:t>
+            </a:r>
+            <a:endParaRPr lang="en-US" sz="1100" dirty="0"/>
+          </a:p>
+        </p:txBody>
+      </p:sp>
+      <p:sp>
+        <p:nvSpPr>
+          <p:cNvPr id="25" name="Shape 23"/>
+          <p:cNvSpPr/>
+          <p:nvPr/>
+        </p:nvSpPr>
+        <p:spPr>
+          <a:xfrm>
+            <a:off x="457200" y="4309110"/>
+            <a:ext cx="8229600" cy="464058"/>
+          </a:xfrm>
+          <a:prstGeom prst="rect">
+            <a:avLst/>
+          </a:prstGeom>
+          <a:solidFill>
+            <a:srgbClr val="E3F2FD"/>
+          </a:solidFill>
+          <a:ln/>
+        </p:spPr>
+      </p:sp>
+      <p:sp>
+        <p:nvSpPr>
+          <p:cNvPr id="26" name="Shape 24"/>
+          <p:cNvSpPr/>
+          <p:nvPr/>
+        </p:nvSpPr>
+        <p:spPr>
+          <a:xfrm>
+            <a:off x="457200" y="4309110"/>
+            <a:ext cx="45720" cy="464058"/>
+          </a:xfrm>
+          <a:prstGeom prst="rect">
+            <a:avLst/>
+          </a:prstGeom>
+          <a:solidFill>
+            <a:srgbClr val="1565C0"/>
+          </a:solidFill>
+          <a:ln/>
+        </p:spPr>
+      </p:sp>
+      <p:sp>
+        <p:nvSpPr>
+          <p:cNvPr id="27" name="Text 25"/>
+          <p:cNvSpPr/>
+          <p:nvPr/>
+        </p:nvSpPr>
+        <p:spPr>
+          <a:xfrm>
+            <a:off x="640080" y="4309110"/>
+            <a:ext cx="7863840" cy="464058"/>
+          </a:xfrm>
+          <a:prstGeom prst="rect">
+            <a:avLst/>
+          </a:prstGeom>
+          <a:noFill/>
+          <a:ln/>
+        </p:spPr>
+        <p:txBody>
+          <a:bodyPr wrap="square" lIns="0" tIns="0" rIns="0" bIns="0" rtlCol="0" anchor="ctr"/>
+          <a:lstStyle/>
+          <a:p>
+            <a:pPr indent="0" marL="0">
+              <a:buNone/>
+            </a:pPr>
+            <a:r>
+              <a:rPr lang="en-US" sz="1100" dirty="0">
+                <a:solidFill>
+                  <a:srgbClr val="1A1A2E"/>
+                </a:solidFill>
+                <a:latin typeface="Calibri" pitchFamily="34" charset="0"/>
+                <a:ea typeface="Calibri" pitchFamily="34" charset="-122"/>
+                <a:cs typeface="Calibri" pitchFamily="34" charset="-120"/>
+              </a:rPr>
+              <a:t>→ Backup automatise + monitoring performances</a:t>
+            </a:r>
+            <a:endParaRPr lang="en-US" sz="1100" dirty="0"/>
           </a:p>
         </p:txBody>
       </p:sp>
@@ -5174,6 +5097,571 @@
 <file path=ppt/slides/slide7.xml><?xml version="1.0" encoding="utf-8"?>
 <p:sld xmlns:a="http://schemas.openxmlformats.org/drawingml/2006/main" xmlns:r="http://schemas.openxmlformats.org/officeDocument/2006/relationships" xmlns:p="http://schemas.openxmlformats.org/presentationml/2006/main">
   <p:cSld name="Slide 7">
+    <p:bg>
+      <p:bgPr>
+        <a:solidFill>
+          <a:srgbClr val="F5F7FA"/>
+        </a:solidFill>
+      </p:bgPr>
+    </p:bg>
+    <p:spTree>
+      <p:nvGrpSpPr>
+        <p:cNvPr id="1" name=""/>
+        <p:cNvGrpSpPr/>
+        <p:nvPr/>
+      </p:nvGrpSpPr>
+      <p:grpSpPr>
+        <a:xfrm>
+          <a:off x="0" y="0"/>
+          <a:ext cx="0" cy="0"/>
+          <a:chOff x="0" y="0"/>
+          <a:chExt cx="0" cy="0"/>
+        </a:xfrm>
+      </p:grpSpPr>
+      <p:sp>
+        <p:nvSpPr>
+          <p:cNvPr id="2" name="Shape 0"/>
+          <p:cNvSpPr/>
+          <p:nvPr/>
+        </p:nvSpPr>
+        <p:spPr>
+          <a:xfrm>
+            <a:off x="0" y="0"/>
+            <a:ext cx="9144000" cy="54864"/>
+          </a:xfrm>
+          <a:prstGeom prst="rect">
+            <a:avLst/>
+          </a:prstGeom>
+          <a:solidFill>
+            <a:srgbClr val="1565C0"/>
+          </a:solidFill>
+          <a:ln/>
+        </p:spPr>
+      </p:sp>
+      <p:sp>
+        <p:nvSpPr>
+          <p:cNvPr id="3" name="Text 1"/>
+          <p:cNvSpPr/>
+          <p:nvPr/>
+        </p:nvSpPr>
+        <p:spPr>
+          <a:xfrm>
+            <a:off x="457200" y="182880"/>
+            <a:ext cx="8229600" cy="548640"/>
+          </a:xfrm>
+          <a:prstGeom prst="rect">
+            <a:avLst/>
+          </a:prstGeom>
+          <a:noFill/>
+          <a:ln/>
+        </p:spPr>
+        <p:txBody>
+          <a:bodyPr wrap="square" lIns="0" tIns="0" rIns="0" bIns="0" rtlCol="0" anchor="ctr"/>
+          <a:lstStyle/>
+          <a:p>
+            <a:pPr indent="0" marL="0">
+              <a:buNone/>
+            </a:pPr>
+            <a:r>
+              <a:rPr lang="en-US" sz="2200" b="1" dirty="0">
+                <a:solidFill>
+                  <a:srgbClr val="0D47A1"/>
+                </a:solidFill>
+                <a:latin typeface="Trebuchet MS" pitchFamily="34" charset="0"/>
+                <a:ea typeface="Trebuchet MS" pitchFamily="34" charset="-122"/>
+                <a:cs typeface="Trebuchet MS" pitchFamily="34" charset="-120"/>
+              </a:rPr>
+              <a:t>Exercice Module 16</a:t>
+            </a:r>
+            <a:endParaRPr lang="en-US" sz="2200" dirty="0"/>
+          </a:p>
+        </p:txBody>
+      </p:sp>
+      <p:sp>
+        <p:nvSpPr>
+          <p:cNvPr id="4" name="Shape 2"/>
+          <p:cNvSpPr/>
+          <p:nvPr/>
+        </p:nvSpPr>
+        <p:spPr>
+          <a:xfrm>
+            <a:off x="457200" y="868680"/>
+            <a:ext cx="8229600" cy="475488"/>
+          </a:xfrm>
+          <a:prstGeom prst="rect">
+            <a:avLst/>
+          </a:prstGeom>
+          <a:solidFill>
+            <a:srgbClr val="FFFFFF"/>
+          </a:solidFill>
+          <a:ln/>
+        </p:spPr>
+      </p:sp>
+      <p:sp>
+        <p:nvSpPr>
+          <p:cNvPr id="5" name="Shape 3"/>
+          <p:cNvSpPr/>
+          <p:nvPr/>
+        </p:nvSpPr>
+        <p:spPr>
+          <a:xfrm>
+            <a:off x="457200" y="868680"/>
+            <a:ext cx="45720" cy="475488"/>
+          </a:xfrm>
+          <a:prstGeom prst="rect">
+            <a:avLst/>
+          </a:prstGeom>
+          <a:solidFill>
+            <a:srgbClr val="1565C0"/>
+          </a:solidFill>
+          <a:ln/>
+        </p:spPr>
+      </p:sp>
+      <p:sp>
+        <p:nvSpPr>
+          <p:cNvPr id="6" name="Text 4"/>
+          <p:cNvSpPr/>
+          <p:nvPr/>
+        </p:nvSpPr>
+        <p:spPr>
+          <a:xfrm>
+            <a:off x="640080" y="868680"/>
+            <a:ext cx="7863840" cy="475488"/>
+          </a:xfrm>
+          <a:prstGeom prst="rect">
+            <a:avLst/>
+          </a:prstGeom>
+          <a:noFill/>
+          <a:ln/>
+        </p:spPr>
+        <p:txBody>
+          <a:bodyPr wrap="square" lIns="0" tIns="0" rIns="0" bIns="0" rtlCol="0" anchor="ctr"/>
+          <a:lstStyle/>
+          <a:p>
+            <a:pPr indent="0" marL="0">
+              <a:buNone/>
+            </a:pPr>
+            <a:r>
+              <a:rPr lang="en-US" sz="1100" dirty="0">
+                <a:solidFill>
+                  <a:srgbClr val="1A1A2E"/>
+                </a:solidFill>
+                <a:latin typeface="Calibri" pitchFamily="34" charset="0"/>
+                <a:ea typeface="Calibri" pitchFamily="34" charset="-122"/>
+                <a:cs typeface="Calibri" pitchFamily="34" charset="-120"/>
+              </a:rPr>
+              <a:t>1. Creer les 4 utilisateurs SwissSound</a:t>
+            </a:r>
+            <a:endParaRPr lang="en-US" sz="1100" dirty="0"/>
+          </a:p>
+        </p:txBody>
+      </p:sp>
+      <p:sp>
+        <p:nvSpPr>
+          <p:cNvPr id="7" name="Shape 5"/>
+          <p:cNvSpPr/>
+          <p:nvPr/>
+        </p:nvSpPr>
+        <p:spPr>
+          <a:xfrm>
+            <a:off x="457200" y="1371600"/>
+            <a:ext cx="8229600" cy="475488"/>
+          </a:xfrm>
+          <a:prstGeom prst="rect">
+            <a:avLst/>
+          </a:prstGeom>
+          <a:solidFill>
+            <a:srgbClr val="E3F2FD"/>
+          </a:solidFill>
+          <a:ln/>
+        </p:spPr>
+      </p:sp>
+      <p:sp>
+        <p:nvSpPr>
+          <p:cNvPr id="8" name="Shape 6"/>
+          <p:cNvSpPr/>
+          <p:nvPr/>
+        </p:nvSpPr>
+        <p:spPr>
+          <a:xfrm>
+            <a:off x="457200" y="1371600"/>
+            <a:ext cx="45720" cy="475488"/>
+          </a:xfrm>
+          <a:prstGeom prst="rect">
+            <a:avLst/>
+          </a:prstGeom>
+          <a:solidFill>
+            <a:srgbClr val="1565C0"/>
+          </a:solidFill>
+          <a:ln/>
+        </p:spPr>
+      </p:sp>
+      <p:sp>
+        <p:nvSpPr>
+          <p:cNvPr id="9" name="Text 7"/>
+          <p:cNvSpPr/>
+          <p:nvPr/>
+        </p:nvSpPr>
+        <p:spPr>
+          <a:xfrm>
+            <a:off x="640080" y="1371600"/>
+            <a:ext cx="7863840" cy="475488"/>
+          </a:xfrm>
+          <a:prstGeom prst="rect">
+            <a:avLst/>
+          </a:prstGeom>
+          <a:noFill/>
+          <a:ln/>
+        </p:spPr>
+        <p:txBody>
+          <a:bodyPr wrap="square" lIns="0" tIns="0" rIns="0" bIns="0" rtlCol="0" anchor="ctr"/>
+          <a:lstStyle/>
+          <a:p>
+            <a:pPr indent="0" marL="0">
+              <a:buNone/>
+            </a:pPr>
+            <a:r>
+              <a:rPr lang="en-US" sz="1100" dirty="0">
+                <a:solidFill>
+                  <a:srgbClr val="1A1A2E"/>
+                </a:solidFill>
+                <a:latin typeface="Calibri" pitchFamily="34" charset="0"/>
+                <a:ea typeface="Calibri" pitchFamily="34" charset="-122"/>
+                <a:cs typeface="Calibri" pitchFamily="34" charset="-120"/>
+              </a:rPr>
+              <a:t>2. GRANT selon la matrice (admin, ingenieur, comptable, reception)</a:t>
+            </a:r>
+            <a:endParaRPr lang="en-US" sz="1100" dirty="0"/>
+          </a:p>
+        </p:txBody>
+      </p:sp>
+      <p:sp>
+        <p:nvSpPr>
+          <p:cNvPr id="10" name="Shape 8"/>
+          <p:cNvSpPr/>
+          <p:nvPr/>
+        </p:nvSpPr>
+        <p:spPr>
+          <a:xfrm>
+            <a:off x="457200" y="1874520"/>
+            <a:ext cx="8229600" cy="475488"/>
+          </a:xfrm>
+          <a:prstGeom prst="rect">
+            <a:avLst/>
+          </a:prstGeom>
+          <a:solidFill>
+            <a:srgbClr val="FFFFFF"/>
+          </a:solidFill>
+          <a:ln/>
+        </p:spPr>
+      </p:sp>
+      <p:sp>
+        <p:nvSpPr>
+          <p:cNvPr id="11" name="Shape 9"/>
+          <p:cNvSpPr/>
+          <p:nvPr/>
+        </p:nvSpPr>
+        <p:spPr>
+          <a:xfrm>
+            <a:off x="457200" y="1874520"/>
+            <a:ext cx="45720" cy="475488"/>
+          </a:xfrm>
+          <a:prstGeom prst="rect">
+            <a:avLst/>
+          </a:prstGeom>
+          <a:solidFill>
+            <a:srgbClr val="1565C0"/>
+          </a:solidFill>
+          <a:ln/>
+        </p:spPr>
+      </p:sp>
+      <p:sp>
+        <p:nvSpPr>
+          <p:cNvPr id="12" name="Text 10"/>
+          <p:cNvSpPr/>
+          <p:nvPr/>
+        </p:nvSpPr>
+        <p:spPr>
+          <a:xfrm>
+            <a:off x="640080" y="1874520"/>
+            <a:ext cx="7863840" cy="475488"/>
+          </a:xfrm>
+          <a:prstGeom prst="rect">
+            <a:avLst/>
+          </a:prstGeom>
+          <a:noFill/>
+          <a:ln/>
+        </p:spPr>
+        <p:txBody>
+          <a:bodyPr wrap="square" lIns="0" tIns="0" rIns="0" bIns="0" rtlCol="0" anchor="ctr"/>
+          <a:lstStyle/>
+          <a:p>
+            <a:pPr indent="0" marL="0">
+              <a:buNone/>
+            </a:pPr>
+            <a:r>
+              <a:rPr lang="en-US" sz="1100" dirty="0">
+                <a:solidFill>
+                  <a:srgbClr val="1A1A2E"/>
+                </a:solidFill>
+                <a:latin typeface="Calibri" pitchFamily="34" charset="0"/>
+                <a:ea typeface="Calibri" pitchFamily="34" charset="-122"/>
+                <a:cs typeface="Calibri" pitchFamily="34" charset="-120"/>
+              </a:rPr>
+              <a:t>3. Test : connexion ingenieur → DELETE artiste → erreur 1142 !</a:t>
+            </a:r>
+            <a:endParaRPr lang="en-US" sz="1100" dirty="0"/>
+          </a:p>
+        </p:txBody>
+      </p:sp>
+      <p:sp>
+        <p:nvSpPr>
+          <p:cNvPr id="13" name="Shape 11"/>
+          <p:cNvSpPr/>
+          <p:nvPr/>
+        </p:nvSpPr>
+        <p:spPr>
+          <a:xfrm>
+            <a:off x="457200" y="2377440"/>
+            <a:ext cx="8229600" cy="475488"/>
+          </a:xfrm>
+          <a:prstGeom prst="rect">
+            <a:avLst/>
+          </a:prstGeom>
+          <a:solidFill>
+            <a:srgbClr val="E3F2FD"/>
+          </a:solidFill>
+          <a:ln/>
+        </p:spPr>
+      </p:sp>
+      <p:sp>
+        <p:nvSpPr>
+          <p:cNvPr id="14" name="Shape 12"/>
+          <p:cNvSpPr/>
+          <p:nvPr/>
+        </p:nvSpPr>
+        <p:spPr>
+          <a:xfrm>
+            <a:off x="457200" y="2377440"/>
+            <a:ext cx="45720" cy="475488"/>
+          </a:xfrm>
+          <a:prstGeom prst="rect">
+            <a:avLst/>
+          </a:prstGeom>
+          <a:solidFill>
+            <a:srgbClr val="1565C0"/>
+          </a:solidFill>
+          <a:ln/>
+        </p:spPr>
+      </p:sp>
+      <p:sp>
+        <p:nvSpPr>
+          <p:cNvPr id="15" name="Text 13"/>
+          <p:cNvSpPr/>
+          <p:nvPr/>
+        </p:nvSpPr>
+        <p:spPr>
+          <a:xfrm>
+            <a:off x="640080" y="2377440"/>
+            <a:ext cx="7863840" cy="475488"/>
+          </a:xfrm>
+          <a:prstGeom prst="rect">
+            <a:avLst/>
+          </a:prstGeom>
+          <a:noFill/>
+          <a:ln/>
+        </p:spPr>
+        <p:txBody>
+          <a:bodyPr wrap="square" lIns="0" tIns="0" rIns="0" bIns="0" rtlCol="0" anchor="ctr"/>
+          <a:lstStyle/>
+          <a:p>
+            <a:pPr indent="0" marL="0">
+              <a:buNone/>
+            </a:pPr>
+            <a:r>
+              <a:rPr lang="en-US" sz="1100" dirty="0">
+                <a:solidFill>
+                  <a:srgbClr val="1A1A2E"/>
+                </a:solidFill>
+                <a:latin typeface="Calibri" pitchFamily="34" charset="0"/>
+                <a:ea typeface="Calibri" pitchFamily="34" charset="-122"/>
+                <a:cs typeface="Calibri" pitchFamily="34" charset="-120"/>
+              </a:rPr>
+              <a:t>4. Rediger politique RGPD SwissSound (1 page)</a:t>
+            </a:r>
+            <a:endParaRPr lang="en-US" sz="1100" dirty="0"/>
+          </a:p>
+        </p:txBody>
+      </p:sp>
+      <p:sp>
+        <p:nvSpPr>
+          <p:cNvPr id="16" name="Shape 14"/>
+          <p:cNvSpPr/>
+          <p:nvPr/>
+        </p:nvSpPr>
+        <p:spPr>
+          <a:xfrm>
+            <a:off x="457200" y="2880360"/>
+            <a:ext cx="8229600" cy="475488"/>
+          </a:xfrm>
+          <a:prstGeom prst="rect">
+            <a:avLst/>
+          </a:prstGeom>
+          <a:solidFill>
+            <a:srgbClr val="FFFFFF"/>
+          </a:solidFill>
+          <a:ln/>
+        </p:spPr>
+      </p:sp>
+      <p:sp>
+        <p:nvSpPr>
+          <p:cNvPr id="17" name="Shape 15"/>
+          <p:cNvSpPr/>
+          <p:nvPr/>
+        </p:nvSpPr>
+        <p:spPr>
+          <a:xfrm>
+            <a:off x="457200" y="2880360"/>
+            <a:ext cx="45720" cy="475488"/>
+          </a:xfrm>
+          <a:prstGeom prst="rect">
+            <a:avLst/>
+          </a:prstGeom>
+          <a:solidFill>
+            <a:srgbClr val="1565C0"/>
+          </a:solidFill>
+          <a:ln/>
+        </p:spPr>
+      </p:sp>
+      <p:sp>
+        <p:nvSpPr>
+          <p:cNvPr id="18" name="Text 16"/>
+          <p:cNvSpPr/>
+          <p:nvPr/>
+        </p:nvSpPr>
+        <p:spPr>
+          <a:xfrm>
+            <a:off x="640080" y="2880360"/>
+            <a:ext cx="7863840" cy="475488"/>
+          </a:xfrm>
+          <a:prstGeom prst="rect">
+            <a:avLst/>
+          </a:prstGeom>
+          <a:noFill/>
+          <a:ln/>
+        </p:spPr>
+        <p:txBody>
+          <a:bodyPr wrap="square" lIns="0" tIns="0" rIns="0" bIns="0" rtlCol="0" anchor="ctr"/>
+          <a:lstStyle/>
+          <a:p>
+            <a:pPr indent="0" marL="0">
+              <a:buNone/>
+            </a:pPr>
+            <a:r>
+              <a:rPr lang="en-US" sz="1100" dirty="0">
+                <a:solidFill>
+                  <a:srgbClr val="1A1A2E"/>
+                </a:solidFill>
+                <a:latin typeface="Calibri" pitchFamily="34" charset="0"/>
+                <a:ea typeface="Calibri" pitchFamily="34" charset="-122"/>
+                <a:cs typeface="Calibri" pitchFamily="34" charset="-120"/>
+              </a:rPr>
+              <a:t>5. Chiffrer les emails avec AES_ENCRYPT</a:t>
+            </a:r>
+            <a:endParaRPr lang="en-US" sz="1100" dirty="0"/>
+          </a:p>
+        </p:txBody>
+      </p:sp>
+      <p:sp>
+        <p:nvSpPr>
+          <p:cNvPr id="19" name="Shape 17"/>
+          <p:cNvSpPr/>
+          <p:nvPr/>
+        </p:nvSpPr>
+        <p:spPr>
+          <a:xfrm>
+            <a:off x="457200" y="3383280"/>
+            <a:ext cx="8229600" cy="475488"/>
+          </a:xfrm>
+          <a:prstGeom prst="rect">
+            <a:avLst/>
+          </a:prstGeom>
+          <a:solidFill>
+            <a:srgbClr val="E3F2FD"/>
+          </a:solidFill>
+          <a:ln/>
+        </p:spPr>
+      </p:sp>
+      <p:sp>
+        <p:nvSpPr>
+          <p:cNvPr id="20" name="Shape 18"/>
+          <p:cNvSpPr/>
+          <p:nvPr/>
+        </p:nvSpPr>
+        <p:spPr>
+          <a:xfrm>
+            <a:off x="457200" y="3383280"/>
+            <a:ext cx="45720" cy="475488"/>
+          </a:xfrm>
+          <a:prstGeom prst="rect">
+            <a:avLst/>
+          </a:prstGeom>
+          <a:solidFill>
+            <a:srgbClr val="1565C0"/>
+          </a:solidFill>
+          <a:ln/>
+        </p:spPr>
+      </p:sp>
+      <p:sp>
+        <p:nvSpPr>
+          <p:cNvPr id="21" name="Text 19"/>
+          <p:cNvSpPr/>
+          <p:nvPr/>
+        </p:nvSpPr>
+        <p:spPr>
+          <a:xfrm>
+            <a:off x="640080" y="3383280"/>
+            <a:ext cx="7863840" cy="475488"/>
+          </a:xfrm>
+          <a:prstGeom prst="rect">
+            <a:avLst/>
+          </a:prstGeom>
+          <a:noFill/>
+          <a:ln/>
+        </p:spPr>
+        <p:txBody>
+          <a:bodyPr wrap="square" lIns="0" tIns="0" rIns="0" bIns="0" rtlCol="0" anchor="ctr"/>
+          <a:lstStyle/>
+          <a:p>
+            <a:pPr indent="0" marL="0">
+              <a:buNone/>
+            </a:pPr>
+            <a:r>
+              <a:rPr lang="en-US" sz="1100" dirty="0">
+                <a:solidFill>
+                  <a:srgbClr val="1A1A2E"/>
+                </a:solidFill>
+                <a:latin typeface="Calibri" pitchFamily="34" charset="0"/>
+                <a:ea typeface="Calibri" pitchFamily="34" charset="-122"/>
+                <a:cs typeface="Calibri" pitchFamily="34" charset="-120"/>
+              </a:rPr>
+              <a:t>DEFI D2 : evaluation critique + 5 ameliorations argumentees</a:t>
+            </a:r>
+            <a:endParaRPr lang="en-US" sz="1100" dirty="0"/>
+          </a:p>
+        </p:txBody>
+      </p:sp>
+    </p:spTree>
+  </p:cSld>
+  <p:clrMapOvr>
+    <a:masterClrMapping/>
+  </p:clrMapOvr>
+</p:sld>
+</file>
+
+<file path=ppt/slides/slide8.xml><?xml version="1.0" encoding="utf-8"?>
+<p:sld xmlns:a="http://schemas.openxmlformats.org/drawingml/2006/main" xmlns:r="http://schemas.openxmlformats.org/officeDocument/2006/relationships" xmlns:p="http://schemas.openxmlformats.org/presentationml/2006/main">
+  <p:cSld name="Slide 8">
     <p:bg>
       <p:bgPr>
         <a:solidFill>
@@ -5203,8 +5691,8 @@
         </p:nvSpPr>
         <p:spPr>
           <a:xfrm>
-            <a:off x="3840480" y="457200"/>
-            <a:ext cx="1463040" cy="1097280"/>
+            <a:off x="457200" y="1828800"/>
+            <a:ext cx="8229600" cy="548640"/>
           </a:xfrm>
           <a:prstGeom prst="rect">
             <a:avLst/>
@@ -5220,43 +5708,7 @@
               <a:buNone/>
             </a:pPr>
             <a:r>
-              <a:rPr lang="en-US" sz="6000" dirty="0">
-                <a:solidFill>
-                  <a:srgbClr val="000000"/>
-                </a:solidFill>
-              </a:rPr>
-              <a:t>🎮</a:t>
-            </a:r>
-            <a:endParaRPr lang="en-US" sz="6000" dirty="0"/>
-          </a:p>
-        </p:txBody>
-      </p:sp>
-      <p:sp>
-        <p:nvSpPr>
-          <p:cNvPr id="3" name="Text 1"/>
-          <p:cNvSpPr/>
-          <p:nvPr/>
-        </p:nvSpPr>
-        <p:spPr>
-          <a:xfrm>
-            <a:off x="457200" y="1645920"/>
-            <a:ext cx="8229600" cy="548640"/>
-          </a:xfrm>
-          <a:prstGeom prst="rect">
-            <a:avLst/>
-          </a:prstGeom>
-          <a:noFill/>
-          <a:ln/>
-        </p:spPr>
-        <p:txBody>
-          <a:bodyPr wrap="square" lIns="0" tIns="0" rIns="0" bIns="0" rtlCol="0" anchor="ctr"/>
-          <a:lstStyle/>
-          <a:p>
-            <a:pPr algn="ctr" indent="0" marL="0">
-              <a:buNone/>
-            </a:pPr>
-            <a:r>
-              <a:rPr lang="en-US" sz="2600" b="1" dirty="0">
+              <a:rPr lang="en-US" sz="2400" b="1" dirty="0">
                 <a:solidFill>
                   <a:srgbClr val="FFFFFF"/>
                 </a:solidFill>
@@ -5266,20 +5718,20 @@
               </a:rPr>
               <a:t>Mini-jeu : Le Coffre-Fort</a:t>
             </a:r>
-            <a:endParaRPr lang="en-US" sz="2600" dirty="0"/>
-          </a:p>
-        </p:txBody>
-      </p:sp>
-      <p:sp>
-        <p:nvSpPr>
-          <p:cNvPr id="4" name="Text 2"/>
-          <p:cNvSpPr/>
-          <p:nvPr/>
-        </p:nvSpPr>
-        <p:spPr>
-          <a:xfrm>
-            <a:off x="1371600" y="2286000"/>
-            <a:ext cx="6400800" cy="731520"/>
+            <a:endParaRPr lang="en-US" sz="2400" dirty="0"/>
+          </a:p>
+        </p:txBody>
+      </p:sp>
+      <p:sp>
+        <p:nvSpPr>
+          <p:cNvPr id="3" name="Text 1"/>
+          <p:cNvSpPr/>
+          <p:nvPr/>
+        </p:nvSpPr>
+        <p:spPr>
+          <a:xfrm>
+            <a:off x="1371600" y="2468880"/>
+            <a:ext cx="6400800" cy="640080"/>
           </a:xfrm>
           <a:prstGeom prst="rect">
             <a:avLst/>
@@ -5295,7 +5747,7 @@
               <a:buNone/>
             </a:pPr>
             <a:r>
-              <a:rPr lang="en-US" sz="1400" dirty="0">
+              <a:rPr lang="en-US" sz="1300" dirty="0">
                 <a:solidFill>
                   <a:srgbClr val="CCCCCC"/>
                 </a:solidFill>
@@ -5303,68 +5755,9 @@
                 <a:ea typeface="Calibri" pitchFamily="34" charset="-122"/>
                 <a:cs typeface="Calibri" pitchFamily="34" charset="-120"/>
               </a:rPr>
-              <a:t>Donnez les bons GRANT sans créer de faille !</a:t>
-            </a:r>
-            <a:endParaRPr lang="en-US" sz="1400" dirty="0"/>
-          </a:p>
-        </p:txBody>
-      </p:sp>
-      <p:sp>
-        <p:nvSpPr>
-          <p:cNvPr id="5" name="Shape 3"/>
-          <p:cNvSpPr/>
-          <p:nvPr/>
-        </p:nvSpPr>
-        <p:spPr>
-          <a:xfrm>
-            <a:off x="2286000" y="3291840"/>
-            <a:ext cx="4572000" cy="548640"/>
-          </a:xfrm>
-          <a:prstGeom prst="rect">
-            <a:avLst/>
-          </a:prstGeom>
-          <a:solidFill>
-            <a:srgbClr val="FF6F00"/>
-          </a:solidFill>
-          <a:ln/>
-        </p:spPr>
-      </p:sp>
-      <p:sp>
-        <p:nvSpPr>
-          <p:cNvPr id="6" name="Text 4"/>
-          <p:cNvSpPr/>
-          <p:nvPr/>
-        </p:nvSpPr>
-        <p:spPr>
-          <a:xfrm>
-            <a:off x="2286000" y="3291840"/>
-            <a:ext cx="4572000" cy="548640"/>
-          </a:xfrm>
-          <a:prstGeom prst="rect">
-            <a:avLst/>
-          </a:prstGeom>
-          <a:noFill/>
-          <a:ln/>
-        </p:spPr>
-        <p:txBody>
-          <a:bodyPr wrap="square" lIns="0" tIns="0" rIns="0" bIns="0" rtlCol="0" anchor="ctr"/>
-          <a:lstStyle/>
-          <a:p>
-            <a:pPr algn="ctr" indent="0" marL="0">
-              <a:buNone/>
-            </a:pPr>
-            <a:r>
-              <a:rPr lang="en-US" sz="1800" b="1" dirty="0">
-                <a:solidFill>
-                  <a:srgbClr val="FFFFFF"/>
-                </a:solidFill>
-                <a:latin typeface="Trebuchet MS" pitchFamily="34" charset="0"/>
-                <a:ea typeface="Trebuchet MS" pitchFamily="34" charset="-122"/>
-                <a:cs typeface="Trebuchet MS" pitchFamily="34" charset="-120"/>
-              </a:rPr>
-              <a:t>▶  Lancer le jeu</a:t>
-            </a:r>
-            <a:endParaRPr lang="en-US" sz="1800" dirty="0"/>
+              <a:t>Donnez les bons GRANT sans creer de faille</a:t>
+            </a:r>
+            <a:endParaRPr lang="en-US" sz="1300" dirty="0"/>
           </a:p>
         </p:txBody>
       </p:sp>
@@ -5376,9 +5769,9 @@
 </p:sld>
 </file>
 
-<file path=ppt/slides/slide8.xml><?xml version="1.0" encoding="utf-8"?>
+<file path=ppt/slides/slide9.xml><?xml version="1.0" encoding="utf-8"?>
 <p:sld xmlns:a="http://schemas.openxmlformats.org/drawingml/2006/main" xmlns:r="http://schemas.openxmlformats.org/officeDocument/2006/relationships" xmlns:p="http://schemas.openxmlformats.org/presentationml/2006/main">
-  <p:cSld name="Slide 8">
+  <p:cSld name="Slide 9">
     <p:bg>
       <p:bgPr>
         <a:solidFill>
@@ -5409,7 +5802,7 @@
         <p:spPr>
           <a:xfrm>
             <a:off x="457200" y="137160"/>
-            <a:ext cx="5486400" cy="411480"/>
+            <a:ext cx="5486400" cy="365760"/>
           </a:xfrm>
           <a:prstGeom prst="rect">
             <a:avLst/>
@@ -5425,7 +5818,7 @@
               <a:buNone/>
             </a:pPr>
             <a:r>
-              <a:rPr lang="en-US" sz="1800" b="1" dirty="0">
+              <a:rPr lang="en-US" sz="1600" b="1" dirty="0">
                 <a:solidFill>
                   <a:srgbClr val="0D47A1"/>
                 </a:solidFill>
@@ -5433,9 +5826,9 @@
                 <a:ea typeface="Trebuchet MS" pitchFamily="34" charset="-122"/>
                 <a:cs typeface="Trebuchet MS" pitchFamily="34" charset="-120"/>
               </a:rPr>
-              <a:t>📋 Mémo Module 16</a:t>
-            </a:r>
-            <a:endParaRPr lang="en-US" sz="1800" dirty="0"/>
+              <a:t>Memo Module 16</a:t>
+            </a:r>
+            <a:endParaRPr lang="en-US" sz="1600" dirty="0"/>
           </a:p>
         </p:txBody>
       </p:sp>
@@ -5447,14 +5840,14 @@
         </p:nvSpPr>
         <p:spPr>
           <a:xfrm>
-            <a:off x="457200" y="548640"/>
-            <a:ext cx="8229600" cy="274320"/>
-          </a:xfrm>
-          <a:prstGeom prst="rect">
-            <a:avLst/>
-          </a:prstGeom>
-          <a:solidFill>
-            <a:srgbClr val="FFF3E0"/>
+            <a:off x="457200" y="640080"/>
+            <a:ext cx="2286000" cy="429768"/>
+          </a:xfrm>
+          <a:prstGeom prst="rect">
+            <a:avLst/>
+          </a:prstGeom>
+          <a:solidFill>
+            <a:srgbClr val="E3F2FD"/>
           </a:solidFill>
           <a:ln/>
         </p:spPr>
@@ -5467,67 +5860,8 @@
         </p:nvSpPr>
         <p:spPr>
           <a:xfrm>
-            <a:off x="640080" y="548640"/>
-            <a:ext cx="7772400" cy="274320"/>
-          </a:xfrm>
-          <a:prstGeom prst="rect">
-            <a:avLst/>
-          </a:prstGeom>
-          <a:noFill/>
-          <a:ln/>
-        </p:spPr>
-        <p:txBody>
-          <a:bodyPr wrap="square" lIns="0" tIns="0" rIns="0" bIns="0" rtlCol="0" anchor="ctr"/>
-          <a:lstStyle/>
-          <a:p>
-            <a:pPr indent="0" marL="0">
-              <a:buNone/>
-            </a:pPr>
-            <a:r>
-              <a:rPr lang="en-US" sz="900" b="1" dirty="0">
-                <a:solidFill>
-                  <a:srgbClr val="E65100"/>
-                </a:solidFill>
-                <a:latin typeface="Calibri" pitchFamily="34" charset="0"/>
-                <a:ea typeface="Calibri" pitchFamily="34" charset="-122"/>
-                <a:cs typeface="Calibri" pitchFamily="34" charset="-120"/>
-              </a:rPr>
-              <a:t>🔒 Déblocable après complétion</a:t>
-            </a:r>
-            <a:endParaRPr lang="en-US" sz="900" dirty="0"/>
-          </a:p>
-        </p:txBody>
-      </p:sp>
-      <p:sp>
-        <p:nvSpPr>
-          <p:cNvPr id="5" name="Shape 3"/>
-          <p:cNvSpPr/>
-          <p:nvPr/>
-        </p:nvSpPr>
-        <p:spPr>
-          <a:xfrm>
-            <a:off x="457200" y="960120"/>
-            <a:ext cx="2286000" cy="475488"/>
-          </a:xfrm>
-          <a:prstGeom prst="rect">
-            <a:avLst/>
-          </a:prstGeom>
-          <a:solidFill>
-            <a:srgbClr val="E3F2FD"/>
-          </a:solidFill>
-          <a:ln/>
-        </p:spPr>
-      </p:sp>
-      <p:sp>
-        <p:nvSpPr>
-          <p:cNvPr id="6" name="Text 4"/>
-          <p:cNvSpPr/>
-          <p:nvPr/>
-        </p:nvSpPr>
-        <p:spPr>
-          <a:xfrm>
-            <a:off x="548640" y="960120"/>
-            <a:ext cx="2103120" cy="475488"/>
+            <a:off x="548640" y="640080"/>
+            <a:ext cx="2103120" cy="429768"/>
           </a:xfrm>
           <a:prstGeom prst="rect">
             <a:avLst/>
@@ -5559,14 +5893,14 @@
       </p:sp>
       <p:sp>
         <p:nvSpPr>
-          <p:cNvPr id="7" name="Shape 5"/>
-          <p:cNvSpPr/>
-          <p:nvPr/>
-        </p:nvSpPr>
-        <p:spPr>
-          <a:xfrm>
-            <a:off x="2743200" y="960120"/>
-            <a:ext cx="5943600" cy="475488"/>
+          <p:cNvPr id="5" name="Shape 3"/>
+          <p:cNvSpPr/>
+          <p:nvPr/>
+        </p:nvSpPr>
+        <p:spPr>
+          <a:xfrm>
+            <a:off x="2743200" y="640080"/>
+            <a:ext cx="5943600" cy="429768"/>
           </a:xfrm>
           <a:prstGeom prst="rect">
             <a:avLst/>
@@ -5579,14 +5913,14 @@
       </p:sp>
       <p:sp>
         <p:nvSpPr>
-          <p:cNvPr id="8" name="Text 6"/>
-          <p:cNvSpPr/>
-          <p:nvPr/>
-        </p:nvSpPr>
-        <p:spPr>
-          <a:xfrm>
-            <a:off x="2834640" y="960120"/>
-            <a:ext cx="5760720" cy="475488"/>
+          <p:cNvPr id="6" name="Text 4"/>
+          <p:cNvSpPr/>
+          <p:nvPr/>
+        </p:nvSpPr>
+        <p:spPr>
+          <a:xfrm>
+            <a:off x="2834640" y="640080"/>
+            <a:ext cx="5760720" cy="429768"/>
           </a:xfrm>
           <a:prstGeom prst="rect">
             <a:avLst/>
@@ -5610,7 +5944,7 @@
                 <a:ea typeface="Calibri" pitchFamily="34" charset="-122"/>
                 <a:cs typeface="Calibri" pitchFamily="34" charset="-120"/>
               </a:rPr>
-              <a:t>'nom'@'localhost' IDENTIFIED BY 'motdepasse'</a:t>
+              <a:t>nom@localhost IDENTIFIED BY 'motdepasse'</a:t>
             </a:r>
             <a:endParaRPr lang="en-US" sz="900" dirty="0"/>
           </a:p>
@@ -5618,14 +5952,14 @@
       </p:sp>
       <p:sp>
         <p:nvSpPr>
-          <p:cNvPr id="9" name="Shape 7"/>
-          <p:cNvSpPr/>
-          <p:nvPr/>
-        </p:nvSpPr>
-        <p:spPr>
-          <a:xfrm>
-            <a:off x="457200" y="1463040"/>
-            <a:ext cx="2286000" cy="475488"/>
+          <p:cNvPr id="7" name="Shape 5"/>
+          <p:cNvSpPr/>
+          <p:nvPr/>
+        </p:nvSpPr>
+        <p:spPr>
+          <a:xfrm>
+            <a:off x="457200" y="1097280"/>
+            <a:ext cx="2286000" cy="429768"/>
           </a:xfrm>
           <a:prstGeom prst="rect">
             <a:avLst/>
@@ -5638,14 +5972,14 @@
       </p:sp>
       <p:sp>
         <p:nvSpPr>
-          <p:cNvPr id="10" name="Text 8"/>
-          <p:cNvSpPr/>
-          <p:nvPr/>
-        </p:nvSpPr>
-        <p:spPr>
-          <a:xfrm>
-            <a:off x="548640" y="1463040"/>
-            <a:ext cx="2103120" cy="475488"/>
+          <p:cNvPr id="8" name="Text 6"/>
+          <p:cNvSpPr/>
+          <p:nvPr/>
+        </p:nvSpPr>
+        <p:spPr>
+          <a:xfrm>
+            <a:off x="548640" y="1097280"/>
+            <a:ext cx="2103120" cy="429768"/>
           </a:xfrm>
           <a:prstGeom prst="rect">
             <a:avLst/>
@@ -5677,14 +6011,14 @@
       </p:sp>
       <p:sp>
         <p:nvSpPr>
-          <p:cNvPr id="11" name="Shape 9"/>
-          <p:cNvSpPr/>
-          <p:nvPr/>
-        </p:nvSpPr>
-        <p:spPr>
-          <a:xfrm>
-            <a:off x="2743200" y="1463040"/>
-            <a:ext cx="5943600" cy="475488"/>
+          <p:cNvPr id="9" name="Shape 7"/>
+          <p:cNvSpPr/>
+          <p:nvPr/>
+        </p:nvSpPr>
+        <p:spPr>
+          <a:xfrm>
+            <a:off x="2743200" y="1097280"/>
+            <a:ext cx="5943600" cy="429768"/>
           </a:xfrm>
           <a:prstGeom prst="rect">
             <a:avLst/>
@@ -5697,14 +6031,14 @@
       </p:sp>
       <p:sp>
         <p:nvSpPr>
-          <p:cNvPr id="12" name="Text 10"/>
-          <p:cNvSpPr/>
-          <p:nvPr/>
-        </p:nvSpPr>
-        <p:spPr>
-          <a:xfrm>
-            <a:off x="2834640" y="1463040"/>
-            <a:ext cx="5760720" cy="475488"/>
+          <p:cNvPr id="10" name="Text 8"/>
+          <p:cNvSpPr/>
+          <p:nvPr/>
+        </p:nvSpPr>
+        <p:spPr>
+          <a:xfrm>
+            <a:off x="2834640" y="1097280"/>
+            <a:ext cx="5760720" cy="429768"/>
           </a:xfrm>
           <a:prstGeom prst="rect">
             <a:avLst/>
@@ -5728,7 +6062,7 @@
                 <a:ea typeface="Calibri" pitchFamily="34" charset="-122"/>
                 <a:cs typeface="Calibri" pitchFamily="34" charset="-120"/>
               </a:rPr>
-              <a:t>Donner des droits : GRANT SELECT ON table TO user</a:t>
+              <a:t>Donner des droits sur une table</a:t>
             </a:r>
             <a:endParaRPr lang="en-US" sz="900" dirty="0"/>
           </a:p>
@@ -5736,14 +6070,14 @@
       </p:sp>
       <p:sp>
         <p:nvSpPr>
-          <p:cNvPr id="13" name="Shape 11"/>
-          <p:cNvSpPr/>
-          <p:nvPr/>
-        </p:nvSpPr>
-        <p:spPr>
-          <a:xfrm>
-            <a:off x="457200" y="1965960"/>
-            <a:ext cx="2286000" cy="475488"/>
+          <p:cNvPr id="11" name="Shape 9"/>
+          <p:cNvSpPr/>
+          <p:nvPr/>
+        </p:nvSpPr>
+        <p:spPr>
+          <a:xfrm>
+            <a:off x="457200" y="1554480"/>
+            <a:ext cx="2286000" cy="429768"/>
           </a:xfrm>
           <a:prstGeom prst="rect">
             <a:avLst/>
@@ -5756,14 +6090,14 @@
       </p:sp>
       <p:sp>
         <p:nvSpPr>
-          <p:cNvPr id="14" name="Text 12"/>
-          <p:cNvSpPr/>
-          <p:nvPr/>
-        </p:nvSpPr>
-        <p:spPr>
-          <a:xfrm>
-            <a:off x="548640" y="1965960"/>
-            <a:ext cx="2103120" cy="475488"/>
+          <p:cNvPr id="12" name="Text 10"/>
+          <p:cNvSpPr/>
+          <p:nvPr/>
+        </p:nvSpPr>
+        <p:spPr>
+          <a:xfrm>
+            <a:off x="548640" y="1554480"/>
+            <a:ext cx="2103120" cy="429768"/>
           </a:xfrm>
           <a:prstGeom prst="rect">
             <a:avLst/>
@@ -5795,14 +6129,14 @@
       </p:sp>
       <p:sp>
         <p:nvSpPr>
-          <p:cNvPr id="15" name="Shape 13"/>
-          <p:cNvSpPr/>
-          <p:nvPr/>
-        </p:nvSpPr>
-        <p:spPr>
-          <a:xfrm>
-            <a:off x="2743200" y="1965960"/>
-            <a:ext cx="5943600" cy="475488"/>
+          <p:cNvPr id="13" name="Shape 11"/>
+          <p:cNvSpPr/>
+          <p:nvPr/>
+        </p:nvSpPr>
+        <p:spPr>
+          <a:xfrm>
+            <a:off x="2743200" y="1554480"/>
+            <a:ext cx="5943600" cy="429768"/>
           </a:xfrm>
           <a:prstGeom prst="rect">
             <a:avLst/>
@@ -5815,14 +6149,14 @@
       </p:sp>
       <p:sp>
         <p:nvSpPr>
-          <p:cNvPr id="16" name="Text 14"/>
-          <p:cNvSpPr/>
-          <p:nvPr/>
-        </p:nvSpPr>
-        <p:spPr>
-          <a:xfrm>
-            <a:off x="2834640" y="1965960"/>
-            <a:ext cx="5760720" cy="475488"/>
+          <p:cNvPr id="14" name="Text 12"/>
+          <p:cNvSpPr/>
+          <p:nvPr/>
+        </p:nvSpPr>
+        <p:spPr>
+          <a:xfrm>
+            <a:off x="2834640" y="1554480"/>
+            <a:ext cx="5760720" cy="429768"/>
           </a:xfrm>
           <a:prstGeom prst="rect">
             <a:avLst/>
@@ -5846,7 +6180,7 @@
                 <a:ea typeface="Calibri" pitchFamily="34" charset="-122"/>
                 <a:cs typeface="Calibri" pitchFamily="34" charset="-120"/>
               </a:rPr>
-              <a:t>Retirer des droits : REVOKE INSERT ON table FROM user</a:t>
+              <a:t>Retirer des droits</a:t>
             </a:r>
             <a:endParaRPr lang="en-US" sz="900" dirty="0"/>
           </a:p>
@@ -5854,14 +6188,14 @@
       </p:sp>
       <p:sp>
         <p:nvSpPr>
-          <p:cNvPr id="17" name="Shape 15"/>
-          <p:cNvSpPr/>
-          <p:nvPr/>
-        </p:nvSpPr>
-        <p:spPr>
-          <a:xfrm>
-            <a:off x="457200" y="2468880"/>
-            <a:ext cx="2286000" cy="475488"/>
+          <p:cNvPr id="15" name="Shape 13"/>
+          <p:cNvSpPr/>
+          <p:nvPr/>
+        </p:nvSpPr>
+        <p:spPr>
+          <a:xfrm>
+            <a:off x="457200" y="2011680"/>
+            <a:ext cx="2286000" cy="429768"/>
           </a:xfrm>
           <a:prstGeom prst="rect">
             <a:avLst/>
@@ -5874,14 +6208,14 @@
       </p:sp>
       <p:sp>
         <p:nvSpPr>
-          <p:cNvPr id="18" name="Text 16"/>
-          <p:cNvSpPr/>
-          <p:nvPr/>
-        </p:nvSpPr>
-        <p:spPr>
-          <a:xfrm>
-            <a:off x="548640" y="2468880"/>
-            <a:ext cx="2103120" cy="475488"/>
+          <p:cNvPr id="16" name="Text 14"/>
+          <p:cNvSpPr/>
+          <p:nvPr/>
+        </p:nvSpPr>
+        <p:spPr>
+          <a:xfrm>
+            <a:off x="548640" y="2011680"/>
+            <a:ext cx="2103120" cy="429768"/>
           </a:xfrm>
           <a:prstGeom prst="rect">
             <a:avLst/>
@@ -5905,7 +6239,7 @@
                 <a:ea typeface="Trebuchet MS" pitchFamily="34" charset="-122"/>
                 <a:cs typeface="Trebuchet MS" pitchFamily="34" charset="-120"/>
               </a:rPr>
-              <a:t>Moindre privilège</a:t>
+              <a:t>Moindre privilege</a:t>
             </a:r>
             <a:endParaRPr lang="en-US" sz="900" dirty="0"/>
           </a:p>
@@ -5913,14 +6247,14 @@
       </p:sp>
       <p:sp>
         <p:nvSpPr>
-          <p:cNvPr id="19" name="Shape 17"/>
-          <p:cNvSpPr/>
-          <p:nvPr/>
-        </p:nvSpPr>
-        <p:spPr>
-          <a:xfrm>
-            <a:off x="2743200" y="2468880"/>
-            <a:ext cx="5943600" cy="475488"/>
+          <p:cNvPr id="17" name="Shape 15"/>
+          <p:cNvSpPr/>
+          <p:nvPr/>
+        </p:nvSpPr>
+        <p:spPr>
+          <a:xfrm>
+            <a:off x="2743200" y="2011680"/>
+            <a:ext cx="5943600" cy="429768"/>
           </a:xfrm>
           <a:prstGeom prst="rect">
             <a:avLst/>
@@ -5933,14 +6267,14 @@
       </p:sp>
       <p:sp>
         <p:nvSpPr>
-          <p:cNvPr id="20" name="Text 18"/>
-          <p:cNvSpPr/>
-          <p:nvPr/>
-        </p:nvSpPr>
-        <p:spPr>
-          <a:xfrm>
-            <a:off x="2834640" y="2468880"/>
-            <a:ext cx="5760720" cy="475488"/>
+          <p:cNvPr id="18" name="Text 16"/>
+          <p:cNvSpPr/>
+          <p:nvPr/>
+        </p:nvSpPr>
+        <p:spPr>
+          <a:xfrm>
+            <a:off x="2834640" y="2011680"/>
+            <a:ext cx="5760720" cy="429768"/>
           </a:xfrm>
           <a:prstGeom prst="rect">
             <a:avLst/>
@@ -5964,7 +6298,7 @@
                 <a:ea typeface="Calibri" pitchFamily="34" charset="-122"/>
                 <a:cs typeface="Calibri" pitchFamily="34" charset="-120"/>
               </a:rPr>
-              <a:t>Uniquement les droits STRICTEMENT nécessaires</a:t>
+              <a:t>Minimum strictement necessaire</a:t>
             </a:r>
             <a:endParaRPr lang="en-US" sz="900" dirty="0"/>
           </a:p>
@@ -5972,14 +6306,14 @@
       </p:sp>
       <p:sp>
         <p:nvSpPr>
-          <p:cNvPr id="21" name="Shape 19"/>
-          <p:cNvSpPr/>
-          <p:nvPr/>
-        </p:nvSpPr>
-        <p:spPr>
-          <a:xfrm>
-            <a:off x="457200" y="2971800"/>
-            <a:ext cx="2286000" cy="475488"/>
+          <p:cNvPr id="19" name="Shape 17"/>
+          <p:cNvSpPr/>
+          <p:nvPr/>
+        </p:nvSpPr>
+        <p:spPr>
+          <a:xfrm>
+            <a:off x="457200" y="2468880"/>
+            <a:ext cx="2286000" cy="429768"/>
           </a:xfrm>
           <a:prstGeom prst="rect">
             <a:avLst/>
@@ -5992,14 +6326,14 @@
       </p:sp>
       <p:sp>
         <p:nvSpPr>
-          <p:cNvPr id="22" name="Text 20"/>
-          <p:cNvSpPr/>
-          <p:nvPr/>
-        </p:nvSpPr>
-        <p:spPr>
-          <a:xfrm>
-            <a:off x="548640" y="2971800"/>
-            <a:ext cx="2103120" cy="475488"/>
+          <p:cNvPr id="20" name="Text 18"/>
+          <p:cNvSpPr/>
+          <p:nvPr/>
+        </p:nvSpPr>
+        <p:spPr>
+          <a:xfrm>
+            <a:off x="548640" y="2468880"/>
+            <a:ext cx="2103120" cy="429768"/>
           </a:xfrm>
           <a:prstGeom prst="rect">
             <a:avLst/>
@@ -6023,7 +6357,7 @@
                 <a:ea typeface="Trebuchet MS" pitchFamily="34" charset="-122"/>
                 <a:cs typeface="Trebuchet MS" pitchFamily="34" charset="-120"/>
               </a:rPr>
-              <a:t>RGPD</a:t>
+              <a:t>RGPD/LPD</a:t>
             </a:r>
             <a:endParaRPr lang="en-US" sz="900" dirty="0"/>
           </a:p>
@@ -6031,14 +6365,14 @@
       </p:sp>
       <p:sp>
         <p:nvSpPr>
-          <p:cNvPr id="23" name="Shape 21"/>
-          <p:cNvSpPr/>
-          <p:nvPr/>
-        </p:nvSpPr>
-        <p:spPr>
-          <a:xfrm>
-            <a:off x="2743200" y="2971800"/>
-            <a:ext cx="5943600" cy="475488"/>
+          <p:cNvPr id="21" name="Shape 19"/>
+          <p:cNvSpPr/>
+          <p:nvPr/>
+        </p:nvSpPr>
+        <p:spPr>
+          <a:xfrm>
+            <a:off x="2743200" y="2468880"/>
+            <a:ext cx="5943600" cy="429768"/>
           </a:xfrm>
           <a:prstGeom prst="rect">
             <a:avLst/>
@@ -6051,14 +6385,14 @@
       </p:sp>
       <p:sp>
         <p:nvSpPr>
-          <p:cNvPr id="24" name="Text 22"/>
-          <p:cNvSpPr/>
-          <p:nvPr/>
-        </p:nvSpPr>
-        <p:spPr>
-          <a:xfrm>
-            <a:off x="2834640" y="2971800"/>
-            <a:ext cx="5760720" cy="475488"/>
+          <p:cNvPr id="22" name="Text 20"/>
+          <p:cNvSpPr/>
+          <p:nvPr/>
+        </p:nvSpPr>
+        <p:spPr>
+          <a:xfrm>
+            <a:off x="2834640" y="2468880"/>
+            <a:ext cx="5760720" cy="429768"/>
           </a:xfrm>
           <a:prstGeom prst="rect">
             <a:avLst/>
@@ -6082,7 +6416,7 @@
                 <a:ea typeface="Calibri" pitchFamily="34" charset="-122"/>
                 <a:cs typeface="Calibri" pitchFamily="34" charset="-120"/>
               </a:rPr>
-              <a:t>Données personnelles : consentement, minimisation, droit à l'oubli</a:t>
+              <a:t>Consentement, minimisation, droit oubli</a:t>
             </a:r>
             <a:endParaRPr lang="en-US" sz="900" dirty="0"/>
           </a:p>
@@ -6090,14 +6424,14 @@
       </p:sp>
       <p:sp>
         <p:nvSpPr>
-          <p:cNvPr id="25" name="Shape 23"/>
-          <p:cNvSpPr/>
-          <p:nvPr/>
-        </p:nvSpPr>
-        <p:spPr>
-          <a:xfrm>
-            <a:off x="457200" y="3474720"/>
-            <a:ext cx="2286000" cy="475488"/>
+          <p:cNvPr id="23" name="Shape 21"/>
+          <p:cNvSpPr/>
+          <p:nvPr/>
+        </p:nvSpPr>
+        <p:spPr>
+          <a:xfrm>
+            <a:off x="457200" y="2926080"/>
+            <a:ext cx="2286000" cy="429768"/>
           </a:xfrm>
           <a:prstGeom prst="rect">
             <a:avLst/>
@@ -6110,14 +6444,14 @@
       </p:sp>
       <p:sp>
         <p:nvSpPr>
-          <p:cNvPr id="26" name="Text 24"/>
-          <p:cNvSpPr/>
-          <p:nvPr/>
-        </p:nvSpPr>
-        <p:spPr>
-          <a:xfrm>
-            <a:off x="548640" y="3474720"/>
-            <a:ext cx="2103120" cy="475488"/>
+          <p:cNvPr id="24" name="Text 22"/>
+          <p:cNvSpPr/>
+          <p:nvPr/>
+        </p:nvSpPr>
+        <p:spPr>
+          <a:xfrm>
+            <a:off x="548640" y="2926080"/>
+            <a:ext cx="2103120" cy="429768"/>
           </a:xfrm>
           <a:prstGeom prst="rect">
             <a:avLst/>
@@ -6149,14 +6483,14 @@
       </p:sp>
       <p:sp>
         <p:nvSpPr>
-          <p:cNvPr id="27" name="Shape 25"/>
-          <p:cNvSpPr/>
-          <p:nvPr/>
-        </p:nvSpPr>
-        <p:spPr>
-          <a:xfrm>
-            <a:off x="2743200" y="3474720"/>
-            <a:ext cx="5943600" cy="475488"/>
+          <p:cNvPr id="25" name="Shape 23"/>
+          <p:cNvSpPr/>
+          <p:nvPr/>
+        </p:nvSpPr>
+        <p:spPr>
+          <a:xfrm>
+            <a:off x="2743200" y="2926080"/>
+            <a:ext cx="5943600" cy="429768"/>
           </a:xfrm>
           <a:prstGeom prst="rect">
             <a:avLst/>
@@ -6169,14 +6503,14 @@
       </p:sp>
       <p:sp>
         <p:nvSpPr>
-          <p:cNvPr id="28" name="Text 26"/>
-          <p:cNvSpPr/>
-          <p:nvPr/>
-        </p:nvSpPr>
-        <p:spPr>
-          <a:xfrm>
-            <a:off x="2834640" y="3474720"/>
-            <a:ext cx="5760720" cy="475488"/>
+          <p:cNvPr id="26" name="Text 24"/>
+          <p:cNvSpPr/>
+          <p:nvPr/>
+        </p:nvSpPr>
+        <p:spPr>
+          <a:xfrm>
+            <a:off x="2834640" y="2926080"/>
+            <a:ext cx="5760720" cy="429768"/>
           </a:xfrm>
           <a:prstGeom prst="rect">
             <a:avLst/>
@@ -6200,7 +6534,7 @@
                 <a:ea typeface="Calibri" pitchFamily="34" charset="-122"/>
                 <a:cs typeface="Calibri" pitchFamily="34" charset="-120"/>
               </a:rPr>
-              <a:t>ENCRYPT/DECRYPT : chiffrement réversible pour données sensibles</a:t>
+              <a:t>Chiffrement reversible (donnees)</a:t>
             </a:r>
             <a:endParaRPr lang="en-US" sz="900" dirty="0"/>
           </a:p>
@@ -6208,14 +6542,14 @@
       </p:sp>
       <p:sp>
         <p:nvSpPr>
-          <p:cNvPr id="29" name="Shape 27"/>
-          <p:cNvSpPr/>
-          <p:nvPr/>
-        </p:nvSpPr>
-        <p:spPr>
-          <a:xfrm>
-            <a:off x="457200" y="3977640"/>
-            <a:ext cx="2286000" cy="475488"/>
+          <p:cNvPr id="27" name="Shape 25"/>
+          <p:cNvSpPr/>
+          <p:nvPr/>
+        </p:nvSpPr>
+        <p:spPr>
+          <a:xfrm>
+            <a:off x="457200" y="3383280"/>
+            <a:ext cx="2286000" cy="429768"/>
           </a:xfrm>
           <a:prstGeom prst="rect">
             <a:avLst/>
@@ -6228,14 +6562,14 @@
       </p:sp>
       <p:sp>
         <p:nvSpPr>
-          <p:cNvPr id="30" name="Text 28"/>
-          <p:cNvSpPr/>
-          <p:nvPr/>
-        </p:nvSpPr>
-        <p:spPr>
-          <a:xfrm>
-            <a:off x="548640" y="3977640"/>
-            <a:ext cx="2103120" cy="475488"/>
+          <p:cNvPr id="28" name="Text 26"/>
+          <p:cNvSpPr/>
+          <p:nvPr/>
+        </p:nvSpPr>
+        <p:spPr>
+          <a:xfrm>
+            <a:off x="548640" y="3383280"/>
+            <a:ext cx="2103120" cy="429768"/>
           </a:xfrm>
           <a:prstGeom prst="rect">
             <a:avLst/>
@@ -6259,7 +6593,7 @@
                 <a:ea typeface="Trebuchet MS" pitchFamily="34" charset="-122"/>
                 <a:cs typeface="Trebuchet MS" pitchFamily="34" charset="-120"/>
               </a:rPr>
-              <a:t>SHA2</a:t>
+              <a:t>SHA2/bcrypt</a:t>
             </a:r>
             <a:endParaRPr lang="en-US" sz="900" dirty="0"/>
           </a:p>
@@ -6267,14 +6601,14 @@
       </p:sp>
       <p:sp>
         <p:nvSpPr>
-          <p:cNvPr id="31" name="Shape 29"/>
-          <p:cNvSpPr/>
-          <p:nvPr/>
-        </p:nvSpPr>
-        <p:spPr>
-          <a:xfrm>
-            <a:off x="2743200" y="3977640"/>
-            <a:ext cx="5943600" cy="475488"/>
+          <p:cNvPr id="29" name="Shape 27"/>
+          <p:cNvSpPr/>
+          <p:nvPr/>
+        </p:nvSpPr>
+        <p:spPr>
+          <a:xfrm>
+            <a:off x="2743200" y="3383280"/>
+            <a:ext cx="5943600" cy="429768"/>
           </a:xfrm>
           <a:prstGeom prst="rect">
             <a:avLst/>
@@ -6287,14 +6621,14 @@
       </p:sp>
       <p:sp>
         <p:nvSpPr>
-          <p:cNvPr id="32" name="Text 30"/>
-          <p:cNvSpPr/>
-          <p:nvPr/>
-        </p:nvSpPr>
-        <p:spPr>
-          <a:xfrm>
-            <a:off x="2834640" y="3977640"/>
-            <a:ext cx="5760720" cy="475488"/>
+          <p:cNvPr id="30" name="Text 28"/>
+          <p:cNvSpPr/>
+          <p:nvPr/>
+        </p:nvSpPr>
+        <p:spPr>
+          <a:xfrm>
+            <a:off x="2834640" y="3383280"/>
+            <a:ext cx="5760720" cy="429768"/>
           </a:xfrm>
           <a:prstGeom prst="rect">
             <a:avLst/>
@@ -6318,7 +6652,7 @@
                 <a:ea typeface="Calibri" pitchFamily="34" charset="-122"/>
                 <a:cs typeface="Calibri" pitchFamily="34" charset="-120"/>
               </a:rPr>
-              <a:t>Hash irréversible pour mots de passe (jamais en clair !)</a:t>
+              <a:t>Hash irreversible (mots de passe)</a:t>
             </a:r>
             <a:endParaRPr lang="en-US" sz="900" dirty="0"/>
           </a:p>
